--- a/documents/ubs-treasury-risk-presentation-8-slides.pptx
+++ b/documents/ubs-treasury-risk-presentation-8-slides.pptx
@@ -6438,7 +6438,7 @@
                 </a:solidFill>
                 <a:latin typeface="Arial"/>
               </a:rPr>
-              <a:t>THE CASH CONSEQUENCE DEPENDS ON DUE DATES, COLLATERAL AND HEADROOM</a:t>
+              <a:t>FOLLOW THE EXPOSURE AS IT SPLITS INTO SETTLEMENT AND COLLATERAL NEEDS</a:t>
             </a:r>
           </a:p>
         </p:txBody>
@@ -6579,21 +6579,1246 @@
           </a:p>
         </p:txBody>
       </p:sp>
+      <p:sp>
+        <p:nvSpPr>
+          <p:cNvPr id="10" name="TextBox 9"/>
+          <p:cNvSpPr txBox="1"/>
+          <p:nvPr/>
+        </p:nvSpPr>
+        <p:spPr>
+          <a:xfrm>
+            <a:off x="621792" y="1078992"/>
+            <a:ext cx="10972800" cy="256032"/>
+          </a:xfrm>
+          <a:prstGeom prst="rect">
+            <a:avLst/>
+          </a:prstGeom>
+          <a:noFill/>
+        </p:spPr>
+        <p:txBody>
+          <a:bodyPr wrap="square" lIns="18288" rIns="18288" tIns="18288" bIns="18288" anchor="ctr">
+            <a:spAutoFit/>
+          </a:bodyPr>
+          <a:lstStyle/>
+          <a:p>
+            <a:pPr algn="l">
+              <a:spcBef>
+                <a:spcPts val="0"/>
+              </a:spcBef>
+              <a:spcAft>
+                <a:spcPts val="0"/>
+              </a:spcAft>
+            </a:pPr>
+            <a:r>
+              <a:rPr sz="950" b="1">
+                <a:solidFill>
+                  <a:srgbClr val="18232B"/>
+                </a:solidFill>
+                <a:latin typeface="Arial"/>
+              </a:rPr>
+              <a:t>A process map: one control failure creates market exposure, then two cash channels converge on liquidity.</a:t>
+            </a:r>
+          </a:p>
+        </p:txBody>
+      </p:sp>
+      <p:sp>
+        <p:nvSpPr>
+          <p:cNvPr id="11" name="Oval 10"/>
+          <p:cNvSpPr/>
+          <p:nvPr/>
+        </p:nvSpPr>
+        <p:spPr>
+          <a:xfrm>
+            <a:off x="795528" y="2423160"/>
+            <a:ext cx="676656" cy="676656"/>
+          </a:xfrm>
+          <a:prstGeom prst="ellipse">
+            <a:avLst/>
+          </a:prstGeom>
+          <a:solidFill>
+            <a:srgbClr val="C82036"/>
+          </a:solidFill>
+          <a:ln>
+            <a:noFill/>
+          </a:ln>
+        </p:spPr>
+        <p:style>
+          <a:lnRef idx="1">
+            <a:schemeClr val="accent1"/>
+          </a:lnRef>
+          <a:fillRef idx="3">
+            <a:schemeClr val="accent1"/>
+          </a:fillRef>
+          <a:effectRef idx="2">
+            <a:schemeClr val="accent1"/>
+          </a:effectRef>
+          <a:fontRef idx="minor">
+            <a:schemeClr val="lt1"/>
+          </a:fontRef>
+        </p:style>
+        <p:txBody>
+          <a:bodyPr rtlCol="0" anchor="ctr"/>
+          <a:lstStyle/>
+          <a:p>
+            <a:pPr algn="ctr"/>
+          </a:p>
+        </p:txBody>
+      </p:sp>
+      <p:sp>
+        <p:nvSpPr>
+          <p:cNvPr id="12" name="TextBox 11"/>
+          <p:cNvSpPr txBox="1"/>
+          <p:nvPr/>
+        </p:nvSpPr>
+        <p:spPr>
+          <a:xfrm>
+            <a:off x="795528" y="2615184"/>
+            <a:ext cx="676656" cy="256032"/>
+          </a:xfrm>
+          <a:prstGeom prst="rect">
+            <a:avLst/>
+          </a:prstGeom>
+          <a:noFill/>
+        </p:spPr>
+        <p:txBody>
+          <a:bodyPr wrap="square" lIns="18288" rIns="18288" tIns="18288" bIns="18288" anchor="ctr">
+            <a:spAutoFit/>
+          </a:bodyPr>
+          <a:lstStyle/>
+          <a:p>
+            <a:pPr algn="ctr">
+              <a:spcBef>
+                <a:spcPts val="0"/>
+              </a:spcBef>
+              <a:spcAft>
+                <a:spcPts val="0"/>
+              </a:spcAft>
+            </a:pPr>
+            <a:r>
+              <a:rPr sz="1300" b="1">
+                <a:solidFill>
+                  <a:srgbClr val="FFFFFF"/>
+                </a:solidFill>
+                <a:latin typeface="Arial"/>
+              </a:rPr>
+              <a:t>1</a:t>
+            </a:r>
+          </a:p>
+        </p:txBody>
+      </p:sp>
+      <p:sp>
+        <p:nvSpPr>
+          <p:cNvPr id="13" name="TextBox 12"/>
+          <p:cNvSpPr txBox="1"/>
+          <p:nvPr/>
+        </p:nvSpPr>
+        <p:spPr>
+          <a:xfrm>
+            <a:off x="288035" y="3154680"/>
+            <a:ext cx="1691640" cy="329184"/>
+          </a:xfrm>
+          <a:prstGeom prst="rect">
+            <a:avLst/>
+          </a:prstGeom>
+          <a:noFill/>
+        </p:spPr>
+        <p:txBody>
+          <a:bodyPr wrap="square" lIns="18288" rIns="18288" tIns="18288" bIns="18288" anchor="ctr">
+            <a:spAutoFit/>
+          </a:bodyPr>
+          <a:lstStyle/>
+          <a:p>
+            <a:pPr algn="ctr">
+              <a:spcBef>
+                <a:spcPts val="0"/>
+              </a:spcBef>
+              <a:spcAft>
+                <a:spcPts val="0"/>
+              </a:spcAft>
+            </a:pPr>
+            <a:r>
+              <a:rPr sz="850" b="1">
+                <a:solidFill>
+                  <a:srgbClr val="18232B"/>
+                </a:solidFill>
+                <a:latin typeface="Arial"/>
+              </a:rPr>
+              <a:t>CONTROL FAILURE</a:t>
+            </a:r>
+          </a:p>
+        </p:txBody>
+      </p:sp>
+      <p:sp>
+        <p:nvSpPr>
+          <p:cNvPr id="14" name="TextBox 13"/>
+          <p:cNvSpPr txBox="1"/>
+          <p:nvPr/>
+        </p:nvSpPr>
+        <p:spPr>
+          <a:xfrm>
+            <a:off x="288035" y="3483864"/>
+            <a:ext cx="1691640" cy="228600"/>
+          </a:xfrm>
+          <a:prstGeom prst="rect">
+            <a:avLst/>
+          </a:prstGeom>
+          <a:noFill/>
+        </p:spPr>
+        <p:txBody>
+          <a:bodyPr wrap="square" lIns="18288" rIns="18288" tIns="18288" bIns="18288" anchor="ctr">
+            <a:spAutoFit/>
+          </a:bodyPr>
+          <a:lstStyle/>
+          <a:p>
+            <a:pPr algn="ctr">
+              <a:spcBef>
+                <a:spcPts val="0"/>
+              </a:spcBef>
+              <a:spcAft>
+                <a:spcPts val="0"/>
+              </a:spcAft>
+            </a:pPr>
+            <a:r>
+              <a:rPr sz="740" b="1">
+                <a:solidFill>
+                  <a:srgbClr val="C82036"/>
+                </a:solidFill>
+                <a:latin typeface="Arial"/>
+              </a:rPr>
+              <a:t>Verification gap</a:t>
+            </a:r>
+          </a:p>
+        </p:txBody>
+      </p:sp>
+      <p:sp>
+        <p:nvSpPr>
+          <p:cNvPr id="15" name="Oval 14"/>
+          <p:cNvSpPr/>
+          <p:nvPr/>
+        </p:nvSpPr>
+        <p:spPr>
+          <a:xfrm>
+            <a:off x="2788920" y="2423160"/>
+            <a:ext cx="676656" cy="676656"/>
+          </a:xfrm>
+          <a:prstGeom prst="ellipse">
+            <a:avLst/>
+          </a:prstGeom>
+          <a:solidFill>
+            <a:srgbClr val="C82036"/>
+          </a:solidFill>
+          <a:ln>
+            <a:noFill/>
+          </a:ln>
+        </p:spPr>
+        <p:style>
+          <a:lnRef idx="1">
+            <a:schemeClr val="accent1"/>
+          </a:lnRef>
+          <a:fillRef idx="3">
+            <a:schemeClr val="accent1"/>
+          </a:fillRef>
+          <a:effectRef idx="2">
+            <a:schemeClr val="accent1"/>
+          </a:effectRef>
+          <a:fontRef idx="minor">
+            <a:schemeClr val="lt1"/>
+          </a:fontRef>
+        </p:style>
+        <p:txBody>
+          <a:bodyPr rtlCol="0" anchor="ctr"/>
+          <a:lstStyle/>
+          <a:p>
+            <a:pPr algn="ctr"/>
+          </a:p>
+        </p:txBody>
+      </p:sp>
+      <p:sp>
+        <p:nvSpPr>
+          <p:cNvPr id="16" name="TextBox 15"/>
+          <p:cNvSpPr txBox="1"/>
+          <p:nvPr/>
+        </p:nvSpPr>
+        <p:spPr>
+          <a:xfrm>
+            <a:off x="2788920" y="2615184"/>
+            <a:ext cx="676656" cy="256032"/>
+          </a:xfrm>
+          <a:prstGeom prst="rect">
+            <a:avLst/>
+          </a:prstGeom>
+          <a:noFill/>
+        </p:spPr>
+        <p:txBody>
+          <a:bodyPr wrap="square" lIns="18288" rIns="18288" tIns="18288" bIns="18288" anchor="ctr">
+            <a:spAutoFit/>
+          </a:bodyPr>
+          <a:lstStyle/>
+          <a:p>
+            <a:pPr algn="ctr">
+              <a:spcBef>
+                <a:spcPts val="0"/>
+              </a:spcBef>
+              <a:spcAft>
+                <a:spcPts val="0"/>
+              </a:spcAft>
+            </a:pPr>
+            <a:r>
+              <a:rPr sz="1300" b="1">
+                <a:solidFill>
+                  <a:srgbClr val="FFFFFF"/>
+                </a:solidFill>
+                <a:latin typeface="Arial"/>
+              </a:rPr>
+              <a:t>2</a:t>
+            </a:r>
+          </a:p>
+        </p:txBody>
+      </p:sp>
+      <p:sp>
+        <p:nvSpPr>
+          <p:cNvPr id="17" name="TextBox 16"/>
+          <p:cNvSpPr txBox="1"/>
+          <p:nvPr/>
+        </p:nvSpPr>
+        <p:spPr>
+          <a:xfrm>
+            <a:off x="2258568" y="3154680"/>
+            <a:ext cx="1737360" cy="329184"/>
+          </a:xfrm>
+          <a:prstGeom prst="rect">
+            <a:avLst/>
+          </a:prstGeom>
+          <a:noFill/>
+        </p:spPr>
+        <p:txBody>
+          <a:bodyPr wrap="square" lIns="18288" rIns="18288" tIns="18288" bIns="18288" anchor="ctr">
+            <a:spAutoFit/>
+          </a:bodyPr>
+          <a:lstStyle/>
+          <a:p>
+            <a:pPr algn="ctr">
+              <a:spcBef>
+                <a:spcPts val="0"/>
+              </a:spcBef>
+              <a:spcAft>
+                <a:spcPts val="0"/>
+              </a:spcAft>
+            </a:pPr>
+            <a:r>
+              <a:rPr sz="850" b="1">
+                <a:solidFill>
+                  <a:srgbClr val="18232B"/>
+                </a:solidFill>
+                <a:latin typeface="Arial"/>
+              </a:rPr>
+              <a:t>HIDDEN POSITIONS</a:t>
+            </a:r>
+          </a:p>
+        </p:txBody>
+      </p:sp>
+      <p:sp>
+        <p:nvSpPr>
+          <p:cNvPr id="18" name="TextBox 17"/>
+          <p:cNvSpPr txBox="1"/>
+          <p:nvPr/>
+        </p:nvSpPr>
+        <p:spPr>
+          <a:xfrm>
+            <a:off x="2258568" y="3483864"/>
+            <a:ext cx="1737360" cy="228600"/>
+          </a:xfrm>
+          <a:prstGeom prst="rect">
+            <a:avLst/>
+          </a:prstGeom>
+          <a:noFill/>
+        </p:spPr>
+        <p:txBody>
+          <a:bodyPr wrap="square" lIns="18288" rIns="18288" tIns="18288" bIns="18288" anchor="ctr">
+            <a:spAutoFit/>
+          </a:bodyPr>
+          <a:lstStyle/>
+          <a:p>
+            <a:pPr algn="ctr">
+              <a:spcBef>
+                <a:spcPts val="0"/>
+              </a:spcBef>
+              <a:spcAft>
+                <a:spcPts val="0"/>
+              </a:spcAft>
+            </a:pPr>
+            <a:r>
+              <a:rPr sz="740" b="1">
+                <a:solidFill>
+                  <a:srgbClr val="C82036"/>
+                </a:solidFill>
+                <a:latin typeface="Arial"/>
+              </a:rPr>
+              <a:t>False offsets</a:t>
+            </a:r>
+          </a:p>
+        </p:txBody>
+      </p:sp>
+      <p:sp>
+        <p:nvSpPr>
+          <p:cNvPr id="19" name="Oval 18"/>
+          <p:cNvSpPr/>
+          <p:nvPr/>
+        </p:nvSpPr>
+        <p:spPr>
+          <a:xfrm>
+            <a:off x="4809744" y="2423160"/>
+            <a:ext cx="676656" cy="676656"/>
+          </a:xfrm>
+          <a:prstGeom prst="ellipse">
+            <a:avLst/>
+          </a:prstGeom>
+          <a:solidFill>
+            <a:srgbClr val="C82036"/>
+          </a:solidFill>
+          <a:ln>
+            <a:noFill/>
+          </a:ln>
+        </p:spPr>
+        <p:style>
+          <a:lnRef idx="1">
+            <a:schemeClr val="accent1"/>
+          </a:lnRef>
+          <a:fillRef idx="3">
+            <a:schemeClr val="accent1"/>
+          </a:fillRef>
+          <a:effectRef idx="2">
+            <a:schemeClr val="accent1"/>
+          </a:effectRef>
+          <a:fontRef idx="minor">
+            <a:schemeClr val="lt1"/>
+          </a:fontRef>
+        </p:style>
+        <p:txBody>
+          <a:bodyPr rtlCol="0" anchor="ctr"/>
+          <a:lstStyle/>
+          <a:p>
+            <a:pPr algn="ctr"/>
+          </a:p>
+        </p:txBody>
+      </p:sp>
+      <p:sp>
+        <p:nvSpPr>
+          <p:cNvPr id="20" name="TextBox 19"/>
+          <p:cNvSpPr txBox="1"/>
+          <p:nvPr/>
+        </p:nvSpPr>
+        <p:spPr>
+          <a:xfrm>
+            <a:off x="4809744" y="2615184"/>
+            <a:ext cx="676656" cy="256032"/>
+          </a:xfrm>
+          <a:prstGeom prst="rect">
+            <a:avLst/>
+          </a:prstGeom>
+          <a:noFill/>
+        </p:spPr>
+        <p:txBody>
+          <a:bodyPr wrap="square" lIns="18288" rIns="18288" tIns="18288" bIns="18288" anchor="ctr">
+            <a:spAutoFit/>
+          </a:bodyPr>
+          <a:lstStyle/>
+          <a:p>
+            <a:pPr algn="ctr">
+              <a:spcBef>
+                <a:spcPts val="0"/>
+              </a:spcBef>
+              <a:spcAft>
+                <a:spcPts val="0"/>
+              </a:spcAft>
+            </a:pPr>
+            <a:r>
+              <a:rPr sz="1300" b="1">
+                <a:solidFill>
+                  <a:srgbClr val="FFFFFF"/>
+                </a:solidFill>
+                <a:latin typeface="Arial"/>
+              </a:rPr>
+              <a:t>3</a:t>
+            </a:r>
+          </a:p>
+        </p:txBody>
+      </p:sp>
+      <p:sp>
+        <p:nvSpPr>
+          <p:cNvPr id="21" name="TextBox 20"/>
+          <p:cNvSpPr txBox="1"/>
+          <p:nvPr/>
+        </p:nvSpPr>
+        <p:spPr>
+          <a:xfrm>
+            <a:off x="4347972" y="3154680"/>
+            <a:ext cx="1600200" cy="329184"/>
+          </a:xfrm>
+          <a:prstGeom prst="rect">
+            <a:avLst/>
+          </a:prstGeom>
+          <a:noFill/>
+        </p:spPr>
+        <p:txBody>
+          <a:bodyPr wrap="square" lIns="18288" rIns="18288" tIns="18288" bIns="18288" anchor="ctr">
+            <a:spAutoFit/>
+          </a:bodyPr>
+          <a:lstStyle/>
+          <a:p>
+            <a:pPr algn="ctr">
+              <a:spcBef>
+                <a:spcPts val="0"/>
+              </a:spcBef>
+              <a:spcAft>
+                <a:spcPts val="0"/>
+              </a:spcAft>
+            </a:pPr>
+            <a:r>
+              <a:rPr sz="850" b="1">
+                <a:solidFill>
+                  <a:srgbClr val="18232B"/>
+                </a:solidFill>
+                <a:latin typeface="Arial"/>
+              </a:rPr>
+              <a:t>TRADING LOSS</a:t>
+            </a:r>
+          </a:p>
+        </p:txBody>
+      </p:sp>
+      <p:sp>
+        <p:nvSpPr>
+          <p:cNvPr id="22" name="TextBox 21"/>
+          <p:cNvSpPr txBox="1"/>
+          <p:nvPr/>
+        </p:nvSpPr>
+        <p:spPr>
+          <a:xfrm>
+            <a:off x="4347972" y="3483864"/>
+            <a:ext cx="1600200" cy="228600"/>
+          </a:xfrm>
+          <a:prstGeom prst="rect">
+            <a:avLst/>
+          </a:prstGeom>
+          <a:noFill/>
+        </p:spPr>
+        <p:txBody>
+          <a:bodyPr wrap="square" lIns="18288" rIns="18288" tIns="18288" bIns="18288" anchor="ctr">
+            <a:spAutoFit/>
+          </a:bodyPr>
+          <a:lstStyle/>
+          <a:p>
+            <a:pPr algn="ctr">
+              <a:spcBef>
+                <a:spcPts val="0"/>
+              </a:spcBef>
+              <a:spcAft>
+                <a:spcPts val="0"/>
+              </a:spcAft>
+            </a:pPr>
+            <a:r>
+              <a:rPr sz="740" b="1">
+                <a:solidFill>
+                  <a:srgbClr val="C82036"/>
+                </a:solidFill>
+                <a:latin typeface="Arial"/>
+              </a:rPr>
+              <a:t>USD 2.3bn</a:t>
+            </a:r>
+          </a:p>
+        </p:txBody>
+      </p:sp>
+      <p:sp>
+        <p:nvSpPr>
+          <p:cNvPr id="23" name="Oval 22"/>
+          <p:cNvSpPr/>
+          <p:nvPr/>
+        </p:nvSpPr>
+        <p:spPr>
+          <a:xfrm>
+            <a:off x="6428232" y="1563624"/>
+            <a:ext cx="676656" cy="676656"/>
+          </a:xfrm>
+          <a:prstGeom prst="ellipse">
+            <a:avLst/>
+          </a:prstGeom>
+          <a:solidFill>
+            <a:srgbClr val="C49500"/>
+          </a:solidFill>
+          <a:ln>
+            <a:noFill/>
+          </a:ln>
+        </p:spPr>
+        <p:style>
+          <a:lnRef idx="1">
+            <a:schemeClr val="accent1"/>
+          </a:lnRef>
+          <a:fillRef idx="3">
+            <a:schemeClr val="accent1"/>
+          </a:fillRef>
+          <a:effectRef idx="2">
+            <a:schemeClr val="accent1"/>
+          </a:effectRef>
+          <a:fontRef idx="minor">
+            <a:schemeClr val="lt1"/>
+          </a:fontRef>
+        </p:style>
+        <p:txBody>
+          <a:bodyPr rtlCol="0" anchor="ctr"/>
+          <a:lstStyle/>
+          <a:p>
+            <a:pPr algn="ctr"/>
+          </a:p>
+        </p:txBody>
+      </p:sp>
+      <p:sp>
+        <p:nvSpPr>
+          <p:cNvPr id="24" name="TextBox 23"/>
+          <p:cNvSpPr txBox="1"/>
+          <p:nvPr/>
+        </p:nvSpPr>
+        <p:spPr>
+          <a:xfrm>
+            <a:off x="6428232" y="1755648"/>
+            <a:ext cx="676656" cy="256032"/>
+          </a:xfrm>
+          <a:prstGeom prst="rect">
+            <a:avLst/>
+          </a:prstGeom>
+          <a:noFill/>
+        </p:spPr>
+        <p:txBody>
+          <a:bodyPr wrap="square" lIns="18288" rIns="18288" tIns="18288" bIns="18288" anchor="ctr">
+            <a:spAutoFit/>
+          </a:bodyPr>
+          <a:lstStyle/>
+          <a:p>
+            <a:pPr algn="ctr">
+              <a:spcBef>
+                <a:spcPts val="0"/>
+              </a:spcBef>
+              <a:spcAft>
+                <a:spcPts val="0"/>
+              </a:spcAft>
+            </a:pPr>
+            <a:r>
+              <a:rPr sz="1300" b="1">
+                <a:solidFill>
+                  <a:srgbClr val="FFFFFF"/>
+                </a:solidFill>
+                <a:latin typeface="Arial"/>
+              </a:rPr>
+              <a:t>4A</a:t>
+            </a:r>
+          </a:p>
+        </p:txBody>
+      </p:sp>
+      <p:sp>
+        <p:nvSpPr>
+          <p:cNvPr id="25" name="TextBox 24"/>
+          <p:cNvSpPr txBox="1"/>
+          <p:nvPr/>
+        </p:nvSpPr>
+        <p:spPr>
+          <a:xfrm>
+            <a:off x="5998464" y="2258568"/>
+            <a:ext cx="1536192" cy="329184"/>
+          </a:xfrm>
+          <a:prstGeom prst="rect">
+            <a:avLst/>
+          </a:prstGeom>
+          <a:noFill/>
+        </p:spPr>
+        <p:txBody>
+          <a:bodyPr wrap="square" lIns="18288" rIns="18288" tIns="18288" bIns="18288" anchor="ctr">
+            <a:spAutoFit/>
+          </a:bodyPr>
+          <a:lstStyle/>
+          <a:p>
+            <a:pPr algn="ctr">
+              <a:spcBef>
+                <a:spcPts val="0"/>
+              </a:spcBef>
+              <a:spcAft>
+                <a:spcPts val="0"/>
+              </a:spcAft>
+            </a:pPr>
+            <a:r>
+              <a:rPr sz="850" b="1">
+                <a:solidFill>
+                  <a:srgbClr val="18232B"/>
+                </a:solidFill>
+                <a:latin typeface="Arial"/>
+              </a:rPr>
+              <a:t>SETTLEMENT</a:t>
+            </a:r>
+          </a:p>
+        </p:txBody>
+      </p:sp>
+      <p:sp>
+        <p:nvSpPr>
+          <p:cNvPr id="26" name="TextBox 25"/>
+          <p:cNvSpPr txBox="1"/>
+          <p:nvPr/>
+        </p:nvSpPr>
+        <p:spPr>
+          <a:xfrm>
+            <a:off x="5998464" y="2587752"/>
+            <a:ext cx="1536192" cy="228600"/>
+          </a:xfrm>
+          <a:prstGeom prst="rect">
+            <a:avLst/>
+          </a:prstGeom>
+          <a:noFill/>
+        </p:spPr>
+        <p:txBody>
+          <a:bodyPr wrap="square" lIns="18288" rIns="18288" tIns="18288" bIns="18288" anchor="ctr">
+            <a:spAutoFit/>
+          </a:bodyPr>
+          <a:lstStyle/>
+          <a:p>
+            <a:pPr algn="ctr">
+              <a:spcBef>
+                <a:spcPts val="0"/>
+              </a:spcBef>
+              <a:spcAft>
+                <a:spcPts val="0"/>
+              </a:spcAft>
+            </a:pPr>
+            <a:r>
+              <a:rPr sz="740" b="1">
+                <a:solidFill>
+                  <a:srgbClr val="C49500"/>
+                </a:solidFill>
+                <a:latin typeface="Arial"/>
+              </a:rPr>
+              <a:t>Cash due</a:t>
+            </a:r>
+          </a:p>
+        </p:txBody>
+      </p:sp>
+      <p:sp>
+        <p:nvSpPr>
+          <p:cNvPr id="27" name="Oval 26"/>
+          <p:cNvSpPr/>
+          <p:nvPr/>
+        </p:nvSpPr>
+        <p:spPr>
+          <a:xfrm>
+            <a:off x="6428232" y="3337559"/>
+            <a:ext cx="676656" cy="676656"/>
+          </a:xfrm>
+          <a:prstGeom prst="ellipse">
+            <a:avLst/>
+          </a:prstGeom>
+          <a:solidFill>
+            <a:srgbClr val="C49500"/>
+          </a:solidFill>
+          <a:ln>
+            <a:noFill/>
+          </a:ln>
+        </p:spPr>
+        <p:style>
+          <a:lnRef idx="1">
+            <a:schemeClr val="accent1"/>
+          </a:lnRef>
+          <a:fillRef idx="3">
+            <a:schemeClr val="accent1"/>
+          </a:fillRef>
+          <a:effectRef idx="2">
+            <a:schemeClr val="accent1"/>
+          </a:effectRef>
+          <a:fontRef idx="minor">
+            <a:schemeClr val="lt1"/>
+          </a:fontRef>
+        </p:style>
+        <p:txBody>
+          <a:bodyPr rtlCol="0" anchor="ctr"/>
+          <a:lstStyle/>
+          <a:p>
+            <a:pPr algn="ctr"/>
+          </a:p>
+        </p:txBody>
+      </p:sp>
+      <p:sp>
+        <p:nvSpPr>
+          <p:cNvPr id="28" name="TextBox 27"/>
+          <p:cNvSpPr txBox="1"/>
+          <p:nvPr/>
+        </p:nvSpPr>
+        <p:spPr>
+          <a:xfrm>
+            <a:off x="6428232" y="3529583"/>
+            <a:ext cx="676656" cy="256032"/>
+          </a:xfrm>
+          <a:prstGeom prst="rect">
+            <a:avLst/>
+          </a:prstGeom>
+          <a:noFill/>
+        </p:spPr>
+        <p:txBody>
+          <a:bodyPr wrap="square" lIns="18288" rIns="18288" tIns="18288" bIns="18288" anchor="ctr">
+            <a:spAutoFit/>
+          </a:bodyPr>
+          <a:lstStyle/>
+          <a:p>
+            <a:pPr algn="ctr">
+              <a:spcBef>
+                <a:spcPts val="0"/>
+              </a:spcBef>
+              <a:spcAft>
+                <a:spcPts val="0"/>
+              </a:spcAft>
+            </a:pPr>
+            <a:r>
+              <a:rPr sz="1300" b="1">
+                <a:solidFill>
+                  <a:srgbClr val="FFFFFF"/>
+                </a:solidFill>
+                <a:latin typeface="Arial"/>
+              </a:rPr>
+              <a:t>4B</a:t>
+            </a:r>
+          </a:p>
+        </p:txBody>
+      </p:sp>
+      <p:sp>
+        <p:nvSpPr>
+          <p:cNvPr id="29" name="TextBox 28"/>
+          <p:cNvSpPr txBox="1"/>
+          <p:nvPr/>
+        </p:nvSpPr>
+        <p:spPr>
+          <a:xfrm>
+            <a:off x="5897880" y="4050791"/>
+            <a:ext cx="1737360" cy="329184"/>
+          </a:xfrm>
+          <a:prstGeom prst="rect">
+            <a:avLst/>
+          </a:prstGeom>
+          <a:noFill/>
+        </p:spPr>
+        <p:txBody>
+          <a:bodyPr wrap="square" lIns="18288" rIns="18288" tIns="18288" bIns="18288" anchor="ctr">
+            <a:spAutoFit/>
+          </a:bodyPr>
+          <a:lstStyle/>
+          <a:p>
+            <a:pPr algn="ctr">
+              <a:spcBef>
+                <a:spcPts val="0"/>
+              </a:spcBef>
+              <a:spcAft>
+                <a:spcPts val="0"/>
+              </a:spcAft>
+            </a:pPr>
+            <a:r>
+              <a:rPr sz="850" b="1">
+                <a:solidFill>
+                  <a:srgbClr val="18232B"/>
+                </a:solidFill>
+                <a:latin typeface="Arial"/>
+              </a:rPr>
+              <a:t>COLLATERAL</a:t>
+            </a:r>
+          </a:p>
+        </p:txBody>
+      </p:sp>
+      <p:sp>
+        <p:nvSpPr>
+          <p:cNvPr id="30" name="TextBox 29"/>
+          <p:cNvSpPr txBox="1"/>
+          <p:nvPr/>
+        </p:nvSpPr>
+        <p:spPr>
+          <a:xfrm>
+            <a:off x="5897880" y="4379976"/>
+            <a:ext cx="1737360" cy="228600"/>
+          </a:xfrm>
+          <a:prstGeom prst="rect">
+            <a:avLst/>
+          </a:prstGeom>
+          <a:noFill/>
+        </p:spPr>
+        <p:txBody>
+          <a:bodyPr wrap="square" lIns="18288" rIns="18288" tIns="18288" bIns="18288" anchor="ctr">
+            <a:spAutoFit/>
+          </a:bodyPr>
+          <a:lstStyle/>
+          <a:p>
+            <a:pPr algn="ctr">
+              <a:spcBef>
+                <a:spcPts val="0"/>
+              </a:spcBef>
+              <a:spcAft>
+                <a:spcPts val="0"/>
+              </a:spcAft>
+            </a:pPr>
+            <a:r>
+              <a:rPr sz="740" b="1">
+                <a:solidFill>
+                  <a:srgbClr val="C49500"/>
+                </a:solidFill>
+                <a:latin typeface="Arial"/>
+              </a:rPr>
+              <a:t>Calls / delayed returns</a:t>
+            </a:r>
+          </a:p>
+        </p:txBody>
+      </p:sp>
+      <p:sp>
+        <p:nvSpPr>
+          <p:cNvPr id="31" name="Oval 30"/>
+          <p:cNvSpPr/>
+          <p:nvPr/>
+        </p:nvSpPr>
+        <p:spPr>
+          <a:xfrm>
+            <a:off x="8348472" y="2423160"/>
+            <a:ext cx="676656" cy="676656"/>
+          </a:xfrm>
+          <a:prstGeom prst="ellipse">
+            <a:avLst/>
+          </a:prstGeom>
+          <a:solidFill>
+            <a:srgbClr val="C49500"/>
+          </a:solidFill>
+          <a:ln>
+            <a:noFill/>
+          </a:ln>
+        </p:spPr>
+        <p:style>
+          <a:lnRef idx="1">
+            <a:schemeClr val="accent1"/>
+          </a:lnRef>
+          <a:fillRef idx="3">
+            <a:schemeClr val="accent1"/>
+          </a:fillRef>
+          <a:effectRef idx="2">
+            <a:schemeClr val="accent1"/>
+          </a:effectRef>
+          <a:fontRef idx="minor">
+            <a:schemeClr val="lt1"/>
+          </a:fontRef>
+        </p:style>
+        <p:txBody>
+          <a:bodyPr rtlCol="0" anchor="ctr"/>
+          <a:lstStyle/>
+          <a:p>
+            <a:pPr algn="ctr"/>
+          </a:p>
+        </p:txBody>
+      </p:sp>
+      <p:sp>
+        <p:nvSpPr>
+          <p:cNvPr id="32" name="TextBox 31"/>
+          <p:cNvSpPr txBox="1"/>
+          <p:nvPr/>
+        </p:nvSpPr>
+        <p:spPr>
+          <a:xfrm>
+            <a:off x="8348472" y="2615184"/>
+            <a:ext cx="676656" cy="256032"/>
+          </a:xfrm>
+          <a:prstGeom prst="rect">
+            <a:avLst/>
+          </a:prstGeom>
+          <a:noFill/>
+        </p:spPr>
+        <p:txBody>
+          <a:bodyPr wrap="square" lIns="18288" rIns="18288" tIns="18288" bIns="18288" anchor="ctr">
+            <a:spAutoFit/>
+          </a:bodyPr>
+          <a:lstStyle/>
+          <a:p>
+            <a:pPr algn="ctr">
+              <a:spcBef>
+                <a:spcPts val="0"/>
+              </a:spcBef>
+              <a:spcAft>
+                <a:spcPts val="0"/>
+              </a:spcAft>
+            </a:pPr>
+            <a:r>
+              <a:rPr sz="1300" b="1">
+                <a:solidFill>
+                  <a:srgbClr val="FFFFFF"/>
+                </a:solidFill>
+                <a:latin typeface="Arial"/>
+              </a:rPr>
+              <a:t>5</a:t>
+            </a:r>
+          </a:p>
+        </p:txBody>
+      </p:sp>
+      <p:sp>
+        <p:nvSpPr>
+          <p:cNvPr id="33" name="TextBox 32"/>
+          <p:cNvSpPr txBox="1"/>
+          <p:nvPr/>
+        </p:nvSpPr>
+        <p:spPr>
+          <a:xfrm>
+            <a:off x="7749540" y="3154680"/>
+            <a:ext cx="1874519" cy="329184"/>
+          </a:xfrm>
+          <a:prstGeom prst="rect">
+            <a:avLst/>
+          </a:prstGeom>
+          <a:noFill/>
+        </p:spPr>
+        <p:txBody>
+          <a:bodyPr wrap="square" lIns="18288" rIns="18288" tIns="18288" bIns="18288" anchor="ctr">
+            <a:spAutoFit/>
+          </a:bodyPr>
+          <a:lstStyle/>
+          <a:p>
+            <a:pPr algn="ctr">
+              <a:spcBef>
+                <a:spcPts val="0"/>
+              </a:spcBef>
+              <a:spcAft>
+                <a:spcPts val="0"/>
+              </a:spcAft>
+            </a:pPr>
+            <a:r>
+              <a:rPr sz="850" b="1">
+                <a:solidFill>
+                  <a:srgbClr val="18232B"/>
+                </a:solidFill>
+                <a:latin typeface="Arial"/>
+              </a:rPr>
+              <a:t>LIQUIDITY PRESSURE</a:t>
+            </a:r>
+          </a:p>
+        </p:txBody>
+      </p:sp>
+      <p:sp>
+        <p:nvSpPr>
+          <p:cNvPr id="34" name="TextBox 33"/>
+          <p:cNvSpPr txBox="1"/>
+          <p:nvPr/>
+        </p:nvSpPr>
+        <p:spPr>
+          <a:xfrm>
+            <a:off x="7749540" y="3483864"/>
+            <a:ext cx="1874519" cy="228600"/>
+          </a:xfrm>
+          <a:prstGeom prst="rect">
+            <a:avLst/>
+          </a:prstGeom>
+          <a:noFill/>
+        </p:spPr>
+        <p:txBody>
+          <a:bodyPr wrap="square" lIns="18288" rIns="18288" tIns="18288" bIns="18288" anchor="ctr">
+            <a:spAutoFit/>
+          </a:bodyPr>
+          <a:lstStyle/>
+          <a:p>
+            <a:pPr algn="ctr">
+              <a:spcBef>
+                <a:spcPts val="0"/>
+              </a:spcBef>
+              <a:spcAft>
+                <a:spcPts val="0"/>
+              </a:spcAft>
+            </a:pPr>
+            <a:r>
+              <a:rPr sz="740" b="1">
+                <a:solidFill>
+                  <a:srgbClr val="C49500"/>
+                </a:solidFill>
+                <a:latin typeface="Arial"/>
+              </a:rPr>
+              <a:t>Buffer at risk</a:t>
+            </a:r>
+          </a:p>
+        </p:txBody>
+      </p:sp>
+      <p:sp>
+        <p:nvSpPr>
+          <p:cNvPr id="35" name="Oval 34"/>
+          <p:cNvSpPr/>
+          <p:nvPr/>
+        </p:nvSpPr>
+        <p:spPr>
+          <a:xfrm>
+            <a:off x="10387584" y="2423160"/>
+            <a:ext cx="676656" cy="676656"/>
+          </a:xfrm>
+          <a:prstGeom prst="ellipse">
+            <a:avLst/>
+          </a:prstGeom>
+          <a:solidFill>
+            <a:srgbClr val="008F72"/>
+          </a:solidFill>
+          <a:ln>
+            <a:noFill/>
+          </a:ln>
+        </p:spPr>
+        <p:style>
+          <a:lnRef idx="1">
+            <a:schemeClr val="accent1"/>
+          </a:lnRef>
+          <a:fillRef idx="3">
+            <a:schemeClr val="accent1"/>
+          </a:fillRef>
+          <a:effectRef idx="2">
+            <a:schemeClr val="accent1"/>
+          </a:effectRef>
+          <a:fontRef idx="minor">
+            <a:schemeClr val="lt1"/>
+          </a:fontRef>
+        </p:style>
+        <p:txBody>
+          <a:bodyPr rtlCol="0" anchor="ctr"/>
+          <a:lstStyle/>
+          <a:p>
+            <a:pPr algn="ctr"/>
+          </a:p>
+        </p:txBody>
+      </p:sp>
+      <p:sp>
+        <p:nvSpPr>
+          <p:cNvPr id="36" name="TextBox 35"/>
+          <p:cNvSpPr txBox="1"/>
+          <p:nvPr/>
+        </p:nvSpPr>
+        <p:spPr>
+          <a:xfrm>
+            <a:off x="10387584" y="2615184"/>
+            <a:ext cx="676656" cy="256032"/>
+          </a:xfrm>
+          <a:prstGeom prst="rect">
+            <a:avLst/>
+          </a:prstGeom>
+          <a:noFill/>
+        </p:spPr>
+        <p:txBody>
+          <a:bodyPr wrap="square" lIns="18288" rIns="18288" tIns="18288" bIns="18288" anchor="ctr">
+            <a:spAutoFit/>
+          </a:bodyPr>
+          <a:lstStyle/>
+          <a:p>
+            <a:pPr algn="ctr">
+              <a:spcBef>
+                <a:spcPts val="0"/>
+              </a:spcBef>
+              <a:spcAft>
+                <a:spcPts val="0"/>
+              </a:spcAft>
+            </a:pPr>
+            <a:r>
+              <a:rPr sz="1300" b="1">
+                <a:solidFill>
+                  <a:srgbClr val="FFFFFF"/>
+                </a:solidFill>
+                <a:latin typeface="Arial"/>
+              </a:rPr>
+              <a:t>6</a:t>
+            </a:r>
+          </a:p>
+        </p:txBody>
+      </p:sp>
+      <p:sp>
+        <p:nvSpPr>
+          <p:cNvPr id="37" name="TextBox 36"/>
+          <p:cNvSpPr txBox="1"/>
+          <p:nvPr/>
+        </p:nvSpPr>
+        <p:spPr>
+          <a:xfrm>
+            <a:off x="9811512" y="3154680"/>
+            <a:ext cx="1828800" cy="329184"/>
+          </a:xfrm>
+          <a:prstGeom prst="rect">
+            <a:avLst/>
+          </a:prstGeom>
+          <a:noFill/>
+        </p:spPr>
+        <p:txBody>
+          <a:bodyPr wrap="square" lIns="18288" rIns="18288" tIns="18288" bIns="18288" anchor="ctr">
+            <a:spAutoFit/>
+          </a:bodyPr>
+          <a:lstStyle/>
+          <a:p>
+            <a:pPr algn="ctr">
+              <a:spcBef>
+                <a:spcPts val="0"/>
+              </a:spcBef>
+              <a:spcAft>
+                <a:spcPts val="0"/>
+              </a:spcAft>
+            </a:pPr>
+            <a:r>
+              <a:rPr sz="850" b="1">
+                <a:solidFill>
+                  <a:srgbClr val="18232B"/>
+                </a:solidFill>
+                <a:latin typeface="Arial"/>
+              </a:rPr>
+              <a:t>TREASURY RESPONSE</a:t>
+            </a:r>
+          </a:p>
+        </p:txBody>
+      </p:sp>
+      <p:sp>
+        <p:nvSpPr>
+          <p:cNvPr id="38" name="TextBox 37"/>
+          <p:cNvSpPr txBox="1"/>
+          <p:nvPr/>
+        </p:nvSpPr>
+        <p:spPr>
+          <a:xfrm>
+            <a:off x="9811512" y="3483864"/>
+            <a:ext cx="1828800" cy="228600"/>
+          </a:xfrm>
+          <a:prstGeom prst="rect">
+            <a:avLst/>
+          </a:prstGeom>
+          <a:noFill/>
+        </p:spPr>
+        <p:txBody>
+          <a:bodyPr wrap="square" lIns="18288" rIns="18288" tIns="18288" bIns="18288" anchor="ctr">
+            <a:spAutoFit/>
+          </a:bodyPr>
+          <a:lstStyle/>
+          <a:p>
+            <a:pPr algn="ctr">
+              <a:spcBef>
+                <a:spcPts val="0"/>
+              </a:spcBef>
+              <a:spcAft>
+                <a:spcPts val="0"/>
+              </a:spcAft>
+            </a:pPr>
+            <a:r>
+              <a:rPr sz="740" b="1">
+                <a:solidFill>
+                  <a:srgbClr val="008F72"/>
+                </a:solidFill>
+                <a:latin typeface="Arial"/>
+              </a:rPr>
+              <a:t>Funding action</a:t>
+            </a:r>
+          </a:p>
+        </p:txBody>
+      </p:sp>
       <p:cxnSp>
         <p:nvCxnSpPr>
-          <p:cNvPr id="10" name="Connector 9"/>
+          <p:cNvPr id="39" name="Connector 38"/>
           <p:cNvCxnSpPr/>
           <p:nvPr/>
         </p:nvCxnSpPr>
         <p:spPr>
           <a:xfrm>
-            <a:off x="2788920" y="1947672"/>
-            <a:ext cx="1783080" cy="0"/>
+            <a:off x="1481328" y="2761488"/>
+            <a:ext cx="1280160" cy="0"/>
           </a:xfrm>
           <a:prstGeom prst="line">
             <a:avLst/>
           </a:prstGeom>
-          <a:ln w="25400">
+          <a:ln w="26670">
             <a:solidFill>
               <a:srgbClr val="C82036"/>
             </a:solidFill>
@@ -6616,16 +7841,16 @@
       </p:cxnSp>
       <p:sp>
         <p:nvSpPr>
-          <p:cNvPr id="11" name="Chevron 10"/>
+          <p:cNvPr id="40" name="Isosceles Triangle 39"/>
           <p:cNvSpPr/>
           <p:nvPr/>
         </p:nvSpPr>
         <p:spPr>
-          <a:xfrm>
-            <a:off x="4297680" y="1856231"/>
-            <a:ext cx="164592" cy="164592"/>
-          </a:xfrm>
-          <a:prstGeom prst="chevron">
+          <a:xfrm rot="5400000">
+            <a:off x="2670048" y="2670048"/>
+            <a:ext cx="182880" cy="182880"/>
+          </a:xfrm>
+          <a:prstGeom prst="triangle">
             <a:avLst/>
           </a:prstGeom>
           <a:solidFill>
@@ -6659,19 +7884,19 @@
       </p:sp>
       <p:cxnSp>
         <p:nvCxnSpPr>
-          <p:cNvPr id="12" name="Connector 11"/>
+          <p:cNvPr id="41" name="Connector 40"/>
           <p:cNvCxnSpPr/>
           <p:nvPr/>
         </p:nvCxnSpPr>
         <p:spPr>
           <a:xfrm>
-            <a:off x="6355080" y="2011680"/>
-            <a:ext cx="1709928" cy="411480"/>
+            <a:off x="3474720" y="2761488"/>
+            <a:ext cx="1307592" cy="0"/>
           </a:xfrm>
           <a:prstGeom prst="line">
             <a:avLst/>
           </a:prstGeom>
-          <a:ln w="25400">
+          <a:ln w="26670">
             <a:solidFill>
               <a:srgbClr val="C82036"/>
             </a:solidFill>
@@ -6694,16 +7919,16 @@
       </p:cxnSp>
       <p:sp>
         <p:nvSpPr>
-          <p:cNvPr id="13" name="Chevron 12"/>
+          <p:cNvPr id="42" name="Isosceles Triangle 41"/>
           <p:cNvSpPr/>
           <p:nvPr/>
         </p:nvSpPr>
         <p:spPr>
-          <a:xfrm rot="1200000">
-            <a:off x="7333488" y="2121408"/>
-            <a:ext cx="164592" cy="164592"/>
-          </a:xfrm>
-          <a:prstGeom prst="chevron">
+          <a:xfrm rot="5400000">
+            <a:off x="4690872" y="2670048"/>
+            <a:ext cx="182880" cy="182880"/>
+          </a:xfrm>
+          <a:prstGeom prst="triangle">
             <a:avLst/>
           </a:prstGeom>
           <a:solidFill>
@@ -6737,21 +7962,21 @@
       </p:sp>
       <p:cxnSp>
         <p:nvCxnSpPr>
-          <p:cNvPr id="14" name="Connector 13"/>
+          <p:cNvPr id="43" name="Connector 42"/>
           <p:cNvCxnSpPr/>
           <p:nvPr/>
         </p:nvCxnSpPr>
         <p:spPr>
-          <a:xfrm>
-            <a:off x="8778240" y="2907792"/>
-            <a:ext cx="0" cy="1042416"/>
+          <a:xfrm flipV="1">
+            <a:off x="5458968" y="2057400"/>
+            <a:ext cx="941832" cy="521208"/>
           </a:xfrm>
           <a:prstGeom prst="line">
             <a:avLst/>
           </a:prstGeom>
-          <a:ln w="25400">
+          <a:ln w="26670">
             <a:solidFill>
-              <a:srgbClr val="C49500"/>
+              <a:srgbClr val="C82036"/>
             </a:solidFill>
           </a:ln>
         </p:spPr>
@@ -6772,16 +7997,172 @@
       </p:cxnSp>
       <p:sp>
         <p:nvSpPr>
-          <p:cNvPr id="15" name="Chevron 14"/>
+          <p:cNvPr id="44" name="Isosceles Triangle 43"/>
           <p:cNvSpPr/>
           <p:nvPr/>
         </p:nvSpPr>
         <p:spPr>
-          <a:xfrm rot="5400000">
-            <a:off x="8695944" y="3429000"/>
-            <a:ext cx="164592" cy="164592"/>
-          </a:xfrm>
-          <a:prstGeom prst="chevron">
+          <a:xfrm rot="2700000">
+            <a:off x="6309360" y="1965960"/>
+            <a:ext cx="182880" cy="182880"/>
+          </a:xfrm>
+          <a:prstGeom prst="triangle">
+            <a:avLst/>
+          </a:prstGeom>
+          <a:solidFill>
+            <a:srgbClr val="C82036"/>
+          </a:solidFill>
+          <a:ln>
+            <a:noFill/>
+          </a:ln>
+        </p:spPr>
+        <p:style>
+          <a:lnRef idx="1">
+            <a:schemeClr val="accent1"/>
+          </a:lnRef>
+          <a:fillRef idx="3">
+            <a:schemeClr val="accent1"/>
+          </a:fillRef>
+          <a:effectRef idx="2">
+            <a:schemeClr val="accent1"/>
+          </a:effectRef>
+          <a:fontRef idx="minor">
+            <a:schemeClr val="lt1"/>
+          </a:fontRef>
+        </p:style>
+        <p:txBody>
+          <a:bodyPr rtlCol="0" anchor="ctr"/>
+          <a:lstStyle/>
+          <a:p>
+            <a:pPr algn="ctr"/>
+          </a:p>
+        </p:txBody>
+      </p:sp>
+      <p:cxnSp>
+        <p:nvCxnSpPr>
+          <p:cNvPr id="45" name="Connector 44"/>
+          <p:cNvCxnSpPr/>
+          <p:nvPr/>
+        </p:nvCxnSpPr>
+        <p:spPr>
+          <a:xfrm>
+            <a:off x="5458968" y="2944368"/>
+            <a:ext cx="941832" cy="557784"/>
+          </a:xfrm>
+          <a:prstGeom prst="line">
+            <a:avLst/>
+          </a:prstGeom>
+          <a:ln w="26670">
+            <a:solidFill>
+              <a:srgbClr val="C82036"/>
+            </a:solidFill>
+          </a:ln>
+        </p:spPr>
+        <p:style>
+          <a:lnRef idx="2">
+            <a:schemeClr val="accent1"/>
+          </a:lnRef>
+          <a:fillRef idx="0">
+            <a:schemeClr val="accent1"/>
+          </a:fillRef>
+          <a:effectRef idx="1">
+            <a:schemeClr val="accent1"/>
+          </a:effectRef>
+          <a:fontRef idx="minor">
+            <a:schemeClr val="tx1"/>
+          </a:fontRef>
+        </p:style>
+      </p:cxnSp>
+      <p:sp>
+        <p:nvSpPr>
+          <p:cNvPr id="46" name="Isosceles Triangle 45"/>
+          <p:cNvSpPr/>
+          <p:nvPr/>
+        </p:nvSpPr>
+        <p:spPr>
+          <a:xfrm rot="8100000">
+            <a:off x="6309360" y="3410712"/>
+            <a:ext cx="182880" cy="182880"/>
+          </a:xfrm>
+          <a:prstGeom prst="triangle">
+            <a:avLst/>
+          </a:prstGeom>
+          <a:solidFill>
+            <a:srgbClr val="C82036"/>
+          </a:solidFill>
+          <a:ln>
+            <a:noFill/>
+          </a:ln>
+        </p:spPr>
+        <p:style>
+          <a:lnRef idx="1">
+            <a:schemeClr val="accent1"/>
+          </a:lnRef>
+          <a:fillRef idx="3">
+            <a:schemeClr val="accent1"/>
+          </a:fillRef>
+          <a:effectRef idx="2">
+            <a:schemeClr val="accent1"/>
+          </a:effectRef>
+          <a:fontRef idx="minor">
+            <a:schemeClr val="lt1"/>
+          </a:fontRef>
+        </p:style>
+        <p:txBody>
+          <a:bodyPr rtlCol="0" anchor="ctr"/>
+          <a:lstStyle/>
+          <a:p>
+            <a:pPr algn="ctr"/>
+          </a:p>
+        </p:txBody>
+      </p:sp>
+      <p:cxnSp>
+        <p:nvCxnSpPr>
+          <p:cNvPr id="47" name="Connector 46"/>
+          <p:cNvCxnSpPr/>
+          <p:nvPr/>
+        </p:nvCxnSpPr>
+        <p:spPr>
+          <a:xfrm>
+            <a:off x="7114032" y="2048256"/>
+            <a:ext cx="1225295" cy="539496"/>
+          </a:xfrm>
+          <a:prstGeom prst="line">
+            <a:avLst/>
+          </a:prstGeom>
+          <a:ln w="26670">
+            <a:solidFill>
+              <a:srgbClr val="C49500"/>
+            </a:solidFill>
+          </a:ln>
+        </p:spPr>
+        <p:style>
+          <a:lnRef idx="2">
+            <a:schemeClr val="accent1"/>
+          </a:lnRef>
+          <a:fillRef idx="0">
+            <a:schemeClr val="accent1"/>
+          </a:fillRef>
+          <a:effectRef idx="1">
+            <a:schemeClr val="accent1"/>
+          </a:effectRef>
+          <a:fontRef idx="minor">
+            <a:schemeClr val="tx1"/>
+          </a:fontRef>
+        </p:style>
+      </p:cxnSp>
+      <p:sp>
+        <p:nvSpPr>
+          <p:cNvPr id="48" name="Isosceles Triangle 47"/>
+          <p:cNvSpPr/>
+          <p:nvPr/>
+        </p:nvSpPr>
+        <p:spPr>
+          <a:xfrm rot="8100000">
+            <a:off x="8247888" y="2496312"/>
+            <a:ext cx="182880" cy="182880"/>
+          </a:xfrm>
+          <a:prstGeom prst="triangle">
             <a:avLst/>
           </a:prstGeom>
           <a:solidFill>
@@ -6815,19 +8196,19 @@
       </p:sp>
       <p:cxnSp>
         <p:nvCxnSpPr>
-          <p:cNvPr id="16" name="Connector 15"/>
+          <p:cNvPr id="49" name="Connector 48"/>
           <p:cNvCxnSpPr/>
           <p:nvPr/>
         </p:nvCxnSpPr>
         <p:spPr>
-          <a:xfrm flipH="1">
-            <a:off x="6364224" y="4507992"/>
-            <a:ext cx="1453896" cy="557784"/>
+          <a:xfrm flipV="1">
+            <a:off x="7114032" y="2944368"/>
+            <a:ext cx="1225295" cy="566928"/>
           </a:xfrm>
           <a:prstGeom prst="line">
             <a:avLst/>
           </a:prstGeom>
-          <a:ln w="25400">
+          <a:ln w="26670">
             <a:solidFill>
               <a:srgbClr val="C49500"/>
             </a:solidFill>
@@ -6850,16 +8231,16 @@
       </p:cxnSp>
       <p:sp>
         <p:nvSpPr>
-          <p:cNvPr id="17" name="Chevron 16"/>
+          <p:cNvPr id="50" name="Isosceles Triangle 49"/>
           <p:cNvSpPr/>
           <p:nvPr/>
         </p:nvSpPr>
         <p:spPr>
-          <a:xfrm rot="9600000">
-            <a:off x="6821424" y="4754880"/>
-            <a:ext cx="164592" cy="164592"/>
-          </a:xfrm>
-          <a:prstGeom prst="chevron">
+          <a:xfrm rot="2700000">
+            <a:off x="8247888" y="2852928"/>
+            <a:ext cx="182880" cy="182880"/>
+          </a:xfrm>
+          <a:prstGeom prst="triangle">
             <a:avLst/>
           </a:prstGeom>
           <a:solidFill>
@@ -6893,19 +8274,19 @@
       </p:sp>
       <p:cxnSp>
         <p:nvCxnSpPr>
-          <p:cNvPr id="18" name="Connector 17"/>
+          <p:cNvPr id="51" name="Connector 50"/>
           <p:cNvCxnSpPr/>
           <p:nvPr/>
         </p:nvCxnSpPr>
         <p:spPr>
-          <a:xfrm flipH="1" flipV="1">
-            <a:off x="2788920" y="4544568"/>
-            <a:ext cx="1783080" cy="621792"/>
+          <a:xfrm>
+            <a:off x="9034272" y="2761488"/>
+            <a:ext cx="1344168" cy="0"/>
           </a:xfrm>
           <a:prstGeom prst="line">
             <a:avLst/>
           </a:prstGeom>
-          <a:ln w="25400">
+          <a:ln w="26670">
             <a:solidFill>
               <a:srgbClr val="008F72"/>
             </a:solidFill>
@@ -6928,16 +8309,16 @@
       </p:cxnSp>
       <p:sp>
         <p:nvSpPr>
-          <p:cNvPr id="19" name="Chevron 18"/>
+          <p:cNvPr id="52" name="Isosceles Triangle 51"/>
           <p:cNvSpPr/>
           <p:nvPr/>
         </p:nvSpPr>
         <p:spPr>
-          <a:xfrm rot="12000000">
-            <a:off x="3602736" y="4782312"/>
-            <a:ext cx="164592" cy="164592"/>
-          </a:xfrm>
-          <a:prstGeom prst="chevron">
+          <a:xfrm rot="5400000">
+            <a:off x="10287000" y="2670048"/>
+            <a:ext cx="182880" cy="182880"/>
+          </a:xfrm>
+          <a:prstGeom prst="triangle">
             <a:avLst/>
           </a:prstGeom>
           <a:solidFill>
@@ -6971,19 +8352,19 @@
       </p:sp>
       <p:cxnSp>
         <p:nvCxnSpPr>
-          <p:cNvPr id="20" name="Connector 19"/>
+          <p:cNvPr id="53" name="Connector 52"/>
           <p:cNvCxnSpPr/>
           <p:nvPr/>
         </p:nvCxnSpPr>
         <p:spPr>
-          <a:xfrm flipV="1">
-            <a:off x="2331720" y="2414016"/>
-            <a:ext cx="0" cy="1609344"/>
+          <a:xfrm>
+            <a:off x="10725912" y="3127248"/>
+            <a:ext cx="0" cy="2139696"/>
           </a:xfrm>
           <a:prstGeom prst="line">
             <a:avLst/>
           </a:prstGeom>
-          <a:ln w="25400">
+          <a:ln w="22860">
             <a:solidFill>
               <a:srgbClr val="008F72"/>
             </a:solidFill>
@@ -7004,18 +8385,53 @@
           </a:fontRef>
         </p:style>
       </p:cxnSp>
-      <p:sp>
-        <p:nvSpPr>
-          <p:cNvPr id="21" name="Chevron 20"/>
+      <p:cxnSp>
+        <p:nvCxnSpPr>
+          <p:cNvPr id="54" name="Connector 53"/>
+          <p:cNvCxnSpPr/>
+          <p:nvPr/>
+        </p:nvCxnSpPr>
+        <p:spPr>
+          <a:xfrm flipH="1">
+            <a:off x="1133856" y="5266944"/>
+            <a:ext cx="9592056" cy="0"/>
+          </a:xfrm>
+          <a:prstGeom prst="line">
+            <a:avLst/>
+          </a:prstGeom>
+          <a:ln w="22860">
+            <a:solidFill>
+              <a:srgbClr val="008F72"/>
+            </a:solidFill>
+          </a:ln>
+        </p:spPr>
+        <p:style>
+          <a:lnRef idx="2">
+            <a:schemeClr val="accent1"/>
+          </a:lnRef>
+          <a:fillRef idx="0">
+            <a:schemeClr val="accent1"/>
+          </a:fillRef>
+          <a:effectRef idx="1">
+            <a:schemeClr val="accent1"/>
+          </a:effectRef>
+          <a:fontRef idx="minor">
+            <a:schemeClr val="tx1"/>
+          </a:fontRef>
+        </p:style>
+      </p:cxnSp>
+      <p:sp>
+        <p:nvSpPr>
+          <p:cNvPr id="55" name="Isosceles Triangle 54"/>
           <p:cNvSpPr/>
           <p:nvPr/>
         </p:nvSpPr>
         <p:spPr>
           <a:xfrm rot="16200000">
-            <a:off x="2249424" y="2770632"/>
-            <a:ext cx="164592" cy="164592"/>
-          </a:xfrm>
-          <a:prstGeom prst="chevron">
+            <a:off x="1042415" y="5175504"/>
+            <a:ext cx="182880" cy="182880"/>
+          </a:xfrm>
+          <a:prstGeom prst="triangle">
             <a:avLst/>
           </a:prstGeom>
           <a:solidFill>
@@ -7049,14 +8465,14 @@
       </p:sp>
       <p:sp>
         <p:nvSpPr>
-          <p:cNvPr id="22" name="TextBox 21"/>
-          <p:cNvSpPr txBox="1"/>
-          <p:nvPr/>
-        </p:nvSpPr>
-        <p:spPr>
-          <a:xfrm>
-            <a:off x="621792" y="3081528"/>
-            <a:ext cx="1444752" cy="256032"/>
+          <p:cNvPr id="56" name="TextBox 55"/>
+          <p:cNvSpPr txBox="1"/>
+          <p:nvPr/>
+        </p:nvSpPr>
+        <p:spPr>
+          <a:xfrm>
+            <a:off x="4041648" y="4992624"/>
+            <a:ext cx="4224528" cy="201168"/>
           </a:xfrm>
           <a:prstGeom prst="rect">
             <a:avLst/>
@@ -7078,115 +8494,27 @@
               </a:spcAft>
             </a:pPr>
             <a:r>
-              <a:rPr sz="720" b="1">
+              <a:rPr sz="810" b="1">
                 <a:solidFill>
                   <a:srgbClr val="008F72"/>
                 </a:solidFill>
                 <a:latin typeface="Arial"/>
               </a:rPr>
-              <a:t>ENHANCED CONTROLS</a:t>
-            </a:r>
-          </a:p>
-        </p:txBody>
-      </p:sp>
-      <p:sp>
-        <p:nvSpPr>
-          <p:cNvPr id="23" name="Rectangle 22"/>
-          <p:cNvSpPr/>
-          <p:nvPr/>
-        </p:nvSpPr>
-        <p:spPr>
-          <a:xfrm>
-            <a:off x="1481328" y="1581912"/>
-            <a:ext cx="2176272" cy="749808"/>
-          </a:xfrm>
-          <a:prstGeom prst="rect">
-            <a:avLst/>
-          </a:prstGeom>
-          <a:solidFill>
-            <a:srgbClr val="FFFFFF"/>
-          </a:solidFill>
-          <a:ln w="10160">
-            <a:solidFill>
-              <a:srgbClr val="C9CECB"/>
-            </a:solidFill>
-          </a:ln>
-        </p:spPr>
-        <p:style>
-          <a:lnRef idx="1">
-            <a:schemeClr val="accent1"/>
-          </a:lnRef>
-          <a:fillRef idx="3">
-            <a:schemeClr val="accent1"/>
-          </a:fillRef>
-          <a:effectRef idx="2">
-            <a:schemeClr val="accent1"/>
-          </a:effectRef>
-          <a:fontRef idx="minor">
-            <a:schemeClr val="lt1"/>
-          </a:fontRef>
-        </p:style>
-        <p:txBody>
-          <a:bodyPr rtlCol="0" anchor="ctr"/>
-          <a:lstStyle/>
-          <a:p>
-            <a:pPr algn="ctr"/>
-          </a:p>
-        </p:txBody>
-      </p:sp>
-      <p:sp>
-        <p:nvSpPr>
-          <p:cNvPr id="24" name="Rectangle 23"/>
-          <p:cNvSpPr/>
-          <p:nvPr/>
-        </p:nvSpPr>
-        <p:spPr>
-          <a:xfrm>
-            <a:off x="1481328" y="1581912"/>
-            <a:ext cx="50292" cy="749808"/>
-          </a:xfrm>
-          <a:prstGeom prst="rect">
-            <a:avLst/>
-          </a:prstGeom>
-          <a:solidFill>
-            <a:srgbClr val="C82036"/>
-          </a:solidFill>
-          <a:ln>
-            <a:noFill/>
-          </a:ln>
-        </p:spPr>
-        <p:style>
-          <a:lnRef idx="1">
-            <a:schemeClr val="accent1"/>
-          </a:lnRef>
-          <a:fillRef idx="3">
-            <a:schemeClr val="accent1"/>
-          </a:fillRef>
-          <a:effectRef idx="2">
-            <a:schemeClr val="accent1"/>
-          </a:effectRef>
-          <a:fontRef idx="minor">
-            <a:schemeClr val="lt1"/>
-          </a:fontRef>
-        </p:style>
-        <p:txBody>
-          <a:bodyPr rtlCol="0" anchor="ctr"/>
-          <a:lstStyle/>
-          <a:p>
-            <a:pPr algn="ctr"/>
-          </a:p>
-        </p:txBody>
-      </p:sp>
-      <p:sp>
-        <p:nvSpPr>
-          <p:cNvPr id="25" name="TextBox 24"/>
-          <p:cNvSpPr txBox="1"/>
-          <p:nvPr/>
-        </p:nvSpPr>
-        <p:spPr>
-          <a:xfrm>
-            <a:off x="1618488" y="1682496"/>
-            <a:ext cx="1901952" cy="310896"/>
+              <a:t>ENHANCED CONTROLS &amp; MONITORING</a:t>
+            </a:r>
+          </a:p>
+        </p:txBody>
+      </p:sp>
+      <p:sp>
+        <p:nvSpPr>
+          <p:cNvPr id="57" name="TextBox 56"/>
+          <p:cNvSpPr txBox="1"/>
+          <p:nvPr/>
+        </p:nvSpPr>
+        <p:spPr>
+          <a:xfrm>
+            <a:off x="621792" y="5669280"/>
+            <a:ext cx="10972800" cy="475488"/>
           </a:xfrm>
           <a:prstGeom prst="rect">
             <a:avLst/>
@@ -7208,1086 +8536,13 @@
               </a:spcAft>
             </a:pPr>
             <a:r>
-              <a:rPr sz="860" b="1">
+              <a:rPr sz="980" b="1">
                 <a:solidFill>
                   <a:srgbClr val="18232B"/>
                 </a:solidFill>
                 <a:latin typeface="Arial"/>
               </a:rPr>
-              <a:t>CONTROL FAILURES</a:t>
-            </a:r>
-          </a:p>
-        </p:txBody>
-      </p:sp>
-      <p:sp>
-        <p:nvSpPr>
-          <p:cNvPr id="26" name="TextBox 25"/>
-          <p:cNvSpPr txBox="1"/>
-          <p:nvPr/>
-        </p:nvSpPr>
-        <p:spPr>
-          <a:xfrm>
-            <a:off x="1618488" y="2057400"/>
-            <a:ext cx="1901952" cy="155448"/>
-          </a:xfrm>
-          <a:prstGeom prst="rect">
-            <a:avLst/>
-          </a:prstGeom>
-          <a:noFill/>
-        </p:spPr>
-        <p:txBody>
-          <a:bodyPr wrap="square" lIns="18288" rIns="18288" tIns="18288" bIns="18288" anchor="ctr">
-            <a:spAutoFit/>
-          </a:bodyPr>
-          <a:lstStyle/>
-          <a:p>
-            <a:pPr algn="ctr">
-              <a:spcBef>
-                <a:spcPts val="0"/>
-              </a:spcBef>
-              <a:spcAft>
-                <a:spcPts val="0"/>
-              </a:spcAft>
-            </a:pPr>
-            <a:r>
-              <a:rPr sz="730" b="1">
-                <a:solidFill>
-                  <a:srgbClr val="C82036"/>
-                </a:solidFill>
-                <a:latin typeface="Arial"/>
-              </a:rPr>
-              <a:t>Operational</a:t>
-            </a:r>
-          </a:p>
-        </p:txBody>
-      </p:sp>
-      <p:sp>
-        <p:nvSpPr>
-          <p:cNvPr id="27" name="Rectangle 26"/>
-          <p:cNvSpPr/>
-          <p:nvPr/>
-        </p:nvSpPr>
-        <p:spPr>
-          <a:xfrm>
-            <a:off x="4572000" y="1581912"/>
-            <a:ext cx="2176272" cy="749808"/>
-          </a:xfrm>
-          <a:prstGeom prst="rect">
-            <a:avLst/>
-          </a:prstGeom>
-          <a:solidFill>
-            <a:srgbClr val="FFFFFF"/>
-          </a:solidFill>
-          <a:ln w="10160">
-            <a:solidFill>
-              <a:srgbClr val="C9CECB"/>
-            </a:solidFill>
-          </a:ln>
-        </p:spPr>
-        <p:style>
-          <a:lnRef idx="1">
-            <a:schemeClr val="accent1"/>
-          </a:lnRef>
-          <a:fillRef idx="3">
-            <a:schemeClr val="accent1"/>
-          </a:fillRef>
-          <a:effectRef idx="2">
-            <a:schemeClr val="accent1"/>
-          </a:effectRef>
-          <a:fontRef idx="minor">
-            <a:schemeClr val="lt1"/>
-          </a:fontRef>
-        </p:style>
-        <p:txBody>
-          <a:bodyPr rtlCol="0" anchor="ctr"/>
-          <a:lstStyle/>
-          <a:p>
-            <a:pPr algn="ctr"/>
-          </a:p>
-        </p:txBody>
-      </p:sp>
-      <p:sp>
-        <p:nvSpPr>
-          <p:cNvPr id="28" name="Rectangle 27"/>
-          <p:cNvSpPr/>
-          <p:nvPr/>
-        </p:nvSpPr>
-        <p:spPr>
-          <a:xfrm>
-            <a:off x="4572000" y="1581912"/>
-            <a:ext cx="50292" cy="749808"/>
-          </a:xfrm>
-          <a:prstGeom prst="rect">
-            <a:avLst/>
-          </a:prstGeom>
-          <a:solidFill>
-            <a:srgbClr val="C82036"/>
-          </a:solidFill>
-          <a:ln>
-            <a:noFill/>
-          </a:ln>
-        </p:spPr>
-        <p:style>
-          <a:lnRef idx="1">
-            <a:schemeClr val="accent1"/>
-          </a:lnRef>
-          <a:fillRef idx="3">
-            <a:schemeClr val="accent1"/>
-          </a:fillRef>
-          <a:effectRef idx="2">
-            <a:schemeClr val="accent1"/>
-          </a:effectRef>
-          <a:fontRef idx="minor">
-            <a:schemeClr val="lt1"/>
-          </a:fontRef>
-        </p:style>
-        <p:txBody>
-          <a:bodyPr rtlCol="0" anchor="ctr"/>
-          <a:lstStyle/>
-          <a:p>
-            <a:pPr algn="ctr"/>
-          </a:p>
-        </p:txBody>
-      </p:sp>
-      <p:sp>
-        <p:nvSpPr>
-          <p:cNvPr id="29" name="TextBox 28"/>
-          <p:cNvSpPr txBox="1"/>
-          <p:nvPr/>
-        </p:nvSpPr>
-        <p:spPr>
-          <a:xfrm>
-            <a:off x="4709160" y="1682496"/>
-            <a:ext cx="1901952" cy="310896"/>
-          </a:xfrm>
-          <a:prstGeom prst="rect">
-            <a:avLst/>
-          </a:prstGeom>
-          <a:noFill/>
-        </p:spPr>
-        <p:txBody>
-          <a:bodyPr wrap="square" lIns="18288" rIns="18288" tIns="18288" bIns="18288" anchor="ctr">
-            <a:spAutoFit/>
-          </a:bodyPr>
-          <a:lstStyle/>
-          <a:p>
-            <a:pPr algn="ctr">
-              <a:spcBef>
-                <a:spcPts val="0"/>
-              </a:spcBef>
-              <a:spcAft>
-                <a:spcPts val="0"/>
-              </a:spcAft>
-            </a:pPr>
-            <a:r>
-              <a:rPr sz="860" b="1">
-                <a:solidFill>
-                  <a:srgbClr val="18232B"/>
-                </a:solidFill>
-                <a:latin typeface="Arial"/>
-              </a:rPr>
-              <a:t>HIDDEN POSITIONS</a:t>
-            </a:r>
-          </a:p>
-        </p:txBody>
-      </p:sp>
-      <p:sp>
-        <p:nvSpPr>
-          <p:cNvPr id="30" name="TextBox 29"/>
-          <p:cNvSpPr txBox="1"/>
-          <p:nvPr/>
-        </p:nvSpPr>
-        <p:spPr>
-          <a:xfrm>
-            <a:off x="4709160" y="2057400"/>
-            <a:ext cx="1901952" cy="155448"/>
-          </a:xfrm>
-          <a:prstGeom prst="rect">
-            <a:avLst/>
-          </a:prstGeom>
-          <a:noFill/>
-        </p:spPr>
-        <p:txBody>
-          <a:bodyPr wrap="square" lIns="18288" rIns="18288" tIns="18288" bIns="18288" anchor="ctr">
-            <a:spAutoFit/>
-          </a:bodyPr>
-          <a:lstStyle/>
-          <a:p>
-            <a:pPr algn="ctr">
-              <a:spcBef>
-                <a:spcPts val="0"/>
-              </a:spcBef>
-              <a:spcAft>
-                <a:spcPts val="0"/>
-              </a:spcAft>
-            </a:pPr>
-            <a:r>
-              <a:rPr sz="730" b="1">
-                <a:solidFill>
-                  <a:srgbClr val="C82036"/>
-                </a:solidFill>
-                <a:latin typeface="Arial"/>
-              </a:rPr>
-              <a:t>Concealed</a:t>
-            </a:r>
-          </a:p>
-        </p:txBody>
-      </p:sp>
-      <p:sp>
-        <p:nvSpPr>
-          <p:cNvPr id="31" name="Rectangle 30"/>
-          <p:cNvSpPr/>
-          <p:nvPr/>
-        </p:nvSpPr>
-        <p:spPr>
-          <a:xfrm>
-            <a:off x="7818120" y="2121408"/>
-            <a:ext cx="2176272" cy="749808"/>
-          </a:xfrm>
-          <a:prstGeom prst="rect">
-            <a:avLst/>
-          </a:prstGeom>
-          <a:solidFill>
-            <a:srgbClr val="FFFFFF"/>
-          </a:solidFill>
-          <a:ln w="10160">
-            <a:solidFill>
-              <a:srgbClr val="C9CECB"/>
-            </a:solidFill>
-          </a:ln>
-        </p:spPr>
-        <p:style>
-          <a:lnRef idx="1">
-            <a:schemeClr val="accent1"/>
-          </a:lnRef>
-          <a:fillRef idx="3">
-            <a:schemeClr val="accent1"/>
-          </a:fillRef>
-          <a:effectRef idx="2">
-            <a:schemeClr val="accent1"/>
-          </a:effectRef>
-          <a:fontRef idx="minor">
-            <a:schemeClr val="lt1"/>
-          </a:fontRef>
-        </p:style>
-        <p:txBody>
-          <a:bodyPr rtlCol="0" anchor="ctr"/>
-          <a:lstStyle/>
-          <a:p>
-            <a:pPr algn="ctr"/>
-          </a:p>
-        </p:txBody>
-      </p:sp>
-      <p:sp>
-        <p:nvSpPr>
-          <p:cNvPr id="32" name="Rectangle 31"/>
-          <p:cNvSpPr/>
-          <p:nvPr/>
-        </p:nvSpPr>
-        <p:spPr>
-          <a:xfrm>
-            <a:off x="7818120" y="2121408"/>
-            <a:ext cx="50292" cy="749808"/>
-          </a:xfrm>
-          <a:prstGeom prst="rect">
-            <a:avLst/>
-          </a:prstGeom>
-          <a:solidFill>
-            <a:srgbClr val="C82036"/>
-          </a:solidFill>
-          <a:ln>
-            <a:noFill/>
-          </a:ln>
-        </p:spPr>
-        <p:style>
-          <a:lnRef idx="1">
-            <a:schemeClr val="accent1"/>
-          </a:lnRef>
-          <a:fillRef idx="3">
-            <a:schemeClr val="accent1"/>
-          </a:fillRef>
-          <a:effectRef idx="2">
-            <a:schemeClr val="accent1"/>
-          </a:effectRef>
-          <a:fontRef idx="minor">
-            <a:schemeClr val="lt1"/>
-          </a:fontRef>
-        </p:style>
-        <p:txBody>
-          <a:bodyPr rtlCol="0" anchor="ctr"/>
-          <a:lstStyle/>
-          <a:p>
-            <a:pPr algn="ctr"/>
-          </a:p>
-        </p:txBody>
-      </p:sp>
-      <p:sp>
-        <p:nvSpPr>
-          <p:cNvPr id="33" name="TextBox 32"/>
-          <p:cNvSpPr txBox="1"/>
-          <p:nvPr/>
-        </p:nvSpPr>
-        <p:spPr>
-          <a:xfrm>
-            <a:off x="7955280" y="2221991"/>
-            <a:ext cx="1901952" cy="310896"/>
-          </a:xfrm>
-          <a:prstGeom prst="rect">
-            <a:avLst/>
-          </a:prstGeom>
-          <a:noFill/>
-        </p:spPr>
-        <p:txBody>
-          <a:bodyPr wrap="square" lIns="18288" rIns="18288" tIns="18288" bIns="18288" anchor="ctr">
-            <a:spAutoFit/>
-          </a:bodyPr>
-          <a:lstStyle/>
-          <a:p>
-            <a:pPr algn="ctr">
-              <a:spcBef>
-                <a:spcPts val="0"/>
-              </a:spcBef>
-              <a:spcAft>
-                <a:spcPts val="0"/>
-              </a:spcAft>
-            </a:pPr>
-            <a:r>
-              <a:rPr sz="860" b="1">
-                <a:solidFill>
-                  <a:srgbClr val="18232B"/>
-                </a:solidFill>
-                <a:latin typeface="Arial"/>
-              </a:rPr>
-              <a:t>MARKET LOSSES</a:t>
-            </a:r>
-          </a:p>
-        </p:txBody>
-      </p:sp>
-      <p:sp>
-        <p:nvSpPr>
-          <p:cNvPr id="34" name="TextBox 33"/>
-          <p:cNvSpPr txBox="1"/>
-          <p:nvPr/>
-        </p:nvSpPr>
-        <p:spPr>
-          <a:xfrm>
-            <a:off x="7955280" y="2596896"/>
-            <a:ext cx="1901952" cy="155448"/>
-          </a:xfrm>
-          <a:prstGeom prst="rect">
-            <a:avLst/>
-          </a:prstGeom>
-          <a:noFill/>
-        </p:spPr>
-        <p:txBody>
-          <a:bodyPr wrap="square" lIns="18288" rIns="18288" tIns="18288" bIns="18288" anchor="ctr">
-            <a:spAutoFit/>
-          </a:bodyPr>
-          <a:lstStyle/>
-          <a:p>
-            <a:pPr algn="ctr">
-              <a:spcBef>
-                <a:spcPts val="0"/>
-              </a:spcBef>
-              <a:spcAft>
-                <a:spcPts val="0"/>
-              </a:spcAft>
-            </a:pPr>
-            <a:r>
-              <a:rPr sz="730" b="1">
-                <a:solidFill>
-                  <a:srgbClr val="C82036"/>
-                </a:solidFill>
-                <a:latin typeface="Arial"/>
-              </a:rPr>
-              <a:t>Trading P&amp;L</a:t>
-            </a:r>
-          </a:p>
-        </p:txBody>
-      </p:sp>
-      <p:sp>
-        <p:nvSpPr>
-          <p:cNvPr id="35" name="Rectangle 34"/>
-          <p:cNvSpPr/>
-          <p:nvPr/>
-        </p:nvSpPr>
-        <p:spPr>
-          <a:xfrm>
-            <a:off x="7818120" y="4050791"/>
-            <a:ext cx="2176272" cy="749808"/>
-          </a:xfrm>
-          <a:prstGeom prst="rect">
-            <a:avLst/>
-          </a:prstGeom>
-          <a:solidFill>
-            <a:srgbClr val="FFFFFF"/>
-          </a:solidFill>
-          <a:ln w="10160">
-            <a:solidFill>
-              <a:srgbClr val="C9CECB"/>
-            </a:solidFill>
-          </a:ln>
-        </p:spPr>
-        <p:style>
-          <a:lnRef idx="1">
-            <a:schemeClr val="accent1"/>
-          </a:lnRef>
-          <a:fillRef idx="3">
-            <a:schemeClr val="accent1"/>
-          </a:fillRef>
-          <a:effectRef idx="2">
-            <a:schemeClr val="accent1"/>
-          </a:effectRef>
-          <a:fontRef idx="minor">
-            <a:schemeClr val="lt1"/>
-          </a:fontRef>
-        </p:style>
-        <p:txBody>
-          <a:bodyPr rtlCol="0" anchor="ctr"/>
-          <a:lstStyle/>
-          <a:p>
-            <a:pPr algn="ctr"/>
-          </a:p>
-        </p:txBody>
-      </p:sp>
-      <p:sp>
-        <p:nvSpPr>
-          <p:cNvPr id="36" name="Rectangle 35"/>
-          <p:cNvSpPr/>
-          <p:nvPr/>
-        </p:nvSpPr>
-        <p:spPr>
-          <a:xfrm>
-            <a:off x="7818120" y="4050791"/>
-            <a:ext cx="50292" cy="749808"/>
-          </a:xfrm>
-          <a:prstGeom prst="rect">
-            <a:avLst/>
-          </a:prstGeom>
-          <a:solidFill>
-            <a:srgbClr val="C49500"/>
-          </a:solidFill>
-          <a:ln>
-            <a:noFill/>
-          </a:ln>
-        </p:spPr>
-        <p:style>
-          <a:lnRef idx="1">
-            <a:schemeClr val="accent1"/>
-          </a:lnRef>
-          <a:fillRef idx="3">
-            <a:schemeClr val="accent1"/>
-          </a:fillRef>
-          <a:effectRef idx="2">
-            <a:schemeClr val="accent1"/>
-          </a:effectRef>
-          <a:fontRef idx="minor">
-            <a:schemeClr val="lt1"/>
-          </a:fontRef>
-        </p:style>
-        <p:txBody>
-          <a:bodyPr rtlCol="0" anchor="ctr"/>
-          <a:lstStyle/>
-          <a:p>
-            <a:pPr algn="ctr"/>
-          </a:p>
-        </p:txBody>
-      </p:sp>
-      <p:sp>
-        <p:nvSpPr>
-          <p:cNvPr id="37" name="TextBox 36"/>
-          <p:cNvSpPr txBox="1"/>
-          <p:nvPr/>
-        </p:nvSpPr>
-        <p:spPr>
-          <a:xfrm>
-            <a:off x="7955280" y="4151376"/>
-            <a:ext cx="1901952" cy="310896"/>
-          </a:xfrm>
-          <a:prstGeom prst="rect">
-            <a:avLst/>
-          </a:prstGeom>
-          <a:noFill/>
-        </p:spPr>
-        <p:txBody>
-          <a:bodyPr wrap="square" lIns="18288" rIns="18288" tIns="18288" bIns="18288" anchor="ctr">
-            <a:spAutoFit/>
-          </a:bodyPr>
-          <a:lstStyle/>
-          <a:p>
-            <a:pPr algn="ctr">
-              <a:spcBef>
-                <a:spcPts val="0"/>
-              </a:spcBef>
-              <a:spcAft>
-                <a:spcPts val="0"/>
-              </a:spcAft>
-            </a:pPr>
-            <a:r>
-              <a:rPr sz="860" b="1">
-                <a:solidFill>
-                  <a:srgbClr val="18232B"/>
-                </a:solidFill>
-                <a:latin typeface="Arial"/>
-              </a:rPr>
-              <a:t>COLLATERAL &amp;
-SETTLEMENT</a:t>
-            </a:r>
-          </a:p>
-        </p:txBody>
-      </p:sp>
-      <p:sp>
-        <p:nvSpPr>
-          <p:cNvPr id="38" name="TextBox 37"/>
-          <p:cNvSpPr txBox="1"/>
-          <p:nvPr/>
-        </p:nvSpPr>
-        <p:spPr>
-          <a:xfrm>
-            <a:off x="7955280" y="4526279"/>
-            <a:ext cx="1901952" cy="155448"/>
-          </a:xfrm>
-          <a:prstGeom prst="rect">
-            <a:avLst/>
-          </a:prstGeom>
-          <a:noFill/>
-        </p:spPr>
-        <p:txBody>
-          <a:bodyPr wrap="square" lIns="18288" rIns="18288" tIns="18288" bIns="18288" anchor="ctr">
-            <a:spAutoFit/>
-          </a:bodyPr>
-          <a:lstStyle/>
-          <a:p>
-            <a:pPr algn="ctr">
-              <a:spcBef>
-                <a:spcPts val="0"/>
-              </a:spcBef>
-              <a:spcAft>
-                <a:spcPts val="0"/>
-              </a:spcAft>
-            </a:pPr>
-            <a:r>
-              <a:rPr sz="730" b="1">
-                <a:solidFill>
-                  <a:srgbClr val="C49500"/>
-                </a:solidFill>
-                <a:latin typeface="Arial"/>
-              </a:rPr>
-              <a:t>Cash due</a:t>
-            </a:r>
-          </a:p>
-        </p:txBody>
-      </p:sp>
-      <p:sp>
-        <p:nvSpPr>
-          <p:cNvPr id="39" name="Rectangle 38"/>
-          <p:cNvSpPr/>
-          <p:nvPr/>
-        </p:nvSpPr>
-        <p:spPr>
-          <a:xfrm>
-            <a:off x="4572000" y="4782312"/>
-            <a:ext cx="2176272" cy="749808"/>
-          </a:xfrm>
-          <a:prstGeom prst="rect">
-            <a:avLst/>
-          </a:prstGeom>
-          <a:solidFill>
-            <a:srgbClr val="FFFFFF"/>
-          </a:solidFill>
-          <a:ln w="10160">
-            <a:solidFill>
-              <a:srgbClr val="C9CECB"/>
-            </a:solidFill>
-          </a:ln>
-        </p:spPr>
-        <p:style>
-          <a:lnRef idx="1">
-            <a:schemeClr val="accent1"/>
-          </a:lnRef>
-          <a:fillRef idx="3">
-            <a:schemeClr val="accent1"/>
-          </a:fillRef>
-          <a:effectRef idx="2">
-            <a:schemeClr val="accent1"/>
-          </a:effectRef>
-          <a:fontRef idx="minor">
-            <a:schemeClr val="lt1"/>
-          </a:fontRef>
-        </p:style>
-        <p:txBody>
-          <a:bodyPr rtlCol="0" anchor="ctr"/>
-          <a:lstStyle/>
-          <a:p>
-            <a:pPr algn="ctr"/>
-          </a:p>
-        </p:txBody>
-      </p:sp>
-      <p:sp>
-        <p:nvSpPr>
-          <p:cNvPr id="40" name="Rectangle 39"/>
-          <p:cNvSpPr/>
-          <p:nvPr/>
-        </p:nvSpPr>
-        <p:spPr>
-          <a:xfrm>
-            <a:off x="4572000" y="4782312"/>
-            <a:ext cx="50292" cy="749808"/>
-          </a:xfrm>
-          <a:prstGeom prst="rect">
-            <a:avLst/>
-          </a:prstGeom>
-          <a:solidFill>
-            <a:srgbClr val="C49500"/>
-          </a:solidFill>
-          <a:ln>
-            <a:noFill/>
-          </a:ln>
-        </p:spPr>
-        <p:style>
-          <a:lnRef idx="1">
-            <a:schemeClr val="accent1"/>
-          </a:lnRef>
-          <a:fillRef idx="3">
-            <a:schemeClr val="accent1"/>
-          </a:fillRef>
-          <a:effectRef idx="2">
-            <a:schemeClr val="accent1"/>
-          </a:effectRef>
-          <a:fontRef idx="minor">
-            <a:schemeClr val="lt1"/>
-          </a:fontRef>
-        </p:style>
-        <p:txBody>
-          <a:bodyPr rtlCol="0" anchor="ctr"/>
-          <a:lstStyle/>
-          <a:p>
-            <a:pPr algn="ctr"/>
-          </a:p>
-        </p:txBody>
-      </p:sp>
-      <p:sp>
-        <p:nvSpPr>
-          <p:cNvPr id="41" name="TextBox 40"/>
-          <p:cNvSpPr txBox="1"/>
-          <p:nvPr/>
-        </p:nvSpPr>
-        <p:spPr>
-          <a:xfrm>
-            <a:off x="4709160" y="4882896"/>
-            <a:ext cx="1901952" cy="310896"/>
-          </a:xfrm>
-          <a:prstGeom prst="rect">
-            <a:avLst/>
-          </a:prstGeom>
-          <a:noFill/>
-        </p:spPr>
-        <p:txBody>
-          <a:bodyPr wrap="square" lIns="18288" rIns="18288" tIns="18288" bIns="18288" anchor="ctr">
-            <a:spAutoFit/>
-          </a:bodyPr>
-          <a:lstStyle/>
-          <a:p>
-            <a:pPr algn="ctr">
-              <a:spcBef>
-                <a:spcPts val="0"/>
-              </a:spcBef>
-              <a:spcAft>
-                <a:spcPts val="0"/>
-              </a:spcAft>
-            </a:pPr>
-            <a:r>
-              <a:rPr sz="860" b="1">
-                <a:solidFill>
-                  <a:srgbClr val="18232B"/>
-                </a:solidFill>
-                <a:latin typeface="Arial"/>
-              </a:rPr>
-              <a:t>LIQUIDITY PRESSURE</a:t>
-            </a:r>
-          </a:p>
-        </p:txBody>
-      </p:sp>
-      <p:sp>
-        <p:nvSpPr>
-          <p:cNvPr id="42" name="TextBox 41"/>
-          <p:cNvSpPr txBox="1"/>
-          <p:nvPr/>
-        </p:nvSpPr>
-        <p:spPr>
-          <a:xfrm>
-            <a:off x="4709160" y="5257800"/>
-            <a:ext cx="1901952" cy="155448"/>
-          </a:xfrm>
-          <a:prstGeom prst="rect">
-            <a:avLst/>
-          </a:prstGeom>
-          <a:noFill/>
-        </p:spPr>
-        <p:txBody>
-          <a:bodyPr wrap="square" lIns="18288" rIns="18288" tIns="18288" bIns="18288" anchor="ctr">
-            <a:spAutoFit/>
-          </a:bodyPr>
-          <a:lstStyle/>
-          <a:p>
-            <a:pPr algn="ctr">
-              <a:spcBef>
-                <a:spcPts val="0"/>
-              </a:spcBef>
-              <a:spcAft>
-                <a:spcPts val="0"/>
-              </a:spcAft>
-            </a:pPr>
-            <a:r>
-              <a:rPr sz="730" b="1">
-                <a:solidFill>
-                  <a:srgbClr val="C49500"/>
-                </a:solidFill>
-                <a:latin typeface="Arial"/>
-              </a:rPr>
-              <a:t>Buffer at risk</a:t>
-            </a:r>
-          </a:p>
-        </p:txBody>
-      </p:sp>
-      <p:sp>
-        <p:nvSpPr>
-          <p:cNvPr id="43" name="Rectangle 42"/>
-          <p:cNvSpPr/>
-          <p:nvPr/>
-        </p:nvSpPr>
-        <p:spPr>
-          <a:xfrm>
-            <a:off x="1481328" y="4050791"/>
-            <a:ext cx="2176272" cy="749808"/>
-          </a:xfrm>
-          <a:prstGeom prst="rect">
-            <a:avLst/>
-          </a:prstGeom>
-          <a:solidFill>
-            <a:srgbClr val="FFFFFF"/>
-          </a:solidFill>
-          <a:ln w="10160">
-            <a:solidFill>
-              <a:srgbClr val="C9CECB"/>
-            </a:solidFill>
-          </a:ln>
-        </p:spPr>
-        <p:style>
-          <a:lnRef idx="1">
-            <a:schemeClr val="accent1"/>
-          </a:lnRef>
-          <a:fillRef idx="3">
-            <a:schemeClr val="accent1"/>
-          </a:fillRef>
-          <a:effectRef idx="2">
-            <a:schemeClr val="accent1"/>
-          </a:effectRef>
-          <a:fontRef idx="minor">
-            <a:schemeClr val="lt1"/>
-          </a:fontRef>
-        </p:style>
-        <p:txBody>
-          <a:bodyPr rtlCol="0" anchor="ctr"/>
-          <a:lstStyle/>
-          <a:p>
-            <a:pPr algn="ctr"/>
-          </a:p>
-        </p:txBody>
-      </p:sp>
-      <p:sp>
-        <p:nvSpPr>
-          <p:cNvPr id="44" name="Rectangle 43"/>
-          <p:cNvSpPr/>
-          <p:nvPr/>
-        </p:nvSpPr>
-        <p:spPr>
-          <a:xfrm>
-            <a:off x="1481328" y="4050791"/>
-            <a:ext cx="50292" cy="749808"/>
-          </a:xfrm>
-          <a:prstGeom prst="rect">
-            <a:avLst/>
-          </a:prstGeom>
-          <a:solidFill>
-            <a:srgbClr val="008F72"/>
-          </a:solidFill>
-          <a:ln>
-            <a:noFill/>
-          </a:ln>
-        </p:spPr>
-        <p:style>
-          <a:lnRef idx="1">
-            <a:schemeClr val="accent1"/>
-          </a:lnRef>
-          <a:fillRef idx="3">
-            <a:schemeClr val="accent1"/>
-          </a:fillRef>
-          <a:effectRef idx="2">
-            <a:schemeClr val="accent1"/>
-          </a:effectRef>
-          <a:fontRef idx="minor">
-            <a:schemeClr val="lt1"/>
-          </a:fontRef>
-        </p:style>
-        <p:txBody>
-          <a:bodyPr rtlCol="0" anchor="ctr"/>
-          <a:lstStyle/>
-          <a:p>
-            <a:pPr algn="ctr"/>
-          </a:p>
-        </p:txBody>
-      </p:sp>
-      <p:sp>
-        <p:nvSpPr>
-          <p:cNvPr id="45" name="TextBox 44"/>
-          <p:cNvSpPr txBox="1"/>
-          <p:nvPr/>
-        </p:nvSpPr>
-        <p:spPr>
-          <a:xfrm>
-            <a:off x="1618488" y="4151376"/>
-            <a:ext cx="1901952" cy="310896"/>
-          </a:xfrm>
-          <a:prstGeom prst="rect">
-            <a:avLst/>
-          </a:prstGeom>
-          <a:noFill/>
-        </p:spPr>
-        <p:txBody>
-          <a:bodyPr wrap="square" lIns="18288" rIns="18288" tIns="18288" bIns="18288" anchor="ctr">
-            <a:spAutoFit/>
-          </a:bodyPr>
-          <a:lstStyle/>
-          <a:p>
-            <a:pPr algn="ctr">
-              <a:spcBef>
-                <a:spcPts val="0"/>
-              </a:spcBef>
-              <a:spcAft>
-                <a:spcPts val="0"/>
-              </a:spcAft>
-            </a:pPr>
-            <a:r>
-              <a:rPr sz="860" b="1">
-                <a:solidFill>
-                  <a:srgbClr val="18232B"/>
-                </a:solidFill>
-                <a:latin typeface="Arial"/>
-              </a:rPr>
-              <a:t>TREASURY FUNDING
-RESPONSE</a:t>
-            </a:r>
-          </a:p>
-        </p:txBody>
-      </p:sp>
-      <p:sp>
-        <p:nvSpPr>
-          <p:cNvPr id="46" name="TextBox 45"/>
-          <p:cNvSpPr txBox="1"/>
-          <p:nvPr/>
-        </p:nvSpPr>
-        <p:spPr>
-          <a:xfrm>
-            <a:off x="1618488" y="4526279"/>
-            <a:ext cx="1901952" cy="155448"/>
-          </a:xfrm>
-          <a:prstGeom prst="rect">
-            <a:avLst/>
-          </a:prstGeom>
-          <a:noFill/>
-        </p:spPr>
-        <p:txBody>
-          <a:bodyPr wrap="square" lIns="18288" rIns="18288" tIns="18288" bIns="18288" anchor="ctr">
-            <a:spAutoFit/>
-          </a:bodyPr>
-          <a:lstStyle/>
-          <a:p>
-            <a:pPr algn="ctr">
-              <a:spcBef>
-                <a:spcPts val="0"/>
-              </a:spcBef>
-              <a:spcAft>
-                <a:spcPts val="0"/>
-              </a:spcAft>
-            </a:pPr>
-            <a:r>
-              <a:rPr sz="730" b="1">
-                <a:solidFill>
-                  <a:srgbClr val="008F72"/>
-                </a:solidFill>
-                <a:latin typeface="Arial"/>
-              </a:rPr>
-              <a:t>Cash sources</a:t>
-            </a:r>
-          </a:p>
-        </p:txBody>
-      </p:sp>
-      <p:sp>
-        <p:nvSpPr>
-          <p:cNvPr id="47" name="TextBox 46"/>
-          <p:cNvSpPr txBox="1"/>
-          <p:nvPr/>
-        </p:nvSpPr>
-        <p:spPr>
-          <a:xfrm>
-            <a:off x="3410712" y="2944368"/>
-            <a:ext cx="5010912" cy="658368"/>
-          </a:xfrm>
-          <a:prstGeom prst="rect">
-            <a:avLst/>
-          </a:prstGeom>
-          <a:noFill/>
-        </p:spPr>
-        <p:txBody>
-          <a:bodyPr wrap="square" lIns="18288" rIns="18288" tIns="18288" bIns="18288" anchor="ctr">
-            <a:spAutoFit/>
-          </a:bodyPr>
-          <a:lstStyle/>
-          <a:p>
-            <a:pPr algn="ctr">
-              <a:spcBef>
-                <a:spcPts val="0"/>
-              </a:spcBef>
-              <a:spcAft>
-                <a:spcPts val="0"/>
-              </a:spcAft>
-            </a:pPr>
-            <a:r>
-              <a:rPr sz="1019" b="1">
-                <a:solidFill>
-                  <a:srgbClr val="18232B"/>
-                </a:solidFill>
-                <a:latin typeface="Arial"/>
-              </a:rPr>
               <a:t>A trading loss becomes a Treasury issue only when it generates cash obligations through settlements, collateral requirements or funding constraints.</a:t>
-            </a:r>
-          </a:p>
-        </p:txBody>
-      </p:sp>
-      <p:sp>
-        <p:nvSpPr>
-          <p:cNvPr id="48" name="TextBox 47"/>
-          <p:cNvSpPr txBox="1"/>
-          <p:nvPr/>
-        </p:nvSpPr>
-        <p:spPr>
-          <a:xfrm>
-            <a:off x="3520440" y="3639312"/>
-            <a:ext cx="4791456" cy="228600"/>
-          </a:xfrm>
-          <a:prstGeom prst="rect">
-            <a:avLst/>
-          </a:prstGeom>
-          <a:noFill/>
-        </p:spPr>
-        <p:txBody>
-          <a:bodyPr wrap="square" lIns="18288" rIns="18288" tIns="18288" bIns="18288" anchor="ctr">
-            <a:spAutoFit/>
-          </a:bodyPr>
-          <a:lstStyle/>
-          <a:p>
-            <a:pPr algn="ctr">
-              <a:spcBef>
-                <a:spcPts val="0"/>
-              </a:spcBef>
-              <a:spcAft>
-                <a:spcPts val="0"/>
-              </a:spcAft>
-            </a:pPr>
-            <a:r>
-              <a:rPr sz="800" b="0">
-                <a:solidFill>
-                  <a:srgbClr val="68747B"/>
-                </a:solidFill>
-                <a:latin typeface="Arial"/>
-              </a:rPr>
-              <a:t>Settlement cash · collateral calls · delayed receipts · accessible funding</a:t>
-            </a:r>
-          </a:p>
-        </p:txBody>
-      </p:sp>
-      <p:sp>
-        <p:nvSpPr>
-          <p:cNvPr id="49" name="Rectangle 48"/>
-          <p:cNvSpPr/>
-          <p:nvPr/>
-        </p:nvSpPr>
-        <p:spPr>
-          <a:xfrm>
-            <a:off x="621792" y="5742432"/>
-            <a:ext cx="10936224" cy="438912"/>
-          </a:xfrm>
-          <a:prstGeom prst="rect">
-            <a:avLst/>
-          </a:prstGeom>
-          <a:solidFill>
-            <a:srgbClr val="E8ECE8"/>
-          </a:solidFill>
-          <a:ln>
-            <a:noFill/>
-          </a:ln>
-        </p:spPr>
-        <p:style>
-          <a:lnRef idx="1">
-            <a:schemeClr val="accent1"/>
-          </a:lnRef>
-          <a:fillRef idx="3">
-            <a:schemeClr val="accent1"/>
-          </a:fillRef>
-          <a:effectRef idx="2">
-            <a:schemeClr val="accent1"/>
-          </a:effectRef>
-          <a:fontRef idx="minor">
-            <a:schemeClr val="lt1"/>
-          </a:fontRef>
-        </p:style>
-        <p:txBody>
-          <a:bodyPr rtlCol="0" anchor="ctr"/>
-          <a:lstStyle/>
-          <a:p>
-            <a:pPr algn="ctr"/>
-          </a:p>
-        </p:txBody>
-      </p:sp>
-      <p:sp>
-        <p:nvSpPr>
-          <p:cNvPr id="50" name="TextBox 49"/>
-          <p:cNvSpPr txBox="1"/>
-          <p:nvPr/>
-        </p:nvSpPr>
-        <p:spPr>
-          <a:xfrm>
-            <a:off x="822960" y="5833872"/>
-            <a:ext cx="10533888" cy="237744"/>
-          </a:xfrm>
-          <a:prstGeom prst="rect">
-            <a:avLst/>
-          </a:prstGeom>
-          <a:noFill/>
-        </p:spPr>
-        <p:txBody>
-          <a:bodyPr wrap="square" lIns="18288" rIns="18288" tIns="18288" bIns="18288" anchor="ctr">
-            <a:spAutoFit/>
-          </a:bodyPr>
-          <a:lstStyle/>
-          <a:p>
-            <a:pPr algn="ctr">
-              <a:spcBef>
-                <a:spcPts val="0"/>
-              </a:spcBef>
-              <a:spcAft>
-                <a:spcPts val="0"/>
-              </a:spcAft>
-            </a:pPr>
-            <a:r>
-              <a:rPr sz="900" b="1">
-                <a:solidFill>
-                  <a:srgbClr val="18232B"/>
-                </a:solidFill>
-                <a:latin typeface="Arial"/>
-              </a:rPr>
-              <a:t>Central question: preserve liquidity and meet payments throughout the three-month response horizon.</a:t>
             </a:r>
           </a:p>
         </p:txBody>
@@ -10912,7 +11167,7 @@
                 </a:solidFill>
                 <a:latin typeface="Arial"/>
               </a:rPr>
-              <a:t>WHAT IF THE SITUATION WORSENS?</a:t>
+              <a:t>STRESS TEST: WHEN DOES CASH FALL BELOW THE BUFFER?</a:t>
             </a:r>
           </a:p>
         </p:txBody>
@@ -10954,7 +11209,7 @@
                 </a:solidFill>
                 <a:latin typeface="Arial"/>
               </a:rPr>
-              <a:t>SECTION 2.3  ·  STRESS TEST</a:t>
+              <a:t>SECTION 2.3  ·  COMBINED SCENARIO</a:t>
             </a:r>
           </a:p>
         </p:txBody>
@@ -10996,7 +11251,7 @@
                 </a:solidFill>
                 <a:latin typeface="Arial"/>
               </a:rPr>
-              <a:t>COMBINED SCENARIO INPUTS ARE ASSUMPTIONS, NOT HISTORICAL OUTCOMES</a:t>
+              <a:t>ILLUSTRATIVE USDm · STRESS INPUTS ARE ASSUMPTIONS, NOT UBS ACTUAL CASH FLOWS</a:t>
             </a:r>
           </a:p>
         </p:txBody>
@@ -11145,8 +11400,8 @@
         </p:nvSpPr>
         <p:spPr>
           <a:xfrm>
-            <a:off x="621792" y="1143000"/>
-            <a:ext cx="4572000" cy="201168"/>
+            <a:off x="658368" y="1078992"/>
+            <a:ext cx="10972800" cy="420624"/>
           </a:xfrm>
           <a:prstGeom prst="rect">
             <a:avLst/>
@@ -11159,966 +11414,36 @@
           </a:bodyPr>
           <a:lstStyle/>
           <a:p>
-            <a:pPr algn="l">
-              <a:spcBef>
-                <a:spcPts val="0"/>
-              </a:spcBef>
-              <a:spcAft>
-                <a:spcPts val="0"/>
-              </a:spcAft>
-            </a:pPr>
-            <a:r>
-              <a:rPr sz="900" b="1">
+            <a:pPr algn="ctr">
+              <a:spcBef>
+                <a:spcPts val="0"/>
+              </a:spcBef>
+              <a:spcAft>
+                <a:spcPts val="0"/>
+              </a:spcAft>
+            </a:pPr>
+            <a:r>
+              <a:rPr sz="1800" b="1">
                 <a:solidFill>
                   <a:srgbClr val="18232B"/>
                 </a:solidFill>
                 <a:latin typeface="Arial"/>
               </a:rPr>
-              <a:t>30 NOVEMBER CASH BRIDGE  ·  USDm</a:t>
-            </a:r>
-          </a:p>
-        </p:txBody>
-      </p:sp>
-      <p:sp>
-        <p:nvSpPr>
-          <p:cNvPr id="11" name="TextBox 10"/>
-          <p:cNvSpPr txBox="1"/>
-          <p:nvPr/>
-        </p:nvSpPr>
-        <p:spPr>
-          <a:xfrm>
-            <a:off x="658368" y="1572768"/>
-            <a:ext cx="1508760" cy="384048"/>
-          </a:xfrm>
-          <a:prstGeom prst="rect">
-            <a:avLst/>
-          </a:prstGeom>
-          <a:noFill/>
-        </p:spPr>
-        <p:txBody>
-          <a:bodyPr wrap="square" lIns="18288" rIns="18288" tIns="18288" bIns="18288" anchor="ctr">
-            <a:spAutoFit/>
-          </a:bodyPr>
-          <a:lstStyle/>
-          <a:p>
-            <a:pPr algn="ctr">
-              <a:spcBef>
-                <a:spcPts val="0"/>
-              </a:spcBef>
-              <a:spcAft>
-                <a:spcPts val="0"/>
-              </a:spcAft>
-            </a:pPr>
-            <a:r>
-              <a:rPr sz="1800" b="1">
-                <a:solidFill>
-                  <a:srgbClr val="18232B"/>
-                </a:solidFill>
-                <a:latin typeface="Arial"/>
-              </a:rPr>
-              <a:t>$849m</a:t>
-            </a:r>
-          </a:p>
-        </p:txBody>
-      </p:sp>
-      <p:cxnSp>
-        <p:nvCxnSpPr>
-          <p:cNvPr id="12" name="Connector 11"/>
-          <p:cNvCxnSpPr/>
-          <p:nvPr/>
-        </p:nvCxnSpPr>
-        <p:spPr>
-          <a:xfrm>
-            <a:off x="731519" y="2048256"/>
-            <a:ext cx="1362457" cy="0"/>
-          </a:xfrm>
-          <a:prstGeom prst="line">
-            <a:avLst/>
-          </a:prstGeom>
-          <a:ln w="21590">
-            <a:solidFill>
-              <a:srgbClr val="18232B"/>
-            </a:solidFill>
-          </a:ln>
-        </p:spPr>
-        <p:style>
-          <a:lnRef idx="2">
-            <a:schemeClr val="accent1"/>
-          </a:lnRef>
-          <a:fillRef idx="0">
-            <a:schemeClr val="accent1"/>
-          </a:fillRef>
-          <a:effectRef idx="1">
-            <a:schemeClr val="accent1"/>
-          </a:effectRef>
-          <a:fontRef idx="minor">
-            <a:schemeClr val="tx1"/>
-          </a:fontRef>
-        </p:style>
-      </p:cxnSp>
-      <p:sp>
-        <p:nvSpPr>
-          <p:cNvPr id="13" name="TextBox 12"/>
-          <p:cNvSpPr txBox="1"/>
-          <p:nvPr/>
-        </p:nvSpPr>
-        <p:spPr>
-          <a:xfrm>
-            <a:off x="658368" y="2148840"/>
-            <a:ext cx="1508760" cy="438912"/>
-          </a:xfrm>
-          <a:prstGeom prst="rect">
-            <a:avLst/>
-          </a:prstGeom>
-          <a:noFill/>
-        </p:spPr>
-        <p:txBody>
-          <a:bodyPr wrap="square" lIns="18288" rIns="18288" tIns="18288" bIns="18288" anchor="ctr">
-            <a:spAutoFit/>
-          </a:bodyPr>
-          <a:lstStyle/>
-          <a:p>
-            <a:pPr algn="ctr">
-              <a:spcBef>
-                <a:spcPts val="0"/>
-              </a:spcBef>
-              <a:spcAft>
-                <a:spcPts val="0"/>
-              </a:spcAft>
-            </a:pPr>
-            <a:r>
-              <a:rPr sz="760" b="1">
-                <a:solidFill>
-                  <a:srgbClr val="68747B"/>
-                </a:solidFill>
-                <a:latin typeface="Arial"/>
-              </a:rPr>
-              <a:t>Incident-base
-November close</a:t>
-            </a:r>
-          </a:p>
-        </p:txBody>
-      </p:sp>
-      <p:sp>
-        <p:nvSpPr>
-          <p:cNvPr id="14" name="TextBox 13"/>
-          <p:cNvSpPr txBox="1"/>
-          <p:nvPr/>
-        </p:nvSpPr>
-        <p:spPr>
-          <a:xfrm>
-            <a:off x="2176272" y="1636776"/>
-            <a:ext cx="219456" cy="256032"/>
-          </a:xfrm>
-          <a:prstGeom prst="rect">
-            <a:avLst/>
-          </a:prstGeom>
-          <a:noFill/>
-        </p:spPr>
-        <p:txBody>
-          <a:bodyPr wrap="square" lIns="18288" rIns="18288" tIns="18288" bIns="18288" anchor="ctr">
-            <a:spAutoFit/>
-          </a:bodyPr>
-          <a:lstStyle/>
-          <a:p>
-            <a:pPr algn="ctr">
-              <a:spcBef>
-                <a:spcPts val="0"/>
-              </a:spcBef>
-              <a:spcAft>
-                <a:spcPts val="0"/>
-              </a:spcAft>
-            </a:pPr>
-            <a:r>
-              <a:rPr sz="1300" b="1">
-                <a:solidFill>
-                  <a:srgbClr val="A9B0B2"/>
-                </a:solidFill>
-                <a:latin typeface="Arial"/>
-              </a:rPr>
-              <a:t>−</a:t>
-            </a:r>
-          </a:p>
-        </p:txBody>
-      </p:sp>
-      <p:sp>
-        <p:nvSpPr>
-          <p:cNvPr id="15" name="TextBox 14"/>
-          <p:cNvSpPr txBox="1"/>
-          <p:nvPr/>
-        </p:nvSpPr>
-        <p:spPr>
-          <a:xfrm>
-            <a:off x="2514600" y="1572768"/>
-            <a:ext cx="1508760" cy="384048"/>
-          </a:xfrm>
-          <a:prstGeom prst="rect">
-            <a:avLst/>
-          </a:prstGeom>
-          <a:noFill/>
-        </p:spPr>
-        <p:txBody>
-          <a:bodyPr wrap="square" lIns="18288" rIns="18288" tIns="18288" bIns="18288" anchor="ctr">
-            <a:spAutoFit/>
-          </a:bodyPr>
-          <a:lstStyle/>
-          <a:p>
-            <a:pPr algn="ctr">
-              <a:spcBef>
-                <a:spcPts val="0"/>
-              </a:spcBef>
-              <a:spcAft>
-                <a:spcPts val="0"/>
-              </a:spcAft>
-            </a:pPr>
-            <a:r>
-              <a:rPr sz="1800" b="1">
-                <a:solidFill>
-                  <a:srgbClr val="C49500"/>
-                </a:solidFill>
-                <a:latin typeface="Arial"/>
-              </a:rPr>
-              <a:t>−$50m</a:t>
-            </a:r>
-          </a:p>
-        </p:txBody>
-      </p:sp>
-      <p:cxnSp>
-        <p:nvCxnSpPr>
-          <p:cNvPr id="16" name="Connector 15"/>
-          <p:cNvCxnSpPr/>
-          <p:nvPr/>
-        </p:nvCxnSpPr>
-        <p:spPr>
-          <a:xfrm>
-            <a:off x="2587752" y="2048256"/>
-            <a:ext cx="1362456" cy="0"/>
-          </a:xfrm>
-          <a:prstGeom prst="line">
-            <a:avLst/>
-          </a:prstGeom>
-          <a:ln w="21590">
-            <a:solidFill>
-              <a:srgbClr val="C49500"/>
-            </a:solidFill>
-          </a:ln>
-        </p:spPr>
-        <p:style>
-          <a:lnRef idx="2">
-            <a:schemeClr val="accent1"/>
-          </a:lnRef>
-          <a:fillRef idx="0">
-            <a:schemeClr val="accent1"/>
-          </a:fillRef>
-          <a:effectRef idx="1">
-            <a:schemeClr val="accent1"/>
-          </a:effectRef>
-          <a:fontRef idx="minor">
-            <a:schemeClr val="tx1"/>
-          </a:fontRef>
-        </p:style>
-      </p:cxnSp>
-      <p:sp>
-        <p:nvSpPr>
-          <p:cNvPr id="17" name="TextBox 16"/>
-          <p:cNvSpPr txBox="1"/>
-          <p:nvPr/>
-        </p:nvSpPr>
-        <p:spPr>
-          <a:xfrm>
-            <a:off x="2514600" y="2148840"/>
-            <a:ext cx="1508760" cy="438912"/>
-          </a:xfrm>
-          <a:prstGeom prst="rect">
-            <a:avLst/>
-          </a:prstGeom>
-          <a:noFill/>
-        </p:spPr>
-        <p:txBody>
-          <a:bodyPr wrap="square" lIns="18288" rIns="18288" tIns="18288" bIns="18288" anchor="ctr">
-            <a:spAutoFit/>
-          </a:bodyPr>
-          <a:lstStyle/>
-          <a:p>
-            <a:pPr algn="ctr">
-              <a:spcBef>
-                <a:spcPts val="0"/>
-              </a:spcBef>
-              <a:spcAft>
-                <a:spcPts val="0"/>
-              </a:spcAft>
-            </a:pPr>
-            <a:r>
-              <a:rPr sz="760" b="1">
-                <a:solidFill>
-                  <a:srgbClr val="68747B"/>
-                </a:solidFill>
-                <a:latin typeface="Arial"/>
-              </a:rPr>
-              <a:t>Settlement
-accelerated</a:t>
-            </a:r>
-          </a:p>
-        </p:txBody>
-      </p:sp>
-      <p:sp>
-        <p:nvSpPr>
-          <p:cNvPr id="18" name="TextBox 17"/>
-          <p:cNvSpPr txBox="1"/>
-          <p:nvPr/>
-        </p:nvSpPr>
-        <p:spPr>
-          <a:xfrm>
-            <a:off x="4032504" y="1636776"/>
-            <a:ext cx="219456" cy="256032"/>
-          </a:xfrm>
-          <a:prstGeom prst="rect">
-            <a:avLst/>
-          </a:prstGeom>
-          <a:noFill/>
-        </p:spPr>
-        <p:txBody>
-          <a:bodyPr wrap="square" lIns="18288" rIns="18288" tIns="18288" bIns="18288" anchor="ctr">
-            <a:spAutoFit/>
-          </a:bodyPr>
-          <a:lstStyle/>
-          <a:p>
-            <a:pPr algn="ctr">
-              <a:spcBef>
-                <a:spcPts val="0"/>
-              </a:spcBef>
-              <a:spcAft>
-                <a:spcPts val="0"/>
-              </a:spcAft>
-            </a:pPr>
-            <a:r>
-              <a:rPr sz="1300" b="1">
-                <a:solidFill>
-                  <a:srgbClr val="A9B0B2"/>
-                </a:solidFill>
-                <a:latin typeface="Arial"/>
-              </a:rPr>
-              <a:t>−</a:t>
-            </a:r>
-          </a:p>
-        </p:txBody>
-      </p:sp>
-      <p:sp>
-        <p:nvSpPr>
-          <p:cNvPr id="19" name="TextBox 18"/>
-          <p:cNvSpPr txBox="1"/>
-          <p:nvPr/>
-        </p:nvSpPr>
-        <p:spPr>
-          <a:xfrm>
-            <a:off x="4297680" y="1572768"/>
-            <a:ext cx="1508760" cy="384048"/>
-          </a:xfrm>
-          <a:prstGeom prst="rect">
-            <a:avLst/>
-          </a:prstGeom>
-          <a:noFill/>
-        </p:spPr>
-        <p:txBody>
-          <a:bodyPr wrap="square" lIns="18288" rIns="18288" tIns="18288" bIns="18288" anchor="ctr">
-            <a:spAutoFit/>
-          </a:bodyPr>
-          <a:lstStyle/>
-          <a:p>
-            <a:pPr algn="ctr">
-              <a:spcBef>
-                <a:spcPts val="0"/>
-              </a:spcBef>
-              <a:spcAft>
-                <a:spcPts val="0"/>
-              </a:spcAft>
-            </a:pPr>
-            <a:r>
-              <a:rPr sz="1800" b="1">
-                <a:solidFill>
-                  <a:srgbClr val="C49500"/>
-                </a:solidFill>
-                <a:latin typeface="Arial"/>
-              </a:rPr>
-              <a:t>−$100m</a:t>
-            </a:r>
-          </a:p>
-        </p:txBody>
-      </p:sp>
-      <p:cxnSp>
-        <p:nvCxnSpPr>
-          <p:cNvPr id="20" name="Connector 19"/>
-          <p:cNvCxnSpPr/>
-          <p:nvPr/>
-        </p:nvCxnSpPr>
-        <p:spPr>
-          <a:xfrm>
-            <a:off x="4370832" y="2048256"/>
-            <a:ext cx="1362456" cy="0"/>
-          </a:xfrm>
-          <a:prstGeom prst="line">
-            <a:avLst/>
-          </a:prstGeom>
-          <a:ln w="21590">
-            <a:solidFill>
-              <a:srgbClr val="C49500"/>
-            </a:solidFill>
-          </a:ln>
-        </p:spPr>
-        <p:style>
-          <a:lnRef idx="2">
-            <a:schemeClr val="accent1"/>
-          </a:lnRef>
-          <a:fillRef idx="0">
-            <a:schemeClr val="accent1"/>
-          </a:fillRef>
-          <a:effectRef idx="1">
-            <a:schemeClr val="accent1"/>
-          </a:effectRef>
-          <a:fontRef idx="minor">
-            <a:schemeClr val="tx1"/>
-          </a:fontRef>
-        </p:style>
-      </p:cxnSp>
-      <p:sp>
-        <p:nvSpPr>
-          <p:cNvPr id="21" name="TextBox 20"/>
-          <p:cNvSpPr txBox="1"/>
-          <p:nvPr/>
-        </p:nvSpPr>
-        <p:spPr>
-          <a:xfrm>
-            <a:off x="4297680" y="2148840"/>
-            <a:ext cx="1508760" cy="438912"/>
-          </a:xfrm>
-          <a:prstGeom prst="rect">
-            <a:avLst/>
-          </a:prstGeom>
-          <a:noFill/>
-        </p:spPr>
-        <p:txBody>
-          <a:bodyPr wrap="square" lIns="18288" rIns="18288" tIns="18288" bIns="18288" anchor="ctr">
-            <a:spAutoFit/>
-          </a:bodyPr>
-          <a:lstStyle/>
-          <a:p>
-            <a:pPr algn="ctr">
-              <a:spcBef>
-                <a:spcPts val="0"/>
-              </a:spcBef>
-              <a:spcAft>
-                <a:spcPts val="0"/>
-              </a:spcAft>
-            </a:pPr>
-            <a:r>
-              <a:rPr sz="760" b="1">
-                <a:solidFill>
-                  <a:srgbClr val="68747B"/>
-                </a:solidFill>
-                <a:latin typeface="Arial"/>
-              </a:rPr>
-              <a:t>Collateral
-return delayed</a:t>
-            </a:r>
-          </a:p>
-        </p:txBody>
-      </p:sp>
-      <p:sp>
-        <p:nvSpPr>
-          <p:cNvPr id="22" name="TextBox 21"/>
-          <p:cNvSpPr txBox="1"/>
-          <p:nvPr/>
-        </p:nvSpPr>
-        <p:spPr>
-          <a:xfrm>
-            <a:off x="5815584" y="1636776"/>
-            <a:ext cx="219456" cy="256032"/>
-          </a:xfrm>
-          <a:prstGeom prst="rect">
-            <a:avLst/>
-          </a:prstGeom>
-          <a:noFill/>
-        </p:spPr>
-        <p:txBody>
-          <a:bodyPr wrap="square" lIns="18288" rIns="18288" tIns="18288" bIns="18288" anchor="ctr">
-            <a:spAutoFit/>
-          </a:bodyPr>
-          <a:lstStyle/>
-          <a:p>
-            <a:pPr algn="ctr">
-              <a:spcBef>
-                <a:spcPts val="0"/>
-              </a:spcBef>
-              <a:spcAft>
-                <a:spcPts val="0"/>
-              </a:spcAft>
-            </a:pPr>
-            <a:r>
-              <a:rPr sz="1300" b="1">
-                <a:solidFill>
-                  <a:srgbClr val="A9B0B2"/>
-                </a:solidFill>
-                <a:latin typeface="Arial"/>
-              </a:rPr>
-              <a:t>−</a:t>
-            </a:r>
-          </a:p>
-        </p:txBody>
-      </p:sp>
-      <p:sp>
-        <p:nvSpPr>
-          <p:cNvPr id="23" name="TextBox 22"/>
-          <p:cNvSpPr txBox="1"/>
-          <p:nvPr/>
-        </p:nvSpPr>
-        <p:spPr>
-          <a:xfrm>
-            <a:off x="6144768" y="1572768"/>
-            <a:ext cx="1508760" cy="384048"/>
-          </a:xfrm>
-          <a:prstGeom prst="rect">
-            <a:avLst/>
-          </a:prstGeom>
-          <a:noFill/>
-        </p:spPr>
-        <p:txBody>
-          <a:bodyPr wrap="square" lIns="18288" rIns="18288" tIns="18288" bIns="18288" anchor="ctr">
-            <a:spAutoFit/>
-          </a:bodyPr>
-          <a:lstStyle/>
-          <a:p>
-            <a:pPr algn="ctr">
-              <a:spcBef>
-                <a:spcPts val="0"/>
-              </a:spcBef>
-              <a:spcAft>
-                <a:spcPts val="0"/>
-              </a:spcAft>
-            </a:pPr>
-            <a:r>
-              <a:rPr sz="1800" b="1">
-                <a:solidFill>
-                  <a:srgbClr val="C82036"/>
-                </a:solidFill>
-                <a:latin typeface="Arial"/>
-              </a:rPr>
-              <a:t>−$100m</a:t>
-            </a:r>
-          </a:p>
-        </p:txBody>
-      </p:sp>
-      <p:cxnSp>
-        <p:nvCxnSpPr>
-          <p:cNvPr id="24" name="Connector 23"/>
-          <p:cNvCxnSpPr/>
-          <p:nvPr/>
-        </p:nvCxnSpPr>
-        <p:spPr>
-          <a:xfrm>
-            <a:off x="6217920" y="2048256"/>
-            <a:ext cx="1362455" cy="0"/>
-          </a:xfrm>
-          <a:prstGeom prst="line">
-            <a:avLst/>
-          </a:prstGeom>
-          <a:ln w="21590">
-            <a:solidFill>
-              <a:srgbClr val="C82036"/>
-            </a:solidFill>
-          </a:ln>
-        </p:spPr>
-        <p:style>
-          <a:lnRef idx="2">
-            <a:schemeClr val="accent1"/>
-          </a:lnRef>
-          <a:fillRef idx="0">
-            <a:schemeClr val="accent1"/>
-          </a:fillRef>
-          <a:effectRef idx="1">
-            <a:schemeClr val="accent1"/>
-          </a:effectRef>
-          <a:fontRef idx="minor">
-            <a:schemeClr val="tx1"/>
-          </a:fontRef>
-        </p:style>
-      </p:cxnSp>
-      <p:sp>
-        <p:nvSpPr>
-          <p:cNvPr id="25" name="TextBox 24"/>
-          <p:cNvSpPr txBox="1"/>
-          <p:nvPr/>
-        </p:nvSpPr>
-        <p:spPr>
-          <a:xfrm>
-            <a:off x="6144768" y="2148840"/>
-            <a:ext cx="1508760" cy="438912"/>
-          </a:xfrm>
-          <a:prstGeom prst="rect">
-            <a:avLst/>
-          </a:prstGeom>
-          <a:noFill/>
-        </p:spPr>
-        <p:txBody>
-          <a:bodyPr wrap="square" lIns="18288" rIns="18288" tIns="18288" bIns="18288" anchor="ctr">
-            <a:spAutoFit/>
-          </a:bodyPr>
-          <a:lstStyle/>
-          <a:p>
-            <a:pPr algn="ctr">
-              <a:spcBef>
-                <a:spcPts val="0"/>
-              </a:spcBef>
-              <a:spcAft>
-                <a:spcPts val="0"/>
-              </a:spcAft>
-            </a:pPr>
-            <a:r>
-              <a:rPr sz="760" b="1">
-                <a:solidFill>
-                  <a:srgbClr val="68747B"/>
-                </a:solidFill>
-                <a:latin typeface="Arial"/>
-              </a:rPr>
-              <a:t>Additional
-withdrawals</a:t>
-            </a:r>
-          </a:p>
-        </p:txBody>
-      </p:sp>
-      <p:sp>
-        <p:nvSpPr>
-          <p:cNvPr id="26" name="TextBox 25"/>
-          <p:cNvSpPr txBox="1"/>
-          <p:nvPr/>
-        </p:nvSpPr>
-        <p:spPr>
-          <a:xfrm>
-            <a:off x="7662671" y="1636776"/>
-            <a:ext cx="219456" cy="256032"/>
-          </a:xfrm>
-          <a:prstGeom prst="rect">
-            <a:avLst/>
-          </a:prstGeom>
-          <a:noFill/>
-        </p:spPr>
-        <p:txBody>
-          <a:bodyPr wrap="square" lIns="18288" rIns="18288" tIns="18288" bIns="18288" anchor="ctr">
-            <a:spAutoFit/>
-          </a:bodyPr>
-          <a:lstStyle/>
-          <a:p>
-            <a:pPr algn="ctr">
-              <a:spcBef>
-                <a:spcPts val="0"/>
-              </a:spcBef>
-              <a:spcAft>
-                <a:spcPts val="0"/>
-              </a:spcAft>
-            </a:pPr>
-            <a:r>
-              <a:rPr sz="1300" b="1">
-                <a:solidFill>
-                  <a:srgbClr val="A9B0B2"/>
-                </a:solidFill>
-                <a:latin typeface="Arial"/>
-              </a:rPr>
-              <a:t>−</a:t>
-            </a:r>
-          </a:p>
-        </p:txBody>
-      </p:sp>
-      <p:sp>
-        <p:nvSpPr>
-          <p:cNvPr id="27" name="TextBox 26"/>
-          <p:cNvSpPr txBox="1"/>
-          <p:nvPr/>
-        </p:nvSpPr>
-        <p:spPr>
-          <a:xfrm>
-            <a:off x="7973568" y="1572768"/>
-            <a:ext cx="1508760" cy="384048"/>
-          </a:xfrm>
-          <a:prstGeom prst="rect">
-            <a:avLst/>
-          </a:prstGeom>
-          <a:noFill/>
-        </p:spPr>
-        <p:txBody>
-          <a:bodyPr wrap="square" lIns="18288" rIns="18288" tIns="18288" bIns="18288" anchor="ctr">
-            <a:spAutoFit/>
-          </a:bodyPr>
-          <a:lstStyle/>
-          <a:p>
-            <a:pPr algn="ctr">
-              <a:spcBef>
-                <a:spcPts val="0"/>
-              </a:spcBef>
-              <a:spcAft>
-                <a:spcPts val="0"/>
-              </a:spcAft>
-            </a:pPr>
-            <a:r>
-              <a:rPr sz="1800" b="1">
-                <a:solidFill>
-                  <a:srgbClr val="C82036"/>
-                </a:solidFill>
-                <a:latin typeface="Arial"/>
-              </a:rPr>
-              <a:t>−$50m</a:t>
-            </a:r>
-          </a:p>
-        </p:txBody>
-      </p:sp>
-      <p:cxnSp>
-        <p:nvCxnSpPr>
-          <p:cNvPr id="28" name="Connector 27"/>
-          <p:cNvCxnSpPr/>
-          <p:nvPr/>
-        </p:nvCxnSpPr>
-        <p:spPr>
-          <a:xfrm>
-            <a:off x="8046720" y="2048256"/>
-            <a:ext cx="1362456" cy="0"/>
-          </a:xfrm>
-          <a:prstGeom prst="line">
-            <a:avLst/>
-          </a:prstGeom>
-          <a:ln w="21590">
-            <a:solidFill>
-              <a:srgbClr val="C82036"/>
-            </a:solidFill>
-          </a:ln>
-        </p:spPr>
-        <p:style>
-          <a:lnRef idx="2">
-            <a:schemeClr val="accent1"/>
-          </a:lnRef>
-          <a:fillRef idx="0">
-            <a:schemeClr val="accent1"/>
-          </a:fillRef>
-          <a:effectRef idx="1">
-            <a:schemeClr val="accent1"/>
-          </a:effectRef>
-          <a:fontRef idx="minor">
-            <a:schemeClr val="tx1"/>
-          </a:fontRef>
-        </p:style>
-      </p:cxnSp>
-      <p:sp>
-        <p:nvSpPr>
-          <p:cNvPr id="29" name="TextBox 28"/>
-          <p:cNvSpPr txBox="1"/>
-          <p:nvPr/>
-        </p:nvSpPr>
-        <p:spPr>
-          <a:xfrm>
-            <a:off x="7973568" y="2148840"/>
-            <a:ext cx="1508760" cy="438912"/>
-          </a:xfrm>
-          <a:prstGeom prst="rect">
-            <a:avLst/>
-          </a:prstGeom>
-          <a:noFill/>
-        </p:spPr>
-        <p:txBody>
-          <a:bodyPr wrap="square" lIns="18288" rIns="18288" tIns="18288" bIns="18288" anchor="ctr">
-            <a:spAutoFit/>
-          </a:bodyPr>
-          <a:lstStyle/>
-          <a:p>
-            <a:pPr algn="ctr">
-              <a:spcBef>
-                <a:spcPts val="0"/>
-              </a:spcBef>
-              <a:spcAft>
-                <a:spcPts val="0"/>
-              </a:spcAft>
-            </a:pPr>
-            <a:r>
-              <a:rPr sz="760" b="1">
-                <a:solidFill>
-                  <a:srgbClr val="68747B"/>
-                </a:solidFill>
-                <a:latin typeface="Arial"/>
-              </a:rPr>
-              <a:t>Rollover not
-renewed</a:t>
-            </a:r>
-          </a:p>
-        </p:txBody>
-      </p:sp>
-      <p:sp>
-        <p:nvSpPr>
-          <p:cNvPr id="30" name="TextBox 29"/>
-          <p:cNvSpPr txBox="1"/>
-          <p:nvPr/>
-        </p:nvSpPr>
-        <p:spPr>
-          <a:xfrm>
-            <a:off x="9491472" y="1636776"/>
-            <a:ext cx="219456" cy="256032"/>
-          </a:xfrm>
-          <a:prstGeom prst="rect">
-            <a:avLst/>
-          </a:prstGeom>
-          <a:noFill/>
-        </p:spPr>
-        <p:txBody>
-          <a:bodyPr wrap="square" lIns="18288" rIns="18288" tIns="18288" bIns="18288" anchor="ctr">
-            <a:spAutoFit/>
-          </a:bodyPr>
-          <a:lstStyle/>
-          <a:p>
-            <a:pPr algn="ctr">
-              <a:spcBef>
-                <a:spcPts val="0"/>
-              </a:spcBef>
-              <a:spcAft>
-                <a:spcPts val="0"/>
-              </a:spcAft>
-            </a:pPr>
-            <a:r>
-              <a:rPr sz="1300" b="1">
-                <a:solidFill>
-                  <a:srgbClr val="A9B0B2"/>
-                </a:solidFill>
-                <a:latin typeface="Arial"/>
-              </a:rPr>
-              <a:t>−</a:t>
-            </a:r>
-          </a:p>
-        </p:txBody>
-      </p:sp>
-      <p:sp>
-        <p:nvSpPr>
-          <p:cNvPr id="31" name="TextBox 30"/>
-          <p:cNvSpPr txBox="1"/>
-          <p:nvPr/>
-        </p:nvSpPr>
-        <p:spPr>
-          <a:xfrm>
-            <a:off x="9829800" y="1572768"/>
-            <a:ext cx="1508760" cy="384048"/>
-          </a:xfrm>
-          <a:prstGeom prst="rect">
-            <a:avLst/>
-          </a:prstGeom>
-          <a:noFill/>
-        </p:spPr>
-        <p:txBody>
-          <a:bodyPr wrap="square" lIns="18288" rIns="18288" tIns="18288" bIns="18288" anchor="ctr">
-            <a:spAutoFit/>
-          </a:bodyPr>
-          <a:lstStyle/>
-          <a:p>
-            <a:pPr algn="ctr">
-              <a:spcBef>
-                <a:spcPts val="0"/>
-              </a:spcBef>
-              <a:spcAft>
-                <a:spcPts val="0"/>
-              </a:spcAft>
-            </a:pPr>
-            <a:r>
-              <a:rPr sz="1800" b="1">
-                <a:solidFill>
-                  <a:srgbClr val="C82036"/>
-                </a:solidFill>
-                <a:latin typeface="Arial"/>
-              </a:rPr>
-              <a:t>$549m</a:t>
-            </a:r>
-          </a:p>
-        </p:txBody>
-      </p:sp>
-      <p:cxnSp>
-        <p:nvCxnSpPr>
-          <p:cNvPr id="32" name="Connector 31"/>
-          <p:cNvCxnSpPr/>
-          <p:nvPr/>
-        </p:nvCxnSpPr>
-        <p:spPr>
-          <a:xfrm>
-            <a:off x="9902952" y="2048256"/>
-            <a:ext cx="1362456" cy="0"/>
-          </a:xfrm>
-          <a:prstGeom prst="line">
-            <a:avLst/>
-          </a:prstGeom>
-          <a:ln w="21590">
-            <a:solidFill>
-              <a:srgbClr val="C82036"/>
-            </a:solidFill>
-          </a:ln>
-        </p:spPr>
-        <p:style>
-          <a:lnRef idx="2">
-            <a:schemeClr val="accent1"/>
-          </a:lnRef>
-          <a:fillRef idx="0">
-            <a:schemeClr val="accent1"/>
-          </a:fillRef>
-          <a:effectRef idx="1">
-            <a:schemeClr val="accent1"/>
-          </a:effectRef>
-          <a:fontRef idx="minor">
-            <a:schemeClr val="tx1"/>
-          </a:fontRef>
-        </p:style>
-      </p:cxnSp>
-      <p:sp>
-        <p:nvSpPr>
-          <p:cNvPr id="33" name="TextBox 32"/>
-          <p:cNvSpPr txBox="1"/>
-          <p:nvPr/>
-        </p:nvSpPr>
-        <p:spPr>
-          <a:xfrm>
-            <a:off x="9829800" y="2148840"/>
-            <a:ext cx="1508760" cy="438912"/>
-          </a:xfrm>
-          <a:prstGeom prst="rect">
-            <a:avLst/>
-          </a:prstGeom>
-          <a:noFill/>
-        </p:spPr>
-        <p:txBody>
-          <a:bodyPr wrap="square" lIns="18288" rIns="18288" tIns="18288" bIns="18288" anchor="ctr">
-            <a:spAutoFit/>
-          </a:bodyPr>
-          <a:lstStyle/>
-          <a:p>
-            <a:pPr algn="ctr">
-              <a:spcBef>
-                <a:spcPts val="0"/>
-              </a:spcBef>
-              <a:spcAft>
-                <a:spcPts val="0"/>
-              </a:spcAft>
-            </a:pPr>
-            <a:r>
-              <a:rPr sz="760" b="1">
-                <a:solidFill>
-                  <a:srgbClr val="68747B"/>
-                </a:solidFill>
-                <a:latin typeface="Arial"/>
-              </a:rPr>
-              <a:t>Stress cash
-30 November</a:t>
-            </a:r>
-          </a:p>
-        </p:txBody>
-      </p:sp>
-      <p:sp>
-        <p:nvSpPr>
-          <p:cNvPr id="34" name="Rectangle 33"/>
+              <a:t>$849m   −   $50m   −   $100m   −   $100m   −   $50m   =   $549m</a:t>
+            </a:r>
+          </a:p>
+        </p:txBody>
+      </p:sp>
+      <p:sp>
+        <p:nvSpPr>
+          <p:cNvPr id="11" name="Rectangle 10"/>
           <p:cNvSpPr/>
           <p:nvPr/>
         </p:nvSpPr>
         <p:spPr>
           <a:xfrm>
-            <a:off x="685800" y="2944368"/>
-            <a:ext cx="6766560" cy="2286000"/>
+            <a:off x="640080" y="1673352"/>
+            <a:ext cx="7927848" cy="3218688"/>
           </a:xfrm>
           <a:prstGeom prst="rect">
             <a:avLst/>
@@ -12156,21 +11481,21 @@
       </p:sp>
       <p:cxnSp>
         <p:nvCxnSpPr>
-          <p:cNvPr id="35" name="Connector 34"/>
+          <p:cNvPr id="12" name="Connector 11"/>
           <p:cNvCxnSpPr/>
           <p:nvPr/>
         </p:nvCxnSpPr>
         <p:spPr>
           <a:xfrm>
-            <a:off x="1188720" y="4598416"/>
-            <a:ext cx="6080760" cy="0"/>
+            <a:off x="1207007" y="3916680"/>
+            <a:ext cx="7159752" cy="0"/>
           </a:xfrm>
           <a:prstGeom prst="line">
             <a:avLst/>
           </a:prstGeom>
-          <a:ln w="6350">
+          <a:ln w="6985">
             <a:solidFill>
-              <a:srgbClr val="E6E9E6"/>
+              <a:srgbClr val="E2E6E3"/>
             </a:solidFill>
           </a:ln>
         </p:spPr>
@@ -12189,23 +11514,65 @@
           </a:fontRef>
         </p:style>
       </p:cxnSp>
+      <p:sp>
+        <p:nvSpPr>
+          <p:cNvPr id="13" name="TextBox 12"/>
+          <p:cNvSpPr txBox="1"/>
+          <p:nvPr/>
+        </p:nvSpPr>
+        <p:spPr>
+          <a:xfrm>
+            <a:off x="694944" y="3843528"/>
+            <a:ext cx="384048" cy="146304"/>
+          </a:xfrm>
+          <a:prstGeom prst="rect">
+            <a:avLst/>
+          </a:prstGeom>
+          <a:noFill/>
+        </p:spPr>
+        <p:txBody>
+          <a:bodyPr wrap="square" lIns="18288" rIns="18288" tIns="18288" bIns="18288" anchor="ctr">
+            <a:spAutoFit/>
+          </a:bodyPr>
+          <a:lstStyle/>
+          <a:p>
+            <a:pPr algn="r">
+              <a:spcBef>
+                <a:spcPts val="0"/>
+              </a:spcBef>
+              <a:spcAft>
+                <a:spcPts val="0"/>
+              </a:spcAft>
+            </a:pPr>
+            <a:r>
+              <a:rPr sz="680" b="0">
+                <a:solidFill>
+                  <a:srgbClr val="68747B"/>
+                </a:solidFill>
+                <a:latin typeface="Arial"/>
+              </a:rPr>
+              <a:t>500</a:t>
+            </a:r>
+          </a:p>
+        </p:txBody>
+      </p:sp>
       <p:cxnSp>
         <p:nvCxnSpPr>
-          <p:cNvPr id="36" name="Connector 35"/>
+          <p:cNvPr id="14" name="Connector 13"/>
           <p:cNvCxnSpPr/>
           <p:nvPr/>
         </p:nvCxnSpPr>
         <p:spPr>
           <a:xfrm>
-            <a:off x="1188720" y="4248912"/>
-            <a:ext cx="6080760" cy="0"/>
+            <a:off x="1207007" y="3429000"/>
+            <a:ext cx="7159752" cy="0"/>
           </a:xfrm>
           <a:prstGeom prst="line">
             <a:avLst/>
           </a:prstGeom>
-          <a:ln w="6350">
+          <a:ln w="6985">
             <a:solidFill>
-              <a:srgbClr val="E6E9E6"/>
+              <a:srgbClr val="E2E6E3"/>
             </a:solidFill>
           </a:ln>
         </p:spPr>
@@ -12224,23 +11591,65 @@
           </a:fontRef>
         </p:style>
       </p:cxnSp>
+      <p:sp>
+        <p:nvSpPr>
+          <p:cNvPr id="15" name="TextBox 14"/>
+          <p:cNvSpPr txBox="1"/>
+          <p:nvPr/>
+        </p:nvSpPr>
+        <p:spPr>
+          <a:xfrm>
+            <a:off x="694944" y="3355848"/>
+            <a:ext cx="384048" cy="146304"/>
+          </a:xfrm>
+          <a:prstGeom prst="rect">
+            <a:avLst/>
+          </a:prstGeom>
+          <a:noFill/>
+        </p:spPr>
+        <p:txBody>
+          <a:bodyPr wrap="square" lIns="18288" rIns="18288" tIns="18288" bIns="18288" anchor="ctr">
+            <a:spAutoFit/>
+          </a:bodyPr>
+          <a:lstStyle/>
+          <a:p>
+            <a:pPr algn="r">
+              <a:spcBef>
+                <a:spcPts val="0"/>
+              </a:spcBef>
+              <a:spcAft>
+                <a:spcPts val="0"/>
+              </a:spcAft>
+            </a:pPr>
+            <a:r>
+              <a:rPr sz="680" b="0">
+                <a:solidFill>
+                  <a:srgbClr val="68747B"/>
+                </a:solidFill>
+                <a:latin typeface="Arial"/>
+              </a:rPr>
+              <a:t>600</a:t>
+            </a:r>
+          </a:p>
+        </p:txBody>
+      </p:sp>
       <p:cxnSp>
         <p:nvCxnSpPr>
-          <p:cNvPr id="37" name="Connector 36"/>
+          <p:cNvPr id="16" name="Connector 15"/>
           <p:cNvCxnSpPr/>
           <p:nvPr/>
         </p:nvCxnSpPr>
         <p:spPr>
           <a:xfrm>
-            <a:off x="1188720" y="3899408"/>
-            <a:ext cx="6080760" cy="0"/>
+            <a:off x="1207007" y="2941320"/>
+            <a:ext cx="7159752" cy="0"/>
           </a:xfrm>
           <a:prstGeom prst="line">
             <a:avLst/>
           </a:prstGeom>
-          <a:ln w="13970">
+          <a:ln w="18415">
             <a:solidFill>
-              <a:srgbClr val="C49500"/>
+              <a:srgbClr val="C82036"/>
             </a:solidFill>
           </a:ln>
         </p:spPr>
@@ -12259,23 +11668,65 @@
           </a:fontRef>
         </p:style>
       </p:cxnSp>
+      <p:sp>
+        <p:nvSpPr>
+          <p:cNvPr id="17" name="TextBox 16"/>
+          <p:cNvSpPr txBox="1"/>
+          <p:nvPr/>
+        </p:nvSpPr>
+        <p:spPr>
+          <a:xfrm>
+            <a:off x="694944" y="2868168"/>
+            <a:ext cx="384048" cy="146304"/>
+          </a:xfrm>
+          <a:prstGeom prst="rect">
+            <a:avLst/>
+          </a:prstGeom>
+          <a:noFill/>
+        </p:spPr>
+        <p:txBody>
+          <a:bodyPr wrap="square" lIns="18288" rIns="18288" tIns="18288" bIns="18288" anchor="ctr">
+            <a:spAutoFit/>
+          </a:bodyPr>
+          <a:lstStyle/>
+          <a:p>
+            <a:pPr algn="r">
+              <a:spcBef>
+                <a:spcPts val="0"/>
+              </a:spcBef>
+              <a:spcAft>
+                <a:spcPts val="0"/>
+              </a:spcAft>
+            </a:pPr>
+            <a:r>
+              <a:rPr sz="680" b="1">
+                <a:solidFill>
+                  <a:srgbClr val="C82036"/>
+                </a:solidFill>
+                <a:latin typeface="Arial"/>
+              </a:rPr>
+              <a:t>700</a:t>
+            </a:r>
+          </a:p>
+        </p:txBody>
+      </p:sp>
       <p:cxnSp>
         <p:nvCxnSpPr>
-          <p:cNvPr id="38" name="Connector 37"/>
+          <p:cNvPr id="18" name="Connector 17"/>
           <p:cNvCxnSpPr/>
           <p:nvPr/>
         </p:nvCxnSpPr>
         <p:spPr>
           <a:xfrm>
-            <a:off x="1188720" y="3549904"/>
-            <a:ext cx="6080760" cy="0"/>
+            <a:off x="1207007" y="2453640"/>
+            <a:ext cx="7159752" cy="0"/>
           </a:xfrm>
           <a:prstGeom prst="line">
             <a:avLst/>
           </a:prstGeom>
-          <a:ln w="6350">
+          <a:ln w="6985">
             <a:solidFill>
-              <a:srgbClr val="E6E9E6"/>
+              <a:srgbClr val="E2E6E3"/>
             </a:solidFill>
           </a:ln>
         </p:spPr>
@@ -12294,23 +11745,65 @@
           </a:fontRef>
         </p:style>
       </p:cxnSp>
+      <p:sp>
+        <p:nvSpPr>
+          <p:cNvPr id="19" name="TextBox 18"/>
+          <p:cNvSpPr txBox="1"/>
+          <p:nvPr/>
+        </p:nvSpPr>
+        <p:spPr>
+          <a:xfrm>
+            <a:off x="694944" y="2380488"/>
+            <a:ext cx="384048" cy="146304"/>
+          </a:xfrm>
+          <a:prstGeom prst="rect">
+            <a:avLst/>
+          </a:prstGeom>
+          <a:noFill/>
+        </p:spPr>
+        <p:txBody>
+          <a:bodyPr wrap="square" lIns="18288" rIns="18288" tIns="18288" bIns="18288" anchor="ctr">
+            <a:spAutoFit/>
+          </a:bodyPr>
+          <a:lstStyle/>
+          <a:p>
+            <a:pPr algn="r">
+              <a:spcBef>
+                <a:spcPts val="0"/>
+              </a:spcBef>
+              <a:spcAft>
+                <a:spcPts val="0"/>
+              </a:spcAft>
+            </a:pPr>
+            <a:r>
+              <a:rPr sz="680" b="0">
+                <a:solidFill>
+                  <a:srgbClr val="68747B"/>
+                </a:solidFill>
+                <a:latin typeface="Arial"/>
+              </a:rPr>
+              <a:t>800</a:t>
+            </a:r>
+          </a:p>
+        </p:txBody>
+      </p:sp>
       <p:cxnSp>
         <p:nvCxnSpPr>
-          <p:cNvPr id="39" name="Connector 38"/>
+          <p:cNvPr id="20" name="Connector 19"/>
           <p:cNvCxnSpPr/>
           <p:nvPr/>
         </p:nvCxnSpPr>
         <p:spPr>
           <a:xfrm>
-            <a:off x="1188720" y="3200400"/>
-            <a:ext cx="6080760" cy="0"/>
+            <a:off x="1207007" y="1965960"/>
+            <a:ext cx="7159752" cy="0"/>
           </a:xfrm>
           <a:prstGeom prst="line">
             <a:avLst/>
           </a:prstGeom>
-          <a:ln w="6350">
+          <a:ln w="6985">
             <a:solidFill>
-              <a:srgbClr val="E6E9E6"/>
+              <a:srgbClr val="E2E6E3"/>
             </a:solidFill>
           </a:ln>
         </p:spPr>
@@ -12331,14 +11824,789 @@
       </p:cxnSp>
       <p:sp>
         <p:nvSpPr>
+          <p:cNvPr id="21" name="TextBox 20"/>
+          <p:cNvSpPr txBox="1"/>
+          <p:nvPr/>
+        </p:nvSpPr>
+        <p:spPr>
+          <a:xfrm>
+            <a:off x="694944" y="1892807"/>
+            <a:ext cx="384048" cy="146304"/>
+          </a:xfrm>
+          <a:prstGeom prst="rect">
+            <a:avLst/>
+          </a:prstGeom>
+          <a:noFill/>
+        </p:spPr>
+        <p:txBody>
+          <a:bodyPr wrap="square" lIns="18288" rIns="18288" tIns="18288" bIns="18288" anchor="ctr">
+            <a:spAutoFit/>
+          </a:bodyPr>
+          <a:lstStyle/>
+          <a:p>
+            <a:pPr algn="r">
+              <a:spcBef>
+                <a:spcPts val="0"/>
+              </a:spcBef>
+              <a:spcAft>
+                <a:spcPts val="0"/>
+              </a:spcAft>
+            </a:pPr>
+            <a:r>
+              <a:rPr sz="680" b="0">
+                <a:solidFill>
+                  <a:srgbClr val="68747B"/>
+                </a:solidFill>
+                <a:latin typeface="Arial"/>
+              </a:rPr>
+              <a:t>900</a:t>
+            </a:r>
+          </a:p>
+        </p:txBody>
+      </p:sp>
+      <p:sp>
+        <p:nvSpPr>
+          <p:cNvPr id="22" name="Rectangle 21"/>
+          <p:cNvSpPr/>
+          <p:nvPr/>
+        </p:nvSpPr>
+        <p:spPr>
+          <a:xfrm>
+            <a:off x="1207008" y="2214676"/>
+            <a:ext cx="566928" cy="1945843"/>
+          </a:xfrm>
+          <a:prstGeom prst="rect">
+            <a:avLst/>
+          </a:prstGeom>
+          <a:solidFill>
+            <a:srgbClr val="287FA8"/>
+          </a:solidFill>
+          <a:ln>
+            <a:noFill/>
+          </a:ln>
+        </p:spPr>
+        <p:style>
+          <a:lnRef idx="1">
+            <a:schemeClr val="accent1"/>
+          </a:lnRef>
+          <a:fillRef idx="3">
+            <a:schemeClr val="accent1"/>
+          </a:fillRef>
+          <a:effectRef idx="2">
+            <a:schemeClr val="accent1"/>
+          </a:effectRef>
+          <a:fontRef idx="minor">
+            <a:schemeClr val="lt1"/>
+          </a:fontRef>
+        </p:style>
+        <p:txBody>
+          <a:bodyPr rtlCol="0" anchor="ctr"/>
+          <a:lstStyle/>
+          <a:p>
+            <a:pPr algn="ctr"/>
+          </a:p>
+        </p:txBody>
+      </p:sp>
+      <p:sp>
+        <p:nvSpPr>
+          <p:cNvPr id="23" name="TextBox 22"/>
+          <p:cNvSpPr txBox="1"/>
+          <p:nvPr/>
+        </p:nvSpPr>
+        <p:spPr>
+          <a:xfrm>
+            <a:off x="1060704" y="1976932"/>
+            <a:ext cx="859536" cy="164592"/>
+          </a:xfrm>
+          <a:prstGeom prst="rect">
+            <a:avLst/>
+          </a:prstGeom>
+          <a:noFill/>
+        </p:spPr>
+        <p:txBody>
+          <a:bodyPr wrap="square" lIns="18288" rIns="18288" tIns="18288" bIns="18288" anchor="ctr">
+            <a:spAutoFit/>
+          </a:bodyPr>
+          <a:lstStyle/>
+          <a:p>
+            <a:pPr algn="ctr">
+              <a:spcBef>
+                <a:spcPts val="0"/>
+              </a:spcBef>
+              <a:spcAft>
+                <a:spcPts val="0"/>
+              </a:spcAft>
+            </a:pPr>
+            <a:r>
+              <a:rPr sz="800" b="1">
+                <a:solidFill>
+                  <a:srgbClr val="287FA8"/>
+                </a:solidFill>
+                <a:latin typeface="Arial"/>
+              </a:rPr>
+              <a:t>$849m</a:t>
+            </a:r>
+          </a:p>
+        </p:txBody>
+      </p:sp>
+      <p:sp>
+        <p:nvSpPr>
+          <p:cNvPr id="24" name="TextBox 23"/>
+          <p:cNvSpPr txBox="1"/>
+          <p:nvPr/>
+        </p:nvSpPr>
+        <p:spPr>
+          <a:xfrm>
+            <a:off x="950976" y="4261104"/>
+            <a:ext cx="1078992" cy="237744"/>
+          </a:xfrm>
+          <a:prstGeom prst="rect">
+            <a:avLst/>
+          </a:prstGeom>
+          <a:noFill/>
+        </p:spPr>
+        <p:txBody>
+          <a:bodyPr wrap="square" lIns="18288" rIns="18288" tIns="18288" bIns="18288" anchor="ctr">
+            <a:spAutoFit/>
+          </a:bodyPr>
+          <a:lstStyle/>
+          <a:p>
+            <a:pPr algn="ctr">
+              <a:spcBef>
+                <a:spcPts val="0"/>
+              </a:spcBef>
+              <a:spcAft>
+                <a:spcPts val="0"/>
+              </a:spcAft>
+            </a:pPr>
+            <a:r>
+              <a:rPr sz="650" b="1">
+                <a:solidFill>
+                  <a:srgbClr val="18232B"/>
+                </a:solidFill>
+                <a:latin typeface="Arial"/>
+              </a:rPr>
+              <a:t>INCIDENT BASE</a:t>
+            </a:r>
+          </a:p>
+        </p:txBody>
+      </p:sp>
+      <p:cxnSp>
+        <p:nvCxnSpPr>
+          <p:cNvPr id="25" name="Connector 24"/>
+          <p:cNvCxnSpPr/>
+          <p:nvPr/>
+        </p:nvCxnSpPr>
+        <p:spPr>
+          <a:xfrm>
+            <a:off x="1773936" y="2214676"/>
+            <a:ext cx="484632" cy="0"/>
+          </a:xfrm>
+          <a:prstGeom prst="line">
+            <a:avLst/>
+          </a:prstGeom>
+          <a:ln w="10160">
+            <a:solidFill>
+              <a:srgbClr val="68747B"/>
+            </a:solidFill>
+          </a:ln>
+        </p:spPr>
+        <p:style>
+          <a:lnRef idx="2">
+            <a:schemeClr val="accent1"/>
+          </a:lnRef>
+          <a:fillRef idx="0">
+            <a:schemeClr val="accent1"/>
+          </a:fillRef>
+          <a:effectRef idx="1">
+            <a:schemeClr val="accent1"/>
+          </a:effectRef>
+          <a:fontRef idx="minor">
+            <a:schemeClr val="tx1"/>
+          </a:fontRef>
+        </p:style>
+      </p:cxnSp>
+      <p:sp>
+        <p:nvSpPr>
+          <p:cNvPr id="26" name="Rectangle 25"/>
+          <p:cNvSpPr/>
+          <p:nvPr/>
+        </p:nvSpPr>
+        <p:spPr>
+          <a:xfrm>
+            <a:off x="2258568" y="2214676"/>
+            <a:ext cx="566928" cy="243840"/>
+          </a:xfrm>
+          <a:prstGeom prst="rect">
+            <a:avLst/>
+          </a:prstGeom>
+          <a:solidFill>
+            <a:srgbClr val="C49500"/>
+          </a:solidFill>
+          <a:ln>
+            <a:noFill/>
+          </a:ln>
+        </p:spPr>
+        <p:style>
+          <a:lnRef idx="1">
+            <a:schemeClr val="accent1"/>
+          </a:lnRef>
+          <a:fillRef idx="3">
+            <a:schemeClr val="accent1"/>
+          </a:fillRef>
+          <a:effectRef idx="2">
+            <a:schemeClr val="accent1"/>
+          </a:effectRef>
+          <a:fontRef idx="minor">
+            <a:schemeClr val="lt1"/>
+          </a:fontRef>
+        </p:style>
+        <p:txBody>
+          <a:bodyPr rtlCol="0" anchor="ctr"/>
+          <a:lstStyle/>
+          <a:p>
+            <a:pPr algn="ctr"/>
+          </a:p>
+        </p:txBody>
+      </p:sp>
+      <p:sp>
+        <p:nvSpPr>
+          <p:cNvPr id="27" name="TextBox 26"/>
+          <p:cNvSpPr txBox="1"/>
+          <p:nvPr/>
+        </p:nvSpPr>
+        <p:spPr>
+          <a:xfrm>
+            <a:off x="2112264" y="1976932"/>
+            <a:ext cx="859536" cy="164592"/>
+          </a:xfrm>
+          <a:prstGeom prst="rect">
+            <a:avLst/>
+          </a:prstGeom>
+          <a:noFill/>
+        </p:spPr>
+        <p:txBody>
+          <a:bodyPr wrap="square" lIns="18288" rIns="18288" tIns="18288" bIns="18288" anchor="ctr">
+            <a:spAutoFit/>
+          </a:bodyPr>
+          <a:lstStyle/>
+          <a:p>
+            <a:pPr algn="ctr">
+              <a:spcBef>
+                <a:spcPts val="0"/>
+              </a:spcBef>
+              <a:spcAft>
+                <a:spcPts val="0"/>
+              </a:spcAft>
+            </a:pPr>
+            <a:r>
+              <a:rPr sz="800" b="1">
+                <a:solidFill>
+                  <a:srgbClr val="C49500"/>
+                </a:solidFill>
+                <a:latin typeface="Arial"/>
+              </a:rPr>
+              <a:t>−$50m</a:t>
+            </a:r>
+          </a:p>
+        </p:txBody>
+      </p:sp>
+      <p:sp>
+        <p:nvSpPr>
+          <p:cNvPr id="28" name="TextBox 27"/>
+          <p:cNvSpPr txBox="1"/>
+          <p:nvPr/>
+        </p:nvSpPr>
+        <p:spPr>
+          <a:xfrm>
+            <a:off x="2002536" y="4261104"/>
+            <a:ext cx="1078992" cy="237744"/>
+          </a:xfrm>
+          <a:prstGeom prst="rect">
+            <a:avLst/>
+          </a:prstGeom>
+          <a:noFill/>
+        </p:spPr>
+        <p:txBody>
+          <a:bodyPr wrap="square" lIns="18288" rIns="18288" tIns="18288" bIns="18288" anchor="ctr">
+            <a:spAutoFit/>
+          </a:bodyPr>
+          <a:lstStyle/>
+          <a:p>
+            <a:pPr algn="ctr">
+              <a:spcBef>
+                <a:spcPts val="0"/>
+              </a:spcBef>
+              <a:spcAft>
+                <a:spcPts val="0"/>
+              </a:spcAft>
+            </a:pPr>
+            <a:r>
+              <a:rPr sz="650" b="1">
+                <a:solidFill>
+                  <a:srgbClr val="18232B"/>
+                </a:solidFill>
+                <a:latin typeface="Arial"/>
+              </a:rPr>
+              <a:t>SETTLEMENT</a:t>
+            </a:r>
+          </a:p>
+        </p:txBody>
+      </p:sp>
+      <p:cxnSp>
+        <p:nvCxnSpPr>
+          <p:cNvPr id="29" name="Connector 28"/>
+          <p:cNvCxnSpPr/>
+          <p:nvPr/>
+        </p:nvCxnSpPr>
+        <p:spPr>
+          <a:xfrm>
+            <a:off x="2825496" y="2458516"/>
+            <a:ext cx="484632" cy="0"/>
+          </a:xfrm>
+          <a:prstGeom prst="line">
+            <a:avLst/>
+          </a:prstGeom>
+          <a:ln w="10160">
+            <a:solidFill>
+              <a:srgbClr val="68747B"/>
+            </a:solidFill>
+          </a:ln>
+        </p:spPr>
+        <p:style>
+          <a:lnRef idx="2">
+            <a:schemeClr val="accent1"/>
+          </a:lnRef>
+          <a:fillRef idx="0">
+            <a:schemeClr val="accent1"/>
+          </a:fillRef>
+          <a:effectRef idx="1">
+            <a:schemeClr val="accent1"/>
+          </a:effectRef>
+          <a:fontRef idx="minor">
+            <a:schemeClr val="tx1"/>
+          </a:fontRef>
+        </p:style>
+      </p:cxnSp>
+      <p:sp>
+        <p:nvSpPr>
+          <p:cNvPr id="30" name="Rectangle 29"/>
+          <p:cNvSpPr/>
+          <p:nvPr/>
+        </p:nvSpPr>
+        <p:spPr>
+          <a:xfrm>
+            <a:off x="3310128" y="2458516"/>
+            <a:ext cx="566928" cy="487680"/>
+          </a:xfrm>
+          <a:prstGeom prst="rect">
+            <a:avLst/>
+          </a:prstGeom>
+          <a:solidFill>
+            <a:srgbClr val="C49500"/>
+          </a:solidFill>
+          <a:ln>
+            <a:noFill/>
+          </a:ln>
+        </p:spPr>
+        <p:style>
+          <a:lnRef idx="1">
+            <a:schemeClr val="accent1"/>
+          </a:lnRef>
+          <a:fillRef idx="3">
+            <a:schemeClr val="accent1"/>
+          </a:fillRef>
+          <a:effectRef idx="2">
+            <a:schemeClr val="accent1"/>
+          </a:effectRef>
+          <a:fontRef idx="minor">
+            <a:schemeClr val="lt1"/>
+          </a:fontRef>
+        </p:style>
+        <p:txBody>
+          <a:bodyPr rtlCol="0" anchor="ctr"/>
+          <a:lstStyle/>
+          <a:p>
+            <a:pPr algn="ctr"/>
+          </a:p>
+        </p:txBody>
+      </p:sp>
+      <p:sp>
+        <p:nvSpPr>
+          <p:cNvPr id="31" name="TextBox 30"/>
+          <p:cNvSpPr txBox="1"/>
+          <p:nvPr/>
+        </p:nvSpPr>
+        <p:spPr>
+          <a:xfrm>
+            <a:off x="3163824" y="2220772"/>
+            <a:ext cx="859536" cy="164592"/>
+          </a:xfrm>
+          <a:prstGeom prst="rect">
+            <a:avLst/>
+          </a:prstGeom>
+          <a:noFill/>
+        </p:spPr>
+        <p:txBody>
+          <a:bodyPr wrap="square" lIns="18288" rIns="18288" tIns="18288" bIns="18288" anchor="ctr">
+            <a:spAutoFit/>
+          </a:bodyPr>
+          <a:lstStyle/>
+          <a:p>
+            <a:pPr algn="ctr">
+              <a:spcBef>
+                <a:spcPts val="0"/>
+              </a:spcBef>
+              <a:spcAft>
+                <a:spcPts val="0"/>
+              </a:spcAft>
+            </a:pPr>
+            <a:r>
+              <a:rPr sz="800" b="1">
+                <a:solidFill>
+                  <a:srgbClr val="C49500"/>
+                </a:solidFill>
+                <a:latin typeface="Arial"/>
+              </a:rPr>
+              <a:t>−$100m</a:t>
+            </a:r>
+          </a:p>
+        </p:txBody>
+      </p:sp>
+      <p:sp>
+        <p:nvSpPr>
+          <p:cNvPr id="32" name="TextBox 31"/>
+          <p:cNvSpPr txBox="1"/>
+          <p:nvPr/>
+        </p:nvSpPr>
+        <p:spPr>
+          <a:xfrm>
+            <a:off x="3054096" y="4261104"/>
+            <a:ext cx="1078992" cy="237744"/>
+          </a:xfrm>
+          <a:prstGeom prst="rect">
+            <a:avLst/>
+          </a:prstGeom>
+          <a:noFill/>
+        </p:spPr>
+        <p:txBody>
+          <a:bodyPr wrap="square" lIns="18288" rIns="18288" tIns="18288" bIns="18288" anchor="ctr">
+            <a:spAutoFit/>
+          </a:bodyPr>
+          <a:lstStyle/>
+          <a:p>
+            <a:pPr algn="ctr">
+              <a:spcBef>
+                <a:spcPts val="0"/>
+              </a:spcBef>
+              <a:spcAft>
+                <a:spcPts val="0"/>
+              </a:spcAft>
+            </a:pPr>
+            <a:r>
+              <a:rPr sz="650" b="1">
+                <a:solidFill>
+                  <a:srgbClr val="18232B"/>
+                </a:solidFill>
+                <a:latin typeface="Arial"/>
+              </a:rPr>
+              <a:t>COLLATERAL</a:t>
+            </a:r>
+          </a:p>
+        </p:txBody>
+      </p:sp>
+      <p:cxnSp>
+        <p:nvCxnSpPr>
+          <p:cNvPr id="33" name="Connector 32"/>
+          <p:cNvCxnSpPr/>
+          <p:nvPr/>
+        </p:nvCxnSpPr>
+        <p:spPr>
+          <a:xfrm>
+            <a:off x="3877056" y="2946196"/>
+            <a:ext cx="484632" cy="0"/>
+          </a:xfrm>
+          <a:prstGeom prst="line">
+            <a:avLst/>
+          </a:prstGeom>
+          <a:ln w="10160">
+            <a:solidFill>
+              <a:srgbClr val="68747B"/>
+            </a:solidFill>
+          </a:ln>
+        </p:spPr>
+        <p:style>
+          <a:lnRef idx="2">
+            <a:schemeClr val="accent1"/>
+          </a:lnRef>
+          <a:fillRef idx="0">
+            <a:schemeClr val="accent1"/>
+          </a:fillRef>
+          <a:effectRef idx="1">
+            <a:schemeClr val="accent1"/>
+          </a:effectRef>
+          <a:fontRef idx="minor">
+            <a:schemeClr val="tx1"/>
+          </a:fontRef>
+        </p:style>
+      </p:cxnSp>
+      <p:sp>
+        <p:nvSpPr>
+          <p:cNvPr id="34" name="Rectangle 33"/>
+          <p:cNvSpPr/>
+          <p:nvPr/>
+        </p:nvSpPr>
+        <p:spPr>
+          <a:xfrm>
+            <a:off x="4361688" y="2946196"/>
+            <a:ext cx="566928" cy="487679"/>
+          </a:xfrm>
+          <a:prstGeom prst="rect">
+            <a:avLst/>
+          </a:prstGeom>
+          <a:solidFill>
+            <a:srgbClr val="C82036"/>
+          </a:solidFill>
+          <a:ln>
+            <a:noFill/>
+          </a:ln>
+        </p:spPr>
+        <p:style>
+          <a:lnRef idx="1">
+            <a:schemeClr val="accent1"/>
+          </a:lnRef>
+          <a:fillRef idx="3">
+            <a:schemeClr val="accent1"/>
+          </a:fillRef>
+          <a:effectRef idx="2">
+            <a:schemeClr val="accent1"/>
+          </a:effectRef>
+          <a:fontRef idx="minor">
+            <a:schemeClr val="lt1"/>
+          </a:fontRef>
+        </p:style>
+        <p:txBody>
+          <a:bodyPr rtlCol="0" anchor="ctr"/>
+          <a:lstStyle/>
+          <a:p>
+            <a:pPr algn="ctr"/>
+          </a:p>
+        </p:txBody>
+      </p:sp>
+      <p:sp>
+        <p:nvSpPr>
+          <p:cNvPr id="35" name="TextBox 34"/>
+          <p:cNvSpPr txBox="1"/>
+          <p:nvPr/>
+        </p:nvSpPr>
+        <p:spPr>
+          <a:xfrm>
+            <a:off x="4215383" y="2708452"/>
+            <a:ext cx="859536" cy="164592"/>
+          </a:xfrm>
+          <a:prstGeom prst="rect">
+            <a:avLst/>
+          </a:prstGeom>
+          <a:noFill/>
+        </p:spPr>
+        <p:txBody>
+          <a:bodyPr wrap="square" lIns="18288" rIns="18288" tIns="18288" bIns="18288" anchor="ctr">
+            <a:spAutoFit/>
+          </a:bodyPr>
+          <a:lstStyle/>
+          <a:p>
+            <a:pPr algn="ctr">
+              <a:spcBef>
+                <a:spcPts val="0"/>
+              </a:spcBef>
+              <a:spcAft>
+                <a:spcPts val="0"/>
+              </a:spcAft>
+            </a:pPr>
+            <a:r>
+              <a:rPr sz="800" b="1">
+                <a:solidFill>
+                  <a:srgbClr val="C82036"/>
+                </a:solidFill>
+                <a:latin typeface="Arial"/>
+              </a:rPr>
+              <a:t>−$100m</a:t>
+            </a:r>
+          </a:p>
+        </p:txBody>
+      </p:sp>
+      <p:sp>
+        <p:nvSpPr>
+          <p:cNvPr id="36" name="TextBox 35"/>
+          <p:cNvSpPr txBox="1"/>
+          <p:nvPr/>
+        </p:nvSpPr>
+        <p:spPr>
+          <a:xfrm>
+            <a:off x="4105655" y="4261104"/>
+            <a:ext cx="1078992" cy="237744"/>
+          </a:xfrm>
+          <a:prstGeom prst="rect">
+            <a:avLst/>
+          </a:prstGeom>
+          <a:noFill/>
+        </p:spPr>
+        <p:txBody>
+          <a:bodyPr wrap="square" lIns="18288" rIns="18288" tIns="18288" bIns="18288" anchor="ctr">
+            <a:spAutoFit/>
+          </a:bodyPr>
+          <a:lstStyle/>
+          <a:p>
+            <a:pPr algn="ctr">
+              <a:spcBef>
+                <a:spcPts val="0"/>
+              </a:spcBef>
+              <a:spcAft>
+                <a:spcPts val="0"/>
+              </a:spcAft>
+            </a:pPr>
+            <a:r>
+              <a:rPr sz="650" b="1">
+                <a:solidFill>
+                  <a:srgbClr val="18232B"/>
+                </a:solidFill>
+                <a:latin typeface="Arial"/>
+              </a:rPr>
+              <a:t>WITHDRAWALS</a:t>
+            </a:r>
+          </a:p>
+        </p:txBody>
+      </p:sp>
+      <p:cxnSp>
+        <p:nvCxnSpPr>
+          <p:cNvPr id="37" name="Connector 36"/>
+          <p:cNvCxnSpPr/>
+          <p:nvPr/>
+        </p:nvCxnSpPr>
+        <p:spPr>
+          <a:xfrm>
+            <a:off x="4928616" y="3433876"/>
+            <a:ext cx="484632" cy="0"/>
+          </a:xfrm>
+          <a:prstGeom prst="line">
+            <a:avLst/>
+          </a:prstGeom>
+          <a:ln w="10160">
+            <a:solidFill>
+              <a:srgbClr val="68747B"/>
+            </a:solidFill>
+          </a:ln>
+        </p:spPr>
+        <p:style>
+          <a:lnRef idx="2">
+            <a:schemeClr val="accent1"/>
+          </a:lnRef>
+          <a:fillRef idx="0">
+            <a:schemeClr val="accent1"/>
+          </a:fillRef>
+          <a:effectRef idx="1">
+            <a:schemeClr val="accent1"/>
+          </a:effectRef>
+          <a:fontRef idx="minor">
+            <a:schemeClr val="tx1"/>
+          </a:fontRef>
+        </p:style>
+      </p:cxnSp>
+      <p:sp>
+        <p:nvSpPr>
+          <p:cNvPr id="38" name="Rectangle 37"/>
+          <p:cNvSpPr/>
+          <p:nvPr/>
+        </p:nvSpPr>
+        <p:spPr>
+          <a:xfrm>
+            <a:off x="5413248" y="3433876"/>
+            <a:ext cx="566928" cy="243839"/>
+          </a:xfrm>
+          <a:prstGeom prst="rect">
+            <a:avLst/>
+          </a:prstGeom>
+          <a:solidFill>
+            <a:srgbClr val="C82036"/>
+          </a:solidFill>
+          <a:ln>
+            <a:noFill/>
+          </a:ln>
+        </p:spPr>
+        <p:style>
+          <a:lnRef idx="1">
+            <a:schemeClr val="accent1"/>
+          </a:lnRef>
+          <a:fillRef idx="3">
+            <a:schemeClr val="accent1"/>
+          </a:fillRef>
+          <a:effectRef idx="2">
+            <a:schemeClr val="accent1"/>
+          </a:effectRef>
+          <a:fontRef idx="minor">
+            <a:schemeClr val="lt1"/>
+          </a:fontRef>
+        </p:style>
+        <p:txBody>
+          <a:bodyPr rtlCol="0" anchor="ctr"/>
+          <a:lstStyle/>
+          <a:p>
+            <a:pPr algn="ctr"/>
+          </a:p>
+        </p:txBody>
+      </p:sp>
+      <p:sp>
+        <p:nvSpPr>
+          <p:cNvPr id="39" name="TextBox 38"/>
+          <p:cNvSpPr txBox="1"/>
+          <p:nvPr/>
+        </p:nvSpPr>
+        <p:spPr>
+          <a:xfrm>
+            <a:off x="5266944" y="3196132"/>
+            <a:ext cx="859536" cy="164592"/>
+          </a:xfrm>
+          <a:prstGeom prst="rect">
+            <a:avLst/>
+          </a:prstGeom>
+          <a:noFill/>
+        </p:spPr>
+        <p:txBody>
+          <a:bodyPr wrap="square" lIns="18288" rIns="18288" tIns="18288" bIns="18288" anchor="ctr">
+            <a:spAutoFit/>
+          </a:bodyPr>
+          <a:lstStyle/>
+          <a:p>
+            <a:pPr algn="ctr">
+              <a:spcBef>
+                <a:spcPts val="0"/>
+              </a:spcBef>
+              <a:spcAft>
+                <a:spcPts val="0"/>
+              </a:spcAft>
+            </a:pPr>
+            <a:r>
+              <a:rPr sz="800" b="1">
+                <a:solidFill>
+                  <a:srgbClr val="C82036"/>
+                </a:solidFill>
+                <a:latin typeface="Arial"/>
+              </a:rPr>
+              <a:t>−$50m</a:t>
+            </a:r>
+          </a:p>
+        </p:txBody>
+      </p:sp>
+      <p:sp>
+        <p:nvSpPr>
           <p:cNvPr id="40" name="TextBox 39"/>
           <p:cNvSpPr txBox="1"/>
           <p:nvPr/>
         </p:nvSpPr>
         <p:spPr>
           <a:xfrm>
-            <a:off x="6428232" y="3716528"/>
-            <a:ext cx="777240" cy="137160"/>
+            <a:off x="5157216" y="4261104"/>
+            <a:ext cx="1078992" cy="237744"/>
           </a:xfrm>
           <a:prstGeom prst="rect">
             <a:avLst/>
@@ -12351,22 +12619,22 @@
           </a:bodyPr>
           <a:lstStyle/>
           <a:p>
-            <a:pPr algn="r">
-              <a:spcBef>
-                <a:spcPts val="0"/>
-              </a:spcBef>
-              <a:spcAft>
-                <a:spcPts val="0"/>
-              </a:spcAft>
-            </a:pPr>
-            <a:r>
-              <a:rPr sz="680" b="1">
-                <a:solidFill>
-                  <a:srgbClr val="C49500"/>
-                </a:solidFill>
-                <a:latin typeface="Arial"/>
-              </a:rPr>
-              <a:t>700 buffer</a:t>
+            <a:pPr algn="ctr">
+              <a:spcBef>
+                <a:spcPts val="0"/>
+              </a:spcBef>
+              <a:spcAft>
+                <a:spcPts val="0"/>
+              </a:spcAft>
+            </a:pPr>
+            <a:r>
+              <a:rPr sz="650" b="1">
+                <a:solidFill>
+                  <a:srgbClr val="18232B"/>
+                </a:solidFill>
+                <a:latin typeface="Arial"/>
+              </a:rPr>
+              <a:t>ROLLOVER</a:t>
             </a:r>
           </a:p>
         </p:txBody>
@@ -12379,10 +12647,751 @@
         </p:nvSpPr>
         <p:spPr>
           <a:xfrm>
-            <a:off x="1353312" y="3378647"/>
-            <a:ext cx="493776" cy="1394520"/>
-          </a:xfrm>
-          <a:prstGeom prst="rect">
+            <a:off x="6931152" y="3677716"/>
+            <a:ext cx="658368" cy="482803"/>
+          </a:xfrm>
+          <a:prstGeom prst="rect">
+            <a:avLst/>
+          </a:prstGeom>
+          <a:solidFill>
+            <a:srgbClr val="C82036"/>
+          </a:solidFill>
+          <a:ln>
+            <a:noFill/>
+          </a:ln>
+        </p:spPr>
+        <p:style>
+          <a:lnRef idx="1">
+            <a:schemeClr val="accent1"/>
+          </a:lnRef>
+          <a:fillRef idx="3">
+            <a:schemeClr val="accent1"/>
+          </a:fillRef>
+          <a:effectRef idx="2">
+            <a:schemeClr val="accent1"/>
+          </a:effectRef>
+          <a:fontRef idx="minor">
+            <a:schemeClr val="lt1"/>
+          </a:fontRef>
+        </p:style>
+        <p:txBody>
+          <a:bodyPr rtlCol="0" anchor="ctr"/>
+          <a:lstStyle/>
+          <a:p>
+            <a:pPr algn="ctr"/>
+          </a:p>
+        </p:txBody>
+      </p:sp>
+      <p:sp>
+        <p:nvSpPr>
+          <p:cNvPr id="42" name="TextBox 41"/>
+          <p:cNvSpPr txBox="1"/>
+          <p:nvPr/>
+        </p:nvSpPr>
+        <p:spPr>
+          <a:xfrm>
+            <a:off x="6793992" y="3430828"/>
+            <a:ext cx="932688" cy="182880"/>
+          </a:xfrm>
+          <a:prstGeom prst="rect">
+            <a:avLst/>
+          </a:prstGeom>
+          <a:noFill/>
+        </p:spPr>
+        <p:txBody>
+          <a:bodyPr wrap="square" lIns="18288" rIns="18288" tIns="18288" bIns="18288" anchor="ctr">
+            <a:spAutoFit/>
+          </a:bodyPr>
+          <a:lstStyle/>
+          <a:p>
+            <a:pPr algn="ctr">
+              <a:spcBef>
+                <a:spcPts val="0"/>
+              </a:spcBef>
+              <a:spcAft>
+                <a:spcPts val="0"/>
+              </a:spcAft>
+            </a:pPr>
+            <a:r>
+              <a:rPr sz="900" b="1">
+                <a:solidFill>
+                  <a:srgbClr val="C82036"/>
+                </a:solidFill>
+                <a:latin typeface="Arial"/>
+              </a:rPr>
+              <a:t>$549m</a:t>
+            </a:r>
+          </a:p>
+        </p:txBody>
+      </p:sp>
+      <p:sp>
+        <p:nvSpPr>
+          <p:cNvPr id="43" name="TextBox 42"/>
+          <p:cNvSpPr txBox="1"/>
+          <p:nvPr/>
+        </p:nvSpPr>
+        <p:spPr>
+          <a:xfrm>
+            <a:off x="6702552" y="4261104"/>
+            <a:ext cx="1115568" cy="237744"/>
+          </a:xfrm>
+          <a:prstGeom prst="rect">
+            <a:avLst/>
+          </a:prstGeom>
+          <a:noFill/>
+        </p:spPr>
+        <p:txBody>
+          <a:bodyPr wrap="square" lIns="18288" rIns="18288" tIns="18288" bIns="18288" anchor="ctr">
+            <a:spAutoFit/>
+          </a:bodyPr>
+          <a:lstStyle/>
+          <a:p>
+            <a:pPr algn="ctr">
+              <a:spcBef>
+                <a:spcPts val="0"/>
+              </a:spcBef>
+              <a:spcAft>
+                <a:spcPts val="0"/>
+              </a:spcAft>
+            </a:pPr>
+            <a:r>
+              <a:rPr sz="650" b="1">
+                <a:solidFill>
+                  <a:srgbClr val="18232B"/>
+                </a:solidFill>
+                <a:latin typeface="Arial"/>
+              </a:rPr>
+              <a:t>STRESS CLOSE</a:t>
+            </a:r>
+          </a:p>
+        </p:txBody>
+      </p:sp>
+      <p:cxnSp>
+        <p:nvCxnSpPr>
+          <p:cNvPr id="44" name="Connector 43"/>
+          <p:cNvCxnSpPr/>
+          <p:nvPr/>
+        </p:nvCxnSpPr>
+        <p:spPr>
+          <a:xfrm>
+            <a:off x="7662672" y="2941320"/>
+            <a:ext cx="0" cy="736396"/>
+          </a:xfrm>
+          <a:prstGeom prst="line">
+            <a:avLst/>
+          </a:prstGeom>
+          <a:ln w="25400">
+            <a:solidFill>
+              <a:srgbClr val="C82036"/>
+            </a:solidFill>
+          </a:ln>
+        </p:spPr>
+        <p:style>
+          <a:lnRef idx="2">
+            <a:schemeClr val="accent1"/>
+          </a:lnRef>
+          <a:fillRef idx="0">
+            <a:schemeClr val="accent1"/>
+          </a:fillRef>
+          <a:effectRef idx="1">
+            <a:schemeClr val="accent1"/>
+          </a:effectRef>
+          <a:fontRef idx="minor">
+            <a:schemeClr val="tx1"/>
+          </a:fontRef>
+        </p:style>
+      </p:cxnSp>
+      <p:sp>
+        <p:nvSpPr>
+          <p:cNvPr id="45" name="TextBox 44"/>
+          <p:cNvSpPr txBox="1"/>
+          <p:nvPr/>
+        </p:nvSpPr>
+        <p:spPr>
+          <a:xfrm>
+            <a:off x="7744968" y="2959608"/>
+            <a:ext cx="749808" cy="347472"/>
+          </a:xfrm>
+          <a:prstGeom prst="rect">
+            <a:avLst/>
+          </a:prstGeom>
+          <a:noFill/>
+        </p:spPr>
+        <p:txBody>
+          <a:bodyPr wrap="square" lIns="18288" rIns="18288" tIns="18288" bIns="18288" anchor="ctr">
+            <a:spAutoFit/>
+          </a:bodyPr>
+          <a:lstStyle/>
+          <a:p>
+            <a:pPr algn="l">
+              <a:spcBef>
+                <a:spcPts val="0"/>
+              </a:spcBef>
+              <a:spcAft>
+                <a:spcPts val="0"/>
+              </a:spcAft>
+            </a:pPr>
+            <a:r>
+              <a:rPr sz="720" b="1">
+                <a:solidFill>
+                  <a:srgbClr val="C82036"/>
+                </a:solidFill>
+                <a:latin typeface="Arial"/>
+              </a:rPr>
+              <a:t>$151m
+shortfall</a:t>
+            </a:r>
+          </a:p>
+        </p:txBody>
+      </p:sp>
+      <p:sp>
+        <p:nvSpPr>
+          <p:cNvPr id="46" name="Rectangle 45"/>
+          <p:cNvSpPr/>
+          <p:nvPr/>
+        </p:nvSpPr>
+        <p:spPr>
+          <a:xfrm>
+            <a:off x="8796528" y="1673352"/>
+            <a:ext cx="2761488" cy="3218688"/>
+          </a:xfrm>
+          <a:prstGeom prst="rect">
+            <a:avLst/>
+          </a:prstGeom>
+          <a:solidFill>
+            <a:srgbClr val="F6E2E3"/>
+          </a:solidFill>
+          <a:ln w="10160">
+            <a:solidFill>
+              <a:srgbClr val="C9CECB"/>
+            </a:solidFill>
+          </a:ln>
+        </p:spPr>
+        <p:style>
+          <a:lnRef idx="1">
+            <a:schemeClr val="accent1"/>
+          </a:lnRef>
+          <a:fillRef idx="3">
+            <a:schemeClr val="accent1"/>
+          </a:fillRef>
+          <a:effectRef idx="2">
+            <a:schemeClr val="accent1"/>
+          </a:effectRef>
+          <a:fontRef idx="minor">
+            <a:schemeClr val="lt1"/>
+          </a:fontRef>
+        </p:style>
+        <p:txBody>
+          <a:bodyPr rtlCol="0" anchor="ctr"/>
+          <a:lstStyle/>
+          <a:p>
+            <a:pPr algn="ctr"/>
+          </a:p>
+        </p:txBody>
+      </p:sp>
+      <p:sp>
+        <p:nvSpPr>
+          <p:cNvPr id="47" name="TextBox 46"/>
+          <p:cNvSpPr txBox="1"/>
+          <p:nvPr/>
+        </p:nvSpPr>
+        <p:spPr>
+          <a:xfrm>
+            <a:off x="9015984" y="1901952"/>
+            <a:ext cx="2322576" cy="182880"/>
+          </a:xfrm>
+          <a:prstGeom prst="rect">
+            <a:avLst/>
+          </a:prstGeom>
+          <a:noFill/>
+        </p:spPr>
+        <p:txBody>
+          <a:bodyPr wrap="square" lIns="18288" rIns="18288" tIns="18288" bIns="18288" anchor="ctr">
+            <a:spAutoFit/>
+          </a:bodyPr>
+          <a:lstStyle/>
+          <a:p>
+            <a:pPr algn="l">
+              <a:spcBef>
+                <a:spcPts val="0"/>
+              </a:spcBef>
+              <a:spcAft>
+                <a:spcPts val="0"/>
+              </a:spcAft>
+            </a:pPr>
+            <a:r>
+              <a:rPr sz="800" b="1">
+                <a:solidFill>
+                  <a:srgbClr val="C82036"/>
+                </a:solidFill>
+                <a:latin typeface="Arial"/>
+              </a:rPr>
+              <a:t>30 NOVEMBER</a:t>
+            </a:r>
+          </a:p>
+        </p:txBody>
+      </p:sp>
+      <p:sp>
+        <p:nvSpPr>
+          <p:cNvPr id="48" name="TextBox 47"/>
+          <p:cNvSpPr txBox="1"/>
+          <p:nvPr/>
+        </p:nvSpPr>
+        <p:spPr>
+          <a:xfrm>
+            <a:off x="9015984" y="2221992"/>
+            <a:ext cx="2322576" cy="438912"/>
+          </a:xfrm>
+          <a:prstGeom prst="rect">
+            <a:avLst/>
+          </a:prstGeom>
+          <a:noFill/>
+        </p:spPr>
+        <p:txBody>
+          <a:bodyPr wrap="square" lIns="18288" rIns="18288" tIns="18288" bIns="18288" anchor="ctr">
+            <a:spAutoFit/>
+          </a:bodyPr>
+          <a:lstStyle/>
+          <a:p>
+            <a:pPr algn="l">
+              <a:spcBef>
+                <a:spcPts val="0"/>
+              </a:spcBef>
+              <a:spcAft>
+                <a:spcPts val="0"/>
+              </a:spcAft>
+            </a:pPr>
+            <a:r>
+              <a:rPr sz="2400" b="1">
+                <a:solidFill>
+                  <a:srgbClr val="C82036"/>
+                </a:solidFill>
+                <a:latin typeface="Arial"/>
+              </a:rPr>
+              <a:t>$549m</a:t>
+            </a:r>
+          </a:p>
+        </p:txBody>
+      </p:sp>
+      <p:sp>
+        <p:nvSpPr>
+          <p:cNvPr id="49" name="TextBox 48"/>
+          <p:cNvSpPr txBox="1"/>
+          <p:nvPr/>
+        </p:nvSpPr>
+        <p:spPr>
+          <a:xfrm>
+            <a:off x="9015984" y="2679192"/>
+            <a:ext cx="2322576" cy="210312"/>
+          </a:xfrm>
+          <a:prstGeom prst="rect">
+            <a:avLst/>
+          </a:prstGeom>
+          <a:noFill/>
+        </p:spPr>
+        <p:txBody>
+          <a:bodyPr wrap="square" lIns="18288" rIns="18288" tIns="18288" bIns="18288" anchor="ctr">
+            <a:spAutoFit/>
+          </a:bodyPr>
+          <a:lstStyle/>
+          <a:p>
+            <a:pPr algn="l">
+              <a:spcBef>
+                <a:spcPts val="0"/>
+              </a:spcBef>
+              <a:spcAft>
+                <a:spcPts val="0"/>
+              </a:spcAft>
+            </a:pPr>
+            <a:r>
+              <a:rPr sz="919" b="1">
+                <a:solidFill>
+                  <a:srgbClr val="18232B"/>
+                </a:solidFill>
+                <a:latin typeface="Arial"/>
+              </a:rPr>
+              <a:t>vs. $700m buffer</a:t>
+            </a:r>
+          </a:p>
+        </p:txBody>
+      </p:sp>
+      <p:cxnSp>
+        <p:nvCxnSpPr>
+          <p:cNvPr id="50" name="Connector 49"/>
+          <p:cNvCxnSpPr/>
+          <p:nvPr/>
+        </p:nvCxnSpPr>
+        <p:spPr>
+          <a:xfrm>
+            <a:off x="9015984" y="3026664"/>
+            <a:ext cx="2322576" cy="0"/>
+          </a:xfrm>
+          <a:prstGeom prst="line">
+            <a:avLst/>
+          </a:prstGeom>
+          <a:ln w="15240">
+            <a:solidFill>
+              <a:srgbClr val="C82036"/>
+            </a:solidFill>
+          </a:ln>
+        </p:spPr>
+        <p:style>
+          <a:lnRef idx="2">
+            <a:schemeClr val="accent1"/>
+          </a:lnRef>
+          <a:fillRef idx="0">
+            <a:schemeClr val="accent1"/>
+          </a:fillRef>
+          <a:effectRef idx="1">
+            <a:schemeClr val="accent1"/>
+          </a:effectRef>
+          <a:fontRef idx="minor">
+            <a:schemeClr val="tx1"/>
+          </a:fontRef>
+        </p:style>
+      </p:cxnSp>
+      <p:sp>
+        <p:nvSpPr>
+          <p:cNvPr id="51" name="TextBox 50"/>
+          <p:cNvSpPr txBox="1"/>
+          <p:nvPr/>
+        </p:nvSpPr>
+        <p:spPr>
+          <a:xfrm>
+            <a:off x="9015984" y="3218688"/>
+            <a:ext cx="2322576" cy="173736"/>
+          </a:xfrm>
+          <a:prstGeom prst="rect">
+            <a:avLst/>
+          </a:prstGeom>
+          <a:noFill/>
+        </p:spPr>
+        <p:txBody>
+          <a:bodyPr wrap="square" lIns="18288" rIns="18288" tIns="18288" bIns="18288" anchor="ctr">
+            <a:spAutoFit/>
+          </a:bodyPr>
+          <a:lstStyle/>
+          <a:p>
+            <a:pPr algn="l">
+              <a:spcBef>
+                <a:spcPts val="0"/>
+              </a:spcBef>
+              <a:spcAft>
+                <a:spcPts val="0"/>
+              </a:spcAft>
+            </a:pPr>
+            <a:r>
+              <a:rPr sz="770" b="1">
+                <a:solidFill>
+                  <a:srgbClr val="68747B"/>
+                </a:solidFill>
+                <a:latin typeface="Arial"/>
+              </a:rPr>
+              <a:t>14 DECEMBER</a:t>
+            </a:r>
+          </a:p>
+        </p:txBody>
+      </p:sp>
+      <p:sp>
+        <p:nvSpPr>
+          <p:cNvPr id="52" name="TextBox 51"/>
+          <p:cNvSpPr txBox="1"/>
+          <p:nvPr/>
+        </p:nvSpPr>
+        <p:spPr>
+          <a:xfrm>
+            <a:off x="9015984" y="3483864"/>
+            <a:ext cx="2322576" cy="420624"/>
+          </a:xfrm>
+          <a:prstGeom prst="rect">
+            <a:avLst/>
+          </a:prstGeom>
+          <a:noFill/>
+        </p:spPr>
+        <p:txBody>
+          <a:bodyPr wrap="square" lIns="18288" rIns="18288" tIns="18288" bIns="18288" anchor="ctr">
+            <a:spAutoFit/>
+          </a:bodyPr>
+          <a:lstStyle/>
+          <a:p>
+            <a:pPr algn="l">
+              <a:spcBef>
+                <a:spcPts val="0"/>
+              </a:spcBef>
+              <a:spcAft>
+                <a:spcPts val="0"/>
+              </a:spcAft>
+            </a:pPr>
+            <a:r>
+              <a:rPr sz="919" b="1">
+                <a:solidFill>
+                  <a:srgbClr val="18232B"/>
+                </a:solidFill>
+                <a:latin typeface="Arial"/>
+              </a:rPr>
+              <a:t>$524m cash  ·  $176m peak funding need</a:t>
+            </a:r>
+          </a:p>
+        </p:txBody>
+      </p:sp>
+      <p:sp>
+        <p:nvSpPr>
+          <p:cNvPr id="53" name="TextBox 52"/>
+          <p:cNvSpPr txBox="1"/>
+          <p:nvPr/>
+        </p:nvSpPr>
+        <p:spPr>
+          <a:xfrm>
+            <a:off x="9015984" y="4078224"/>
+            <a:ext cx="2322576" cy="164592"/>
+          </a:xfrm>
+          <a:prstGeom prst="rect">
+            <a:avLst/>
+          </a:prstGeom>
+          <a:noFill/>
+        </p:spPr>
+        <p:txBody>
+          <a:bodyPr wrap="square" lIns="18288" rIns="18288" tIns="18288" bIns="18288" anchor="ctr">
+            <a:spAutoFit/>
+          </a:bodyPr>
+          <a:lstStyle/>
+          <a:p>
+            <a:pPr algn="l">
+              <a:spcBef>
+                <a:spcPts val="0"/>
+              </a:spcBef>
+              <a:spcAft>
+                <a:spcPts val="0"/>
+              </a:spcAft>
+            </a:pPr>
+            <a:r>
+              <a:rPr sz="700" b="1">
+                <a:solidFill>
+                  <a:srgbClr val="68747B"/>
+                </a:solidFill>
+                <a:latin typeface="Arial"/>
+              </a:rPr>
+              <a:t>ASSUMED FUNDING TIMING</a:t>
+            </a:r>
+          </a:p>
+        </p:txBody>
+      </p:sp>
+      <p:sp>
+        <p:nvSpPr>
+          <p:cNvPr id="54" name="TextBox 53"/>
+          <p:cNvSpPr txBox="1"/>
+          <p:nvPr/>
+        </p:nvSpPr>
+        <p:spPr>
+          <a:xfrm>
+            <a:off x="713232" y="5239512"/>
+            <a:ext cx="2011680" cy="182880"/>
+          </a:xfrm>
+          <a:prstGeom prst="rect">
+            <a:avLst/>
+          </a:prstGeom>
+          <a:noFill/>
+        </p:spPr>
+        <p:txBody>
+          <a:bodyPr wrap="square" lIns="18288" rIns="18288" tIns="18288" bIns="18288" anchor="ctr">
+            <a:spAutoFit/>
+          </a:bodyPr>
+          <a:lstStyle/>
+          <a:p>
+            <a:pPr algn="l">
+              <a:spcBef>
+                <a:spcPts val="0"/>
+              </a:spcBef>
+              <a:spcAft>
+                <a:spcPts val="0"/>
+              </a:spcAft>
+            </a:pPr>
+            <a:r>
+              <a:rPr sz="800" b="1">
+                <a:solidFill>
+                  <a:srgbClr val="18232B"/>
+                </a:solidFill>
+                <a:latin typeface="Arial"/>
+              </a:rPr>
+              <a:t>Assumed $200m T+2 source</a:t>
+            </a:r>
+          </a:p>
+        </p:txBody>
+      </p:sp>
+      <p:cxnSp>
+        <p:nvCxnSpPr>
+          <p:cNvPr id="55" name="Connector 54"/>
+          <p:cNvCxnSpPr/>
+          <p:nvPr/>
+        </p:nvCxnSpPr>
+        <p:spPr>
+          <a:xfrm>
+            <a:off x="2880360" y="5358384"/>
+            <a:ext cx="7818120" cy="0"/>
+          </a:xfrm>
+          <a:prstGeom prst="line">
+            <a:avLst/>
+          </a:prstGeom>
+          <a:ln w="25400">
+            <a:solidFill>
+              <a:srgbClr val="C9CECB"/>
+            </a:solidFill>
+          </a:ln>
+        </p:spPr>
+        <p:style>
+          <a:lnRef idx="2">
+            <a:schemeClr val="accent1"/>
+          </a:lnRef>
+          <a:fillRef idx="0">
+            <a:schemeClr val="accent1"/>
+          </a:fillRef>
+          <a:effectRef idx="1">
+            <a:schemeClr val="accent1"/>
+          </a:effectRef>
+          <a:fontRef idx="minor">
+            <a:schemeClr val="tx1"/>
+          </a:fontRef>
+        </p:style>
+      </p:cxnSp>
+      <p:sp>
+        <p:nvSpPr>
+          <p:cNvPr id="56" name="Oval 55"/>
+          <p:cNvSpPr/>
+          <p:nvPr/>
+        </p:nvSpPr>
+        <p:spPr>
+          <a:xfrm>
+            <a:off x="3035808" y="5266944"/>
+            <a:ext cx="182880" cy="182880"/>
+          </a:xfrm>
+          <a:prstGeom prst="ellipse">
+            <a:avLst/>
+          </a:prstGeom>
+          <a:solidFill>
+            <a:srgbClr val="C49500"/>
+          </a:solidFill>
+          <a:ln>
+            <a:noFill/>
+          </a:ln>
+        </p:spPr>
+        <p:style>
+          <a:lnRef idx="1">
+            <a:schemeClr val="accent1"/>
+          </a:lnRef>
+          <a:fillRef idx="3">
+            <a:schemeClr val="accent1"/>
+          </a:fillRef>
+          <a:effectRef idx="2">
+            <a:schemeClr val="accent1"/>
+          </a:effectRef>
+          <a:fontRef idx="minor">
+            <a:schemeClr val="lt1"/>
+          </a:fontRef>
+        </p:style>
+        <p:txBody>
+          <a:bodyPr rtlCol="0" anchor="ctr"/>
+          <a:lstStyle/>
+          <a:p>
+            <a:pPr algn="ctr"/>
+          </a:p>
+        </p:txBody>
+      </p:sp>
+      <p:sp>
+        <p:nvSpPr>
+          <p:cNvPr id="57" name="TextBox 56"/>
+          <p:cNvSpPr txBox="1"/>
+          <p:nvPr/>
+        </p:nvSpPr>
+        <p:spPr>
+          <a:xfrm>
+            <a:off x="2734056" y="5532120"/>
+            <a:ext cx="786384" cy="164592"/>
+          </a:xfrm>
+          <a:prstGeom prst="rect">
+            <a:avLst/>
+          </a:prstGeom>
+          <a:noFill/>
+        </p:spPr>
+        <p:txBody>
+          <a:bodyPr wrap="square" lIns="18288" rIns="18288" tIns="18288" bIns="18288" anchor="ctr">
+            <a:spAutoFit/>
+          </a:bodyPr>
+          <a:lstStyle/>
+          <a:p>
+            <a:pPr algn="ctr">
+              <a:spcBef>
+                <a:spcPts val="0"/>
+              </a:spcBef>
+              <a:spcAft>
+                <a:spcPts val="0"/>
+              </a:spcAft>
+            </a:pPr>
+            <a:r>
+              <a:rPr sz="740" b="1">
+                <a:solidFill>
+                  <a:srgbClr val="C49500"/>
+                </a:solidFill>
+                <a:latin typeface="Arial"/>
+              </a:rPr>
+              <a:t>25 NOV</a:t>
+            </a:r>
+          </a:p>
+        </p:txBody>
+      </p:sp>
+      <p:sp>
+        <p:nvSpPr>
+          <p:cNvPr id="58" name="TextBox 57"/>
+          <p:cNvSpPr txBox="1"/>
+          <p:nvPr/>
+        </p:nvSpPr>
+        <p:spPr>
+          <a:xfrm>
+            <a:off x="2651760" y="5742432"/>
+            <a:ext cx="960120" cy="164592"/>
+          </a:xfrm>
+          <a:prstGeom prst="rect">
+            <a:avLst/>
+          </a:prstGeom>
+          <a:noFill/>
+        </p:spPr>
+        <p:txBody>
+          <a:bodyPr wrap="square" lIns="18288" rIns="18288" tIns="18288" bIns="18288" anchor="ctr">
+            <a:spAutoFit/>
+          </a:bodyPr>
+          <a:lstStyle/>
+          <a:p>
+            <a:pPr algn="ctr">
+              <a:spcBef>
+                <a:spcPts val="0"/>
+              </a:spcBef>
+              <a:spcAft>
+                <a:spcPts val="0"/>
+              </a:spcAft>
+            </a:pPr>
+            <a:r>
+              <a:rPr sz="700" b="0">
+                <a:solidFill>
+                  <a:srgbClr val="68747B"/>
+                </a:solidFill>
+                <a:latin typeface="Arial"/>
+              </a:rPr>
+              <a:t>Trigger</a:t>
+            </a:r>
+          </a:p>
+        </p:txBody>
+      </p:sp>
+      <p:sp>
+        <p:nvSpPr>
+          <p:cNvPr id="59" name="Oval 58"/>
+          <p:cNvSpPr/>
+          <p:nvPr/>
+        </p:nvSpPr>
+        <p:spPr>
+          <a:xfrm>
+            <a:off x="6355080" y="5266944"/>
+            <a:ext cx="182880" cy="182880"/>
+          </a:xfrm>
+          <a:prstGeom prst="ellipse">
             <a:avLst/>
           </a:prstGeom>
           <a:solidFill>
@@ -12416,14 +13425,14 @@
       </p:sp>
       <p:sp>
         <p:nvSpPr>
-          <p:cNvPr id="42" name="TextBox 41"/>
-          <p:cNvSpPr txBox="1"/>
-          <p:nvPr/>
-        </p:nvSpPr>
-        <p:spPr>
-          <a:xfrm>
-            <a:off x="1124712" y="4882896"/>
-            <a:ext cx="987552" cy="201168"/>
+          <p:cNvPr id="60" name="TextBox 59"/>
+          <p:cNvSpPr txBox="1"/>
+          <p:nvPr/>
+        </p:nvSpPr>
+        <p:spPr>
+          <a:xfrm>
+            <a:off x="6053328" y="5532120"/>
+            <a:ext cx="786384" cy="164592"/>
           </a:xfrm>
           <a:prstGeom prst="rect">
             <a:avLst/>
@@ -12445,304 +13454,71 @@
               </a:spcAft>
             </a:pPr>
             <a:r>
-              <a:rPr sz="660" b="1">
-                <a:solidFill>
-                  <a:srgbClr val="18232B"/>
-                </a:solidFill>
-                <a:latin typeface="Arial"/>
-              </a:rPr>
-              <a:t>BASE</a:t>
-            </a:r>
-          </a:p>
-        </p:txBody>
-      </p:sp>
-      <p:cxnSp>
-        <p:nvCxnSpPr>
-          <p:cNvPr id="43" name="Connector 42"/>
-          <p:cNvCxnSpPr/>
-          <p:nvPr/>
-        </p:nvCxnSpPr>
-        <p:spPr>
-          <a:xfrm>
-            <a:off x="1856232" y="3378647"/>
-            <a:ext cx="630936" cy="0"/>
-          </a:xfrm>
-          <a:prstGeom prst="line">
-            <a:avLst/>
-          </a:prstGeom>
-          <a:ln w="8890">
-            <a:solidFill>
-              <a:srgbClr val="68747B"/>
-            </a:solidFill>
-          </a:ln>
-        </p:spPr>
-        <p:style>
-          <a:lnRef idx="2">
-            <a:schemeClr val="accent1"/>
-          </a:lnRef>
-          <a:fillRef idx="0">
-            <a:schemeClr val="accent1"/>
-          </a:fillRef>
-          <a:effectRef idx="1">
-            <a:schemeClr val="accent1"/>
-          </a:effectRef>
-          <a:fontRef idx="minor">
-            <a:schemeClr val="tx1"/>
-          </a:fontRef>
-        </p:style>
-      </p:cxnSp>
-      <p:sp>
-        <p:nvSpPr>
-          <p:cNvPr id="44" name="Rectangle 43"/>
+              <a:rPr sz="740" b="1">
+                <a:solidFill>
+                  <a:srgbClr val="008F72"/>
+                </a:solidFill>
+                <a:latin typeface="Arial"/>
+              </a:rPr>
+              <a:t>29 NOV</a:t>
+            </a:r>
+          </a:p>
+        </p:txBody>
+      </p:sp>
+      <p:sp>
+        <p:nvSpPr>
+          <p:cNvPr id="61" name="TextBox 60"/>
+          <p:cNvSpPr txBox="1"/>
+          <p:nvPr/>
+        </p:nvSpPr>
+        <p:spPr>
+          <a:xfrm>
+            <a:off x="5971031" y="5742432"/>
+            <a:ext cx="960120" cy="164592"/>
+          </a:xfrm>
+          <a:prstGeom prst="rect">
+            <a:avLst/>
+          </a:prstGeom>
+          <a:noFill/>
+        </p:spPr>
+        <p:txBody>
+          <a:bodyPr wrap="square" lIns="18288" rIns="18288" tIns="18288" bIns="18288" anchor="ctr">
+            <a:spAutoFit/>
+          </a:bodyPr>
+          <a:lstStyle/>
+          <a:p>
+            <a:pPr algn="ctr">
+              <a:spcBef>
+                <a:spcPts val="0"/>
+              </a:spcBef>
+              <a:spcAft>
+                <a:spcPts val="0"/>
+              </a:spcAft>
+            </a:pPr>
+            <a:r>
+              <a:rPr sz="700" b="0">
+                <a:solidFill>
+                  <a:srgbClr val="68747B"/>
+                </a:solidFill>
+                <a:latin typeface="Arial"/>
+              </a:rPr>
+              <a:t>Arrival</a:t>
+            </a:r>
+          </a:p>
+        </p:txBody>
+      </p:sp>
+      <p:sp>
+        <p:nvSpPr>
+          <p:cNvPr id="62" name="Oval 61"/>
           <p:cNvSpPr/>
           <p:nvPr/>
         </p:nvSpPr>
         <p:spPr>
           <a:xfrm>
-            <a:off x="2487168" y="3378647"/>
-            <a:ext cx="493776" cy="174752"/>
-          </a:xfrm>
-          <a:prstGeom prst="rect">
-            <a:avLst/>
-          </a:prstGeom>
-          <a:solidFill>
-            <a:srgbClr val="C49500"/>
-          </a:solidFill>
-          <a:ln>
-            <a:noFill/>
-          </a:ln>
-        </p:spPr>
-        <p:style>
-          <a:lnRef idx="1">
-            <a:schemeClr val="accent1"/>
-          </a:lnRef>
-          <a:fillRef idx="3">
-            <a:schemeClr val="accent1"/>
-          </a:fillRef>
-          <a:effectRef idx="2">
-            <a:schemeClr val="accent1"/>
-          </a:effectRef>
-          <a:fontRef idx="minor">
-            <a:schemeClr val="lt1"/>
-          </a:fontRef>
-        </p:style>
-        <p:txBody>
-          <a:bodyPr rtlCol="0" anchor="ctr"/>
-          <a:lstStyle/>
-          <a:p>
-            <a:pPr algn="ctr"/>
-          </a:p>
-        </p:txBody>
-      </p:sp>
-      <p:sp>
-        <p:nvSpPr>
-          <p:cNvPr id="45" name="TextBox 44"/>
-          <p:cNvSpPr txBox="1"/>
-          <p:nvPr/>
-        </p:nvSpPr>
-        <p:spPr>
-          <a:xfrm>
-            <a:off x="2258568" y="4882896"/>
-            <a:ext cx="987552" cy="201168"/>
-          </a:xfrm>
-          <a:prstGeom prst="rect">
-            <a:avLst/>
-          </a:prstGeom>
-          <a:noFill/>
-        </p:spPr>
-        <p:txBody>
-          <a:bodyPr wrap="square" lIns="18288" rIns="18288" tIns="18288" bIns="18288" anchor="ctr">
-            <a:spAutoFit/>
-          </a:bodyPr>
-          <a:lstStyle/>
-          <a:p>
-            <a:pPr algn="ctr">
-              <a:spcBef>
-                <a:spcPts val="0"/>
-              </a:spcBef>
-              <a:spcAft>
-                <a:spcPts val="0"/>
-              </a:spcAft>
-            </a:pPr>
-            <a:r>
-              <a:rPr sz="660" b="1">
-                <a:solidFill>
-                  <a:srgbClr val="18232B"/>
-                </a:solidFill>
-                <a:latin typeface="Arial"/>
-              </a:rPr>
-              <a:t>SETTLEMENT</a:t>
-            </a:r>
-          </a:p>
-        </p:txBody>
-      </p:sp>
-      <p:cxnSp>
-        <p:nvCxnSpPr>
-          <p:cNvPr id="46" name="Connector 45"/>
-          <p:cNvCxnSpPr/>
-          <p:nvPr/>
-        </p:nvCxnSpPr>
-        <p:spPr>
-          <a:xfrm>
-            <a:off x="2990088" y="3553399"/>
-            <a:ext cx="621792" cy="0"/>
-          </a:xfrm>
-          <a:prstGeom prst="line">
-            <a:avLst/>
-          </a:prstGeom>
-          <a:ln w="8890">
-            <a:solidFill>
-              <a:srgbClr val="68747B"/>
-            </a:solidFill>
-          </a:ln>
-        </p:spPr>
-        <p:style>
-          <a:lnRef idx="2">
-            <a:schemeClr val="accent1"/>
-          </a:lnRef>
-          <a:fillRef idx="0">
-            <a:schemeClr val="accent1"/>
-          </a:fillRef>
-          <a:effectRef idx="1">
-            <a:schemeClr val="accent1"/>
-          </a:effectRef>
-          <a:fontRef idx="minor">
-            <a:schemeClr val="tx1"/>
-          </a:fontRef>
-        </p:style>
-      </p:cxnSp>
-      <p:sp>
-        <p:nvSpPr>
-          <p:cNvPr id="47" name="Rectangle 46"/>
-          <p:cNvSpPr/>
-          <p:nvPr/>
-        </p:nvSpPr>
-        <p:spPr>
-          <a:xfrm>
-            <a:off x="3611880" y="3553399"/>
-            <a:ext cx="493776" cy="349504"/>
-          </a:xfrm>
-          <a:prstGeom prst="rect">
-            <a:avLst/>
-          </a:prstGeom>
-          <a:solidFill>
-            <a:srgbClr val="C49500"/>
-          </a:solidFill>
-          <a:ln>
-            <a:noFill/>
-          </a:ln>
-        </p:spPr>
-        <p:style>
-          <a:lnRef idx="1">
-            <a:schemeClr val="accent1"/>
-          </a:lnRef>
-          <a:fillRef idx="3">
-            <a:schemeClr val="accent1"/>
-          </a:fillRef>
-          <a:effectRef idx="2">
-            <a:schemeClr val="accent1"/>
-          </a:effectRef>
-          <a:fontRef idx="minor">
-            <a:schemeClr val="lt1"/>
-          </a:fontRef>
-        </p:style>
-        <p:txBody>
-          <a:bodyPr rtlCol="0" anchor="ctr"/>
-          <a:lstStyle/>
-          <a:p>
-            <a:pPr algn="ctr"/>
-          </a:p>
-        </p:txBody>
-      </p:sp>
-      <p:sp>
-        <p:nvSpPr>
-          <p:cNvPr id="48" name="TextBox 47"/>
-          <p:cNvSpPr txBox="1"/>
-          <p:nvPr/>
-        </p:nvSpPr>
-        <p:spPr>
-          <a:xfrm>
-            <a:off x="3383280" y="4882896"/>
-            <a:ext cx="987552" cy="201168"/>
-          </a:xfrm>
-          <a:prstGeom prst="rect">
-            <a:avLst/>
-          </a:prstGeom>
-          <a:noFill/>
-        </p:spPr>
-        <p:txBody>
-          <a:bodyPr wrap="square" lIns="18288" rIns="18288" tIns="18288" bIns="18288" anchor="ctr">
-            <a:spAutoFit/>
-          </a:bodyPr>
-          <a:lstStyle/>
-          <a:p>
-            <a:pPr algn="ctr">
-              <a:spcBef>
-                <a:spcPts val="0"/>
-              </a:spcBef>
-              <a:spcAft>
-                <a:spcPts val="0"/>
-              </a:spcAft>
-            </a:pPr>
-            <a:r>
-              <a:rPr sz="660" b="1">
-                <a:solidFill>
-                  <a:srgbClr val="18232B"/>
-                </a:solidFill>
-                <a:latin typeface="Arial"/>
-              </a:rPr>
-              <a:t>COLLATERAL</a:t>
-            </a:r>
-          </a:p>
-        </p:txBody>
-      </p:sp>
-      <p:cxnSp>
-        <p:nvCxnSpPr>
-          <p:cNvPr id="49" name="Connector 48"/>
-          <p:cNvCxnSpPr/>
-          <p:nvPr/>
-        </p:nvCxnSpPr>
-        <p:spPr>
-          <a:xfrm>
-            <a:off x="4114800" y="3902903"/>
-            <a:ext cx="621792" cy="0"/>
-          </a:xfrm>
-          <a:prstGeom prst="line">
-            <a:avLst/>
-          </a:prstGeom>
-          <a:ln w="8890">
-            <a:solidFill>
-              <a:srgbClr val="68747B"/>
-            </a:solidFill>
-          </a:ln>
-        </p:spPr>
-        <p:style>
-          <a:lnRef idx="2">
-            <a:schemeClr val="accent1"/>
-          </a:lnRef>
-          <a:fillRef idx="0">
-            <a:schemeClr val="accent1"/>
-          </a:fillRef>
-          <a:effectRef idx="1">
-            <a:schemeClr val="accent1"/>
-          </a:effectRef>
-          <a:fontRef idx="minor">
-            <a:schemeClr val="tx1"/>
-          </a:fontRef>
-        </p:style>
-      </p:cxnSp>
-      <p:sp>
-        <p:nvSpPr>
-          <p:cNvPr id="50" name="Rectangle 49"/>
-          <p:cNvSpPr/>
-          <p:nvPr/>
-        </p:nvSpPr>
-        <p:spPr>
-          <a:xfrm>
-            <a:off x="4736592" y="3902903"/>
-            <a:ext cx="493776" cy="349503"/>
-          </a:xfrm>
-          <a:prstGeom prst="rect">
+            <a:off x="9893808" y="5266944"/>
+            <a:ext cx="182880" cy="182880"/>
+          </a:xfrm>
+          <a:prstGeom prst="ellipse">
             <a:avLst/>
           </a:prstGeom>
           <a:solidFill>
@@ -12776,14 +13552,14 @@
       </p:sp>
       <p:sp>
         <p:nvSpPr>
-          <p:cNvPr id="51" name="TextBox 50"/>
-          <p:cNvSpPr txBox="1"/>
-          <p:nvPr/>
-        </p:nvSpPr>
-        <p:spPr>
-          <a:xfrm>
-            <a:off x="4507992" y="4882896"/>
-            <a:ext cx="987552" cy="201168"/>
+          <p:cNvPr id="63" name="TextBox 62"/>
+          <p:cNvSpPr txBox="1"/>
+          <p:nvPr/>
+        </p:nvSpPr>
+        <p:spPr>
+          <a:xfrm>
+            <a:off x="9592056" y="5532120"/>
+            <a:ext cx="786384" cy="164592"/>
           </a:xfrm>
           <a:prstGeom prst="rect">
             <a:avLst/>
@@ -12805,105 +13581,27 @@
               </a:spcAft>
             </a:pPr>
             <a:r>
-              <a:rPr sz="660" b="1">
-                <a:solidFill>
-                  <a:srgbClr val="18232B"/>
-                </a:solidFill>
-                <a:latin typeface="Arial"/>
-              </a:rPr>
-              <a:t>WITHDRAWALS</a:t>
-            </a:r>
-          </a:p>
-        </p:txBody>
-      </p:sp>
-      <p:cxnSp>
-        <p:nvCxnSpPr>
-          <p:cNvPr id="52" name="Connector 51"/>
-          <p:cNvCxnSpPr/>
-          <p:nvPr/>
-        </p:nvCxnSpPr>
-        <p:spPr>
-          <a:xfrm>
-            <a:off x="5239512" y="4252407"/>
-            <a:ext cx="612648" cy="0"/>
-          </a:xfrm>
-          <a:prstGeom prst="line">
-            <a:avLst/>
-          </a:prstGeom>
-          <a:ln w="8890">
-            <a:solidFill>
-              <a:srgbClr val="68747B"/>
-            </a:solidFill>
-          </a:ln>
-        </p:spPr>
-        <p:style>
-          <a:lnRef idx="2">
-            <a:schemeClr val="accent1"/>
-          </a:lnRef>
-          <a:fillRef idx="0">
-            <a:schemeClr val="accent1"/>
-          </a:fillRef>
-          <a:effectRef idx="1">
-            <a:schemeClr val="accent1"/>
-          </a:effectRef>
-          <a:fontRef idx="minor">
-            <a:schemeClr val="tx1"/>
-          </a:fontRef>
-        </p:style>
-      </p:cxnSp>
-      <p:sp>
-        <p:nvSpPr>
-          <p:cNvPr id="53" name="Rectangle 52"/>
-          <p:cNvSpPr/>
-          <p:nvPr/>
-        </p:nvSpPr>
-        <p:spPr>
-          <a:xfrm>
-            <a:off x="5852160" y="4252407"/>
-            <a:ext cx="493776" cy="174752"/>
-          </a:xfrm>
-          <a:prstGeom prst="rect">
-            <a:avLst/>
-          </a:prstGeom>
-          <a:solidFill>
-            <a:srgbClr val="C82036"/>
-          </a:solidFill>
-          <a:ln>
-            <a:noFill/>
-          </a:ln>
-        </p:spPr>
-        <p:style>
-          <a:lnRef idx="1">
-            <a:schemeClr val="accent1"/>
-          </a:lnRef>
-          <a:fillRef idx="3">
-            <a:schemeClr val="accent1"/>
-          </a:fillRef>
-          <a:effectRef idx="2">
-            <a:schemeClr val="accent1"/>
-          </a:effectRef>
-          <a:fontRef idx="minor">
-            <a:schemeClr val="lt1"/>
-          </a:fontRef>
-        </p:style>
-        <p:txBody>
-          <a:bodyPr rtlCol="0" anchor="ctr"/>
-          <a:lstStyle/>
-          <a:p>
-            <a:pPr algn="ctr"/>
-          </a:p>
-        </p:txBody>
-      </p:sp>
-      <p:sp>
-        <p:nvSpPr>
-          <p:cNvPr id="54" name="TextBox 53"/>
-          <p:cNvSpPr txBox="1"/>
-          <p:nvPr/>
-        </p:nvSpPr>
-        <p:spPr>
-          <a:xfrm>
-            <a:off x="5623560" y="4882896"/>
-            <a:ext cx="987552" cy="201168"/>
+              <a:rPr sz="740" b="1">
+                <a:solidFill>
+                  <a:srgbClr val="C82036"/>
+                </a:solidFill>
+                <a:latin typeface="Arial"/>
+              </a:rPr>
+              <a:t>30 NOV</a:t>
+            </a:r>
+          </a:p>
+        </p:txBody>
+      </p:sp>
+      <p:sp>
+        <p:nvSpPr>
+          <p:cNvPr id="64" name="TextBox 63"/>
+          <p:cNvSpPr txBox="1"/>
+          <p:nvPr/>
+        </p:nvSpPr>
+        <p:spPr>
+          <a:xfrm>
+            <a:off x="9509760" y="5742432"/>
+            <a:ext cx="960120" cy="164592"/>
           </a:xfrm>
           <a:prstGeom prst="rect">
             <a:avLst/>
@@ -12925,70 +13623,27 @@
               </a:spcAft>
             </a:pPr>
             <a:r>
-              <a:rPr sz="660" b="1">
-                <a:solidFill>
-                  <a:srgbClr val="18232B"/>
-                </a:solidFill>
-                <a:latin typeface="Arial"/>
-              </a:rPr>
-              <a:t>ROLLOVER</a:t>
-            </a:r>
-          </a:p>
-        </p:txBody>
-      </p:sp>
-      <p:sp>
-        <p:nvSpPr>
-          <p:cNvPr id="55" name="Rectangle 54"/>
-          <p:cNvSpPr/>
-          <p:nvPr/>
-        </p:nvSpPr>
-        <p:spPr>
-          <a:xfrm>
-            <a:off x="7708392" y="2944368"/>
-            <a:ext cx="3840480" cy="2286000"/>
-          </a:xfrm>
-          <a:prstGeom prst="rect">
-            <a:avLst/>
-          </a:prstGeom>
-          <a:solidFill>
-            <a:srgbClr val="E8ECE8"/>
-          </a:solidFill>
-          <a:ln>
-            <a:noFill/>
-          </a:ln>
-        </p:spPr>
-        <p:style>
-          <a:lnRef idx="1">
-            <a:schemeClr val="accent1"/>
-          </a:lnRef>
-          <a:fillRef idx="3">
-            <a:schemeClr val="accent1"/>
-          </a:fillRef>
-          <a:effectRef idx="2">
-            <a:schemeClr val="accent1"/>
-          </a:effectRef>
-          <a:fontRef idx="minor">
-            <a:schemeClr val="lt1"/>
-          </a:fontRef>
-        </p:style>
-        <p:txBody>
-          <a:bodyPr rtlCol="0" anchor="ctr"/>
-          <a:lstStyle/>
-          <a:p>
-            <a:pPr algn="ctr"/>
-          </a:p>
-        </p:txBody>
-      </p:sp>
-      <p:sp>
-        <p:nvSpPr>
-          <p:cNvPr id="56" name="TextBox 55"/>
-          <p:cNvSpPr txBox="1"/>
-          <p:nvPr/>
-        </p:nvSpPr>
-        <p:spPr>
-          <a:xfrm>
-            <a:off x="7936992" y="3136392"/>
-            <a:ext cx="3383280" cy="192024"/>
+              <a:rPr sz="700" b="0">
+                <a:solidFill>
+                  <a:srgbClr val="68747B"/>
+                </a:solidFill>
+                <a:latin typeface="Arial"/>
+              </a:rPr>
+              <a:t>First breach</a:t>
+            </a:r>
+          </a:p>
+        </p:txBody>
+      </p:sp>
+      <p:sp>
+        <p:nvSpPr>
+          <p:cNvPr id="65" name="TextBox 64"/>
+          <p:cNvSpPr txBox="1"/>
+          <p:nvPr/>
+        </p:nvSpPr>
+        <p:spPr>
+          <a:xfrm>
+            <a:off x="658368" y="6108192"/>
+            <a:ext cx="10972800" cy="201168"/>
           </a:xfrm>
           <a:prstGeom prst="rect">
             <a:avLst/>
@@ -13010,342 +13665,13 @@
               </a:spcAft>
             </a:pPr>
             <a:r>
-              <a:rPr sz="869" b="1">
-                <a:solidFill>
-                  <a:srgbClr val="18232B"/>
-                </a:solidFill>
-                <a:latin typeface="Arial"/>
-              </a:rPr>
-              <a:t>BUFFER / FUNDING TEST</a:t>
-            </a:r>
-          </a:p>
-        </p:txBody>
-      </p:sp>
-      <p:sp>
-        <p:nvSpPr>
-          <p:cNvPr id="57" name="TextBox 56"/>
-          <p:cNvSpPr txBox="1"/>
-          <p:nvPr/>
-        </p:nvSpPr>
-        <p:spPr>
-          <a:xfrm>
-            <a:off x="7936992" y="3538728"/>
-            <a:ext cx="1078992" cy="292608"/>
-          </a:xfrm>
-          <a:prstGeom prst="rect">
-            <a:avLst/>
-          </a:prstGeom>
-          <a:noFill/>
-        </p:spPr>
-        <p:txBody>
-          <a:bodyPr wrap="square" lIns="18288" rIns="18288" tIns="18288" bIns="18288" anchor="ctr">
-            <a:spAutoFit/>
-          </a:bodyPr>
-          <a:lstStyle/>
-          <a:p>
-            <a:pPr algn="l">
-              <a:spcBef>
-                <a:spcPts val="0"/>
-              </a:spcBef>
-              <a:spcAft>
-                <a:spcPts val="0"/>
-              </a:spcAft>
-            </a:pPr>
-            <a:r>
-              <a:rPr sz="1500" b="1">
-                <a:solidFill>
-                  <a:srgbClr val="C49500"/>
-                </a:solidFill>
-                <a:latin typeface="Arial"/>
-              </a:rPr>
-              <a:t>$700m</a:t>
-            </a:r>
-          </a:p>
-        </p:txBody>
-      </p:sp>
-      <p:sp>
-        <p:nvSpPr>
-          <p:cNvPr id="58" name="TextBox 57"/>
-          <p:cNvSpPr txBox="1"/>
-          <p:nvPr/>
-        </p:nvSpPr>
-        <p:spPr>
-          <a:xfrm>
-            <a:off x="9034272" y="3584448"/>
-            <a:ext cx="1207008" cy="201168"/>
-          </a:xfrm>
-          <a:prstGeom prst="rect">
-            <a:avLst/>
-          </a:prstGeom>
-          <a:noFill/>
-        </p:spPr>
-        <p:txBody>
-          <a:bodyPr wrap="square" lIns="18288" rIns="18288" tIns="18288" bIns="18288" anchor="ctr">
-            <a:spAutoFit/>
-          </a:bodyPr>
-          <a:lstStyle/>
-          <a:p>
-            <a:pPr algn="l">
-              <a:spcBef>
-                <a:spcPts val="0"/>
-              </a:spcBef>
-              <a:spcAft>
-                <a:spcPts val="0"/>
-              </a:spcAft>
-            </a:pPr>
-            <a:r>
-              <a:rPr sz="750" b="0">
+              <a:rPr sz="700" b="0">
                 <a:solidFill>
                   <a:srgbClr val="68747B"/>
                 </a:solidFill>
                 <a:latin typeface="Arial"/>
               </a:rPr>
-              <a:t>minimum buffer</a:t>
-            </a:r>
-          </a:p>
-        </p:txBody>
-      </p:sp>
-      <p:sp>
-        <p:nvSpPr>
-          <p:cNvPr id="59" name="TextBox 58"/>
-          <p:cNvSpPr txBox="1"/>
-          <p:nvPr/>
-        </p:nvSpPr>
-        <p:spPr>
-          <a:xfrm>
-            <a:off x="10305288" y="3538728"/>
-            <a:ext cx="987552" cy="292608"/>
-          </a:xfrm>
-          <a:prstGeom prst="rect">
-            <a:avLst/>
-          </a:prstGeom>
-          <a:noFill/>
-        </p:spPr>
-        <p:txBody>
-          <a:bodyPr wrap="square" lIns="18288" rIns="18288" tIns="18288" bIns="18288" anchor="ctr">
-            <a:spAutoFit/>
-          </a:bodyPr>
-          <a:lstStyle/>
-          <a:p>
-            <a:pPr algn="r">
-              <a:spcBef>
-                <a:spcPts val="0"/>
-              </a:spcBef>
-              <a:spcAft>
-                <a:spcPts val="0"/>
-              </a:spcAft>
-            </a:pPr>
-            <a:r>
-              <a:rPr sz="1400" b="1">
-                <a:solidFill>
-                  <a:srgbClr val="C82036"/>
-                </a:solidFill>
-                <a:latin typeface="Arial"/>
-              </a:rPr>
-              <a:t>$151m</a:t>
-            </a:r>
-          </a:p>
-        </p:txBody>
-      </p:sp>
-      <p:sp>
-        <p:nvSpPr>
-          <p:cNvPr id="60" name="TextBox 59"/>
-          <p:cNvSpPr txBox="1"/>
-          <p:nvPr/>
-        </p:nvSpPr>
-        <p:spPr>
-          <a:xfrm>
-            <a:off x="10140696" y="3840480"/>
-            <a:ext cx="1170432" cy="182880"/>
-          </a:xfrm>
-          <a:prstGeom prst="rect">
-            <a:avLst/>
-          </a:prstGeom>
-          <a:noFill/>
-        </p:spPr>
-        <p:txBody>
-          <a:bodyPr wrap="square" lIns="18288" rIns="18288" tIns="18288" bIns="18288" anchor="ctr">
-            <a:spAutoFit/>
-          </a:bodyPr>
-          <a:lstStyle/>
-          <a:p>
-            <a:pPr algn="r">
-              <a:spcBef>
-                <a:spcPts val="0"/>
-              </a:spcBef>
-              <a:spcAft>
-                <a:spcPts val="0"/>
-              </a:spcAft>
-            </a:pPr>
-            <a:r>
-              <a:rPr sz="680" b="0">
-                <a:solidFill>
-                  <a:srgbClr val="68747B"/>
-                </a:solidFill>
-                <a:latin typeface="Arial"/>
-              </a:rPr>
-              <a:t>30 Nov shortfall</a:t>
-            </a:r>
-          </a:p>
-        </p:txBody>
-      </p:sp>
-      <p:cxnSp>
-        <p:nvCxnSpPr>
-          <p:cNvPr id="61" name="Connector 60"/>
-          <p:cNvCxnSpPr/>
-          <p:nvPr/>
-        </p:nvCxnSpPr>
-        <p:spPr>
-          <a:xfrm>
-            <a:off x="7936992" y="4142232"/>
-            <a:ext cx="3392424" cy="0"/>
-          </a:xfrm>
-          <a:prstGeom prst="line">
-            <a:avLst/>
-          </a:prstGeom>
-          <a:ln w="8890">
-            <a:solidFill>
-              <a:srgbClr val="C9CECB"/>
-            </a:solidFill>
-          </a:ln>
-        </p:spPr>
-        <p:style>
-          <a:lnRef idx="2">
-            <a:schemeClr val="accent1"/>
-          </a:lnRef>
-          <a:fillRef idx="0">
-            <a:schemeClr val="accent1"/>
-          </a:fillRef>
-          <a:effectRef idx="1">
-            <a:schemeClr val="accent1"/>
-          </a:effectRef>
-          <a:fontRef idx="minor">
-            <a:schemeClr val="tx1"/>
-          </a:fontRef>
-        </p:style>
-      </p:cxnSp>
-      <p:sp>
-        <p:nvSpPr>
-          <p:cNvPr id="62" name="TextBox 61"/>
-          <p:cNvSpPr txBox="1"/>
-          <p:nvPr/>
-        </p:nvSpPr>
-        <p:spPr>
-          <a:xfrm>
-            <a:off x="7936992" y="4315968"/>
-            <a:ext cx="3401568" cy="256032"/>
-          </a:xfrm>
-          <a:prstGeom prst="rect">
-            <a:avLst/>
-          </a:prstGeom>
-          <a:noFill/>
-        </p:spPr>
-        <p:txBody>
-          <a:bodyPr wrap="square" lIns="18288" rIns="18288" tIns="18288" bIns="18288" anchor="ctr">
-            <a:spAutoFit/>
-          </a:bodyPr>
-          <a:lstStyle/>
-          <a:p>
-            <a:pPr algn="l">
-              <a:spcBef>
-                <a:spcPts val="0"/>
-              </a:spcBef>
-              <a:spcAft>
-                <a:spcPts val="0"/>
-              </a:spcAft>
-            </a:pPr>
-            <a:r>
-              <a:rPr sz="850" b="1">
-                <a:solidFill>
-                  <a:srgbClr val="C82036"/>
-                </a:solidFill>
-                <a:latin typeface="Arial"/>
-              </a:rPr>
-              <a:t>$524m on 14 Dec  →  $176m peak funding need</a:t>
-            </a:r>
-          </a:p>
-        </p:txBody>
-      </p:sp>
-      <p:sp>
-        <p:nvSpPr>
-          <p:cNvPr id="63" name="TextBox 62"/>
-          <p:cNvSpPr txBox="1"/>
-          <p:nvPr/>
-        </p:nvSpPr>
-        <p:spPr>
-          <a:xfrm>
-            <a:off x="658368" y="5559552"/>
-            <a:ext cx="10972800" cy="301752"/>
-          </a:xfrm>
-          <a:prstGeom prst="rect">
-            <a:avLst/>
-          </a:prstGeom>
-          <a:noFill/>
-        </p:spPr>
-        <p:txBody>
-          <a:bodyPr wrap="square" lIns="18288" rIns="18288" tIns="18288" bIns="18288" anchor="ctr">
-            <a:spAutoFit/>
-          </a:bodyPr>
-          <a:lstStyle/>
-          <a:p>
-            <a:pPr algn="l">
-              <a:spcBef>
-                <a:spcPts val="0"/>
-              </a:spcBef>
-              <a:spcAft>
-                <a:spcPts val="0"/>
-              </a:spcAft>
-            </a:pPr>
-            <a:r>
-              <a:rPr sz="900" b="1">
-                <a:solidFill>
-                  <a:srgbClr val="18232B"/>
-                </a:solidFill>
-                <a:latin typeface="Arial"/>
-              </a:rPr>
-              <a:t>T+2 liquidity source: trigger 25 Nov → arrival 29 Nov → first breach 30 Nov. If late, it cannot prevent the breach.</a:t>
-            </a:r>
-          </a:p>
-        </p:txBody>
-      </p:sp>
-      <p:sp>
-        <p:nvSpPr>
-          <p:cNvPr id="64" name="TextBox 63"/>
-          <p:cNvSpPr txBox="1"/>
-          <p:nvPr/>
-        </p:nvSpPr>
-        <p:spPr>
-          <a:xfrm>
-            <a:off x="658368" y="6035040"/>
-            <a:ext cx="10972800" cy="201168"/>
-          </a:xfrm>
-          <a:prstGeom prst="rect">
-            <a:avLst/>
-          </a:prstGeom>
-          <a:noFill/>
-        </p:spPr>
-        <p:txBody>
-          <a:bodyPr wrap="square" lIns="18288" rIns="18288" tIns="18288" bIns="18288" anchor="ctr">
-            <a:spAutoFit/>
-          </a:bodyPr>
-          <a:lstStyle/>
-          <a:p>
-            <a:pPr algn="l">
-              <a:spcBef>
-                <a:spcPts val="0"/>
-              </a:spcBef>
-              <a:spcAft>
-                <a:spcPts val="0"/>
-              </a:spcAft>
-            </a:pPr>
-            <a:r>
-              <a:rPr sz="700" b="0">
-                <a:solidFill>
-                  <a:srgbClr val="68747B"/>
-                </a:solidFill>
-                <a:latin typeface="Arial"/>
-              </a:rPr>
-              <a:t>Assumed $200m line and timing; verify availability, eligible collateral and actual settlement dates. Stress inputs are scenario shocks, not actual UBS cash flows.</a:t>
+              <a:t>If the source arrives after the breach, it cannot prevent the first shortfall. Verify facility access, collateral eligibility and settlement dates.</a:t>
             </a:r>
           </a:p>
         </p:txBody>
@@ -13670,16 +13996,16 @@
         </p:nvSpPr>
         <p:spPr>
           <a:xfrm>
-            <a:off x="850392" y="1527048"/>
-            <a:ext cx="1965960" cy="1124712"/>
+            <a:off x="804672" y="1508760"/>
+            <a:ext cx="2057400" cy="1252728"/>
           </a:xfrm>
           <a:prstGeom prst="rect">
             <a:avLst/>
           </a:prstGeom>
           <a:solidFill>
-            <a:srgbClr val="F5DCDD"/>
+            <a:srgbClr val="F1C9CD"/>
           </a:solidFill>
-          <a:ln w="12700">
+          <a:ln w="17780">
             <a:solidFill>
               <a:srgbClr val="FFFFFF"/>
             </a:solidFill>
@@ -13715,8 +14041,8 @@
         </p:nvSpPr>
         <p:spPr>
           <a:xfrm>
-            <a:off x="923544" y="1572768"/>
-            <a:ext cx="201168" cy="146304"/>
+            <a:off x="896112" y="1572768"/>
+            <a:ext cx="228600" cy="164592"/>
           </a:xfrm>
           <a:prstGeom prst="rect">
             <a:avLst/>
@@ -13738,7 +14064,7 @@
               </a:spcAft>
             </a:pPr>
             <a:r>
-              <a:rPr sz="680" b="0">
+              <a:rPr sz="720" b="1">
                 <a:solidFill>
                   <a:srgbClr val="68747B"/>
                 </a:solidFill>
@@ -13757,16 +14083,16 @@
         </p:nvSpPr>
         <p:spPr>
           <a:xfrm>
-            <a:off x="2862072" y="1527048"/>
-            <a:ext cx="1965960" cy="1124712"/>
+            <a:off x="2907791" y="1508760"/>
+            <a:ext cx="2057400" cy="1252728"/>
           </a:xfrm>
           <a:prstGeom prst="rect">
             <a:avLst/>
           </a:prstGeom>
           <a:solidFill>
-            <a:srgbClr val="EFC9C9"/>
+            <a:srgbClr val="E9AEB4"/>
           </a:solidFill>
-          <a:ln w="12700">
+          <a:ln w="17780">
             <a:solidFill>
               <a:srgbClr val="FFFFFF"/>
             </a:solidFill>
@@ -13802,8 +14128,8 @@
         </p:nvSpPr>
         <p:spPr>
           <a:xfrm>
-            <a:off x="2935224" y="1572768"/>
-            <a:ext cx="201168" cy="146304"/>
+            <a:off x="2999232" y="1572768"/>
+            <a:ext cx="228600" cy="164592"/>
           </a:xfrm>
           <a:prstGeom prst="rect">
             <a:avLst/>
@@ -13825,7 +14151,7 @@
               </a:spcAft>
             </a:pPr>
             <a:r>
-              <a:rPr sz="680" b="0">
+              <a:rPr sz="720" b="1">
                 <a:solidFill>
                   <a:srgbClr val="68747B"/>
                 </a:solidFill>
@@ -13844,16 +14170,16 @@
         </p:nvSpPr>
         <p:spPr>
           <a:xfrm>
-            <a:off x="4873752" y="1527048"/>
-            <a:ext cx="1965960" cy="1124712"/>
+            <a:off x="5010912" y="1508760"/>
+            <a:ext cx="2057400" cy="1252728"/>
           </a:xfrm>
           <a:prstGeom prst="rect">
             <a:avLst/>
           </a:prstGeom>
           <a:solidFill>
-            <a:srgbClr val="E5B3B7"/>
+            <a:srgbClr val="DD8E99"/>
           </a:solidFill>
-          <a:ln w="12700">
+          <a:ln w="17780">
             <a:solidFill>
               <a:srgbClr val="FFFFFF"/>
             </a:solidFill>
@@ -13889,8 +14215,8 @@
         </p:nvSpPr>
         <p:spPr>
           <a:xfrm>
-            <a:off x="4946904" y="1572768"/>
-            <a:ext cx="201168" cy="146304"/>
+            <a:off x="5102351" y="1572768"/>
+            <a:ext cx="228600" cy="164592"/>
           </a:xfrm>
           <a:prstGeom prst="rect">
             <a:avLst/>
@@ -13912,7 +14238,7 @@
               </a:spcAft>
             </a:pPr>
             <a:r>
-              <a:rPr sz="680" b="0">
+              <a:rPr sz="720" b="1">
                 <a:solidFill>
                   <a:srgbClr val="68747B"/>
                 </a:solidFill>
@@ -13931,16 +14257,16 @@
         </p:nvSpPr>
         <p:spPr>
           <a:xfrm>
-            <a:off x="850392" y="2697480"/>
-            <a:ext cx="1965960" cy="1124712"/>
+            <a:off x="804672" y="2807208"/>
+            <a:ext cx="2057400" cy="1252728"/>
           </a:xfrm>
           <a:prstGeom prst="rect">
             <a:avLst/>
           </a:prstGeom>
           <a:solidFill>
-            <a:srgbClr val="F4E8C7"/>
+            <a:srgbClr val="F4E6BE"/>
           </a:solidFill>
-          <a:ln w="12700">
+          <a:ln w="17780">
             <a:solidFill>
               <a:srgbClr val="FFFFFF"/>
             </a:solidFill>
@@ -13976,8 +14302,8 @@
         </p:nvSpPr>
         <p:spPr>
           <a:xfrm>
-            <a:off x="923544" y="2743200"/>
-            <a:ext cx="201168" cy="146304"/>
+            <a:off x="896112" y="2871215"/>
+            <a:ext cx="228600" cy="164592"/>
           </a:xfrm>
           <a:prstGeom prst="rect">
             <a:avLst/>
@@ -13999,7 +14325,7 @@
               </a:spcAft>
             </a:pPr>
             <a:r>
-              <a:rPr sz="680" b="0">
+              <a:rPr sz="720" b="1">
                 <a:solidFill>
                   <a:srgbClr val="68747B"/>
                 </a:solidFill>
@@ -14018,16 +14344,16 @@
         </p:nvSpPr>
         <p:spPr>
           <a:xfrm>
-            <a:off x="2862072" y="2697480"/>
-            <a:ext cx="1965960" cy="1124712"/>
+            <a:off x="2907791" y="2807208"/>
+            <a:ext cx="2057400" cy="1252728"/>
           </a:xfrm>
           <a:prstGeom prst="rect">
             <a:avLst/>
           </a:prstGeom>
           <a:solidFill>
-            <a:srgbClr val="EFDBA9"/>
+            <a:srgbClr val="F0D998"/>
           </a:solidFill>
-          <a:ln w="12700">
+          <a:ln w="17780">
             <a:solidFill>
               <a:srgbClr val="FFFFFF"/>
             </a:solidFill>
@@ -14063,8 +14389,8 @@
         </p:nvSpPr>
         <p:spPr>
           <a:xfrm>
-            <a:off x="2935224" y="2743200"/>
-            <a:ext cx="201168" cy="146304"/>
+            <a:off x="2999232" y="2871215"/>
+            <a:ext cx="228600" cy="164592"/>
           </a:xfrm>
           <a:prstGeom prst="rect">
             <a:avLst/>
@@ -14086,7 +14412,7 @@
               </a:spcAft>
             </a:pPr>
             <a:r>
-              <a:rPr sz="680" b="0">
+              <a:rPr sz="720" b="1">
                 <a:solidFill>
                   <a:srgbClr val="68747B"/>
                 </a:solidFill>
@@ -14105,8 +14431,8 @@
         </p:nvSpPr>
         <p:spPr>
           <a:xfrm>
-            <a:off x="3026664" y="2926080"/>
-            <a:ext cx="1645920" cy="804672"/>
+            <a:off x="3035808" y="3090672"/>
+            <a:ext cx="1801367" cy="905256"/>
           </a:xfrm>
           <a:prstGeom prst="rect">
             <a:avLst/>
@@ -14128,15 +14454,15 @@
               </a:spcAft>
             </a:pPr>
             <a:r>
-              <a:rPr sz="800" b="1">
+              <a:rPr sz="900" b="1">
                 <a:solidFill>
                   <a:srgbClr val="C49500"/>
                 </a:solidFill>
                 <a:latin typeface="Arial"/>
               </a:rPr>
-              <a:t>Market (4)
-Counterparty (4)
-Legal / regulatory (4)</a:t>
+              <a:t>Market · 4
+Counterparty · 4
+Legal / regulatory · 4</a:t>
             </a:r>
           </a:p>
         </p:txBody>
@@ -14149,16 +14475,16 @@
         </p:nvSpPr>
         <p:spPr>
           <a:xfrm>
-            <a:off x="4873752" y="2697480"/>
-            <a:ext cx="1965960" cy="1124712"/>
+            <a:off x="5010912" y="2807208"/>
+            <a:ext cx="2057400" cy="1252728"/>
           </a:xfrm>
           <a:prstGeom prst="rect">
             <a:avLst/>
           </a:prstGeom>
           <a:solidFill>
-            <a:srgbClr val="EACB9B"/>
+            <a:srgbClr val="E9C56F"/>
           </a:solidFill>
-          <a:ln w="12700">
+          <a:ln w="17780">
             <a:solidFill>
               <a:srgbClr val="FFFFFF"/>
             </a:solidFill>
@@ -14194,8 +14520,8 @@
         </p:nvSpPr>
         <p:spPr>
           <a:xfrm>
-            <a:off x="4946904" y="2743200"/>
-            <a:ext cx="201168" cy="146304"/>
+            <a:off x="5102351" y="2871215"/>
+            <a:ext cx="228600" cy="164592"/>
           </a:xfrm>
           <a:prstGeom prst="rect">
             <a:avLst/>
@@ -14217,7 +14543,7 @@
               </a:spcAft>
             </a:pPr>
             <a:r>
-              <a:rPr sz="680" b="0">
+              <a:rPr sz="720" b="1">
                 <a:solidFill>
                   <a:srgbClr val="68747B"/>
                 </a:solidFill>
@@ -14236,8 +14562,8 @@
         </p:nvSpPr>
         <p:spPr>
           <a:xfrm>
-            <a:off x="5038344" y="2926080"/>
-            <a:ext cx="1645920" cy="804672"/>
+            <a:off x="5138927" y="3090672"/>
+            <a:ext cx="1801367" cy="905256"/>
           </a:xfrm>
           <a:prstGeom prst="rect">
             <a:avLst/>
@@ -14259,15 +14585,15 @@
               </a:spcAft>
             </a:pPr>
             <a:r>
-              <a:rPr sz="800" b="1">
+              <a:rPr sz="900" b="1">
                 <a:solidFill>
                   <a:srgbClr val="C82036"/>
                 </a:solidFill>
                 <a:latin typeface="Arial"/>
               </a:rPr>
-              <a:t>Operational (6)
-Liquidity (6)
-Funding (6)</a:t>
+              <a:t>Operational · 6
+Liquidity · 6
+Funding · 6</a:t>
             </a:r>
           </a:p>
         </p:txBody>
@@ -14280,16 +14606,16 @@
         </p:nvSpPr>
         <p:spPr>
           <a:xfrm>
-            <a:off x="850392" y="3867912"/>
-            <a:ext cx="1965960" cy="1124712"/>
+            <a:off x="804672" y="4105656"/>
+            <a:ext cx="2057400" cy="1252728"/>
           </a:xfrm>
           <a:prstGeom prst="rect">
             <a:avLst/>
           </a:prstGeom>
           <a:solidFill>
-            <a:srgbClr val="E4EEE5"/>
+            <a:srgbClr val="D7E9DC"/>
           </a:solidFill>
-          <a:ln w="12700">
+          <a:ln w="17780">
             <a:solidFill>
               <a:srgbClr val="FFFFFF"/>
             </a:solidFill>
@@ -14325,8 +14651,8 @@
         </p:nvSpPr>
         <p:spPr>
           <a:xfrm>
-            <a:off x="923544" y="3913632"/>
-            <a:ext cx="201168" cy="146304"/>
+            <a:off x="896112" y="4169664"/>
+            <a:ext cx="228600" cy="164592"/>
           </a:xfrm>
           <a:prstGeom prst="rect">
             <a:avLst/>
@@ -14348,7 +14674,7 @@
               </a:spcAft>
             </a:pPr>
             <a:r>
-              <a:rPr sz="680" b="0">
+              <a:rPr sz="720" b="1">
                 <a:solidFill>
                   <a:srgbClr val="68747B"/>
                 </a:solidFill>
@@ -14367,16 +14693,16 @@
         </p:nvSpPr>
         <p:spPr>
           <a:xfrm>
-            <a:off x="2862072" y="3867912"/>
-            <a:ext cx="1965960" cy="1124712"/>
+            <a:off x="2907791" y="4105656"/>
+            <a:ext cx="2057400" cy="1252728"/>
           </a:xfrm>
           <a:prstGeom prst="rect">
             <a:avLst/>
           </a:prstGeom>
           <a:solidFill>
-            <a:srgbClr val="E8EDDD"/>
+            <a:srgbClr val="E4ECD8"/>
           </a:solidFill>
-          <a:ln w="12700">
+          <a:ln w="17780">
             <a:solidFill>
               <a:srgbClr val="FFFFFF"/>
             </a:solidFill>
@@ -14412,8 +14738,8 @@
         </p:nvSpPr>
         <p:spPr>
           <a:xfrm>
-            <a:off x="2935224" y="3913632"/>
-            <a:ext cx="201168" cy="146304"/>
+            <a:off x="2999232" y="4169664"/>
+            <a:ext cx="228600" cy="164592"/>
           </a:xfrm>
           <a:prstGeom prst="rect">
             <a:avLst/>
@@ -14435,7 +14761,7 @@
               </a:spcAft>
             </a:pPr>
             <a:r>
-              <a:rPr sz="680" b="0">
+              <a:rPr sz="720" b="1">
                 <a:solidFill>
                   <a:srgbClr val="68747B"/>
                 </a:solidFill>
@@ -14454,8 +14780,8 @@
         </p:nvSpPr>
         <p:spPr>
           <a:xfrm>
-            <a:off x="3026664" y="4096512"/>
-            <a:ext cx="1645920" cy="804672"/>
+            <a:off x="3035808" y="4389120"/>
+            <a:ext cx="1801367" cy="905256"/>
           </a:xfrm>
           <a:prstGeom prst="rect">
             <a:avLst/>
@@ -14477,13 +14803,13 @@
               </a:spcAft>
             </a:pPr>
             <a:r>
-              <a:rPr sz="800" b="1">
+              <a:rPr sz="900" b="1">
                 <a:solidFill>
                   <a:srgbClr val="C49500"/>
                 </a:solidFill>
                 <a:latin typeface="Arial"/>
               </a:rPr>
-              <a:t>Reputational (2)</a:t>
+              <a:t>Reputational · 2</a:t>
             </a:r>
           </a:p>
         </p:txBody>
@@ -14496,16 +14822,16 @@
         </p:nvSpPr>
         <p:spPr>
           <a:xfrm>
-            <a:off x="4873752" y="3867912"/>
-            <a:ext cx="1965960" cy="1124712"/>
+            <a:off x="5010912" y="4105656"/>
+            <a:ext cx="2057400" cy="1252728"/>
           </a:xfrm>
           <a:prstGeom prst="rect">
             <a:avLst/>
           </a:prstGeom>
           <a:solidFill>
-            <a:srgbClr val="F1E6C8"/>
+            <a:srgbClr val="F0E6C7"/>
           </a:solidFill>
-          <a:ln w="12700">
+          <a:ln w="17780">
             <a:solidFill>
               <a:srgbClr val="FFFFFF"/>
             </a:solidFill>
@@ -14541,8 +14867,8 @@
         </p:nvSpPr>
         <p:spPr>
           <a:xfrm>
-            <a:off x="4946904" y="3913632"/>
-            <a:ext cx="201168" cy="146304"/>
+            <a:off x="5102351" y="4169664"/>
+            <a:ext cx="228600" cy="164592"/>
           </a:xfrm>
           <a:prstGeom prst="rect">
             <a:avLst/>
@@ -14564,7 +14890,7 @@
               </a:spcAft>
             </a:pPr>
             <a:r>
-              <a:rPr sz="680" b="0">
+              <a:rPr sz="720" b="1">
                 <a:solidFill>
                   <a:srgbClr val="68747B"/>
                 </a:solidFill>
@@ -14583,8 +14909,8 @@
         </p:nvSpPr>
         <p:spPr>
           <a:xfrm>
-            <a:off x="91440" y="1965960"/>
-            <a:ext cx="694944" cy="182880"/>
+            <a:off x="73152" y="1993391"/>
+            <a:ext cx="640080" cy="182880"/>
           </a:xfrm>
           <a:prstGeom prst="rect">
             <a:avLst/>
@@ -14606,7 +14932,7 @@
               </a:spcAft>
             </a:pPr>
             <a:r>
-              <a:rPr sz="710" b="1">
+              <a:rPr sz="750" b="1">
                 <a:solidFill>
                   <a:srgbClr val="18232B"/>
                 </a:solidFill>
@@ -14625,8 +14951,8 @@
         </p:nvSpPr>
         <p:spPr>
           <a:xfrm>
-            <a:off x="91440" y="3136392"/>
-            <a:ext cx="694944" cy="182880"/>
+            <a:off x="73152" y="3291839"/>
+            <a:ext cx="640080" cy="182880"/>
           </a:xfrm>
           <a:prstGeom prst="rect">
             <a:avLst/>
@@ -14648,7 +14974,7 @@
               </a:spcAft>
             </a:pPr>
             <a:r>
-              <a:rPr sz="710" b="1">
+              <a:rPr sz="750" b="1">
                 <a:solidFill>
                   <a:srgbClr val="18232B"/>
                 </a:solidFill>
@@ -14667,8 +14993,8 @@
         </p:nvSpPr>
         <p:spPr>
           <a:xfrm>
-            <a:off x="91440" y="4306824"/>
-            <a:ext cx="694944" cy="182880"/>
+            <a:off x="73152" y="4590288"/>
+            <a:ext cx="640080" cy="182880"/>
           </a:xfrm>
           <a:prstGeom prst="rect">
             <a:avLst/>
@@ -14690,7 +15016,7 @@
               </a:spcAft>
             </a:pPr>
             <a:r>
-              <a:rPr sz="710" b="1">
+              <a:rPr sz="750" b="1">
                 <a:solidFill>
                   <a:srgbClr val="18232B"/>
                 </a:solidFill>
@@ -14709,8 +15035,8 @@
         </p:nvSpPr>
         <p:spPr>
           <a:xfrm>
-            <a:off x="850392" y="5065776"/>
-            <a:ext cx="1965960" cy="173736"/>
+            <a:off x="73152" y="1261872"/>
+            <a:ext cx="640080" cy="164592"/>
           </a:xfrm>
           <a:prstGeom prst="rect">
             <a:avLst/>
@@ -14723,6 +15049,48 @@
           </a:bodyPr>
           <a:lstStyle/>
           <a:p>
+            <a:pPr algn="r">
+              <a:spcBef>
+                <a:spcPts val="0"/>
+              </a:spcBef>
+              <a:spcAft>
+                <a:spcPts val="0"/>
+              </a:spcAft>
+            </a:pPr>
+            <a:r>
+              <a:rPr sz="700" b="1">
+                <a:solidFill>
+                  <a:srgbClr val="68747B"/>
+                </a:solidFill>
+                <a:latin typeface="Arial"/>
+              </a:rPr>
+              <a:t>LIKELIHOOD</a:t>
+            </a:r>
+          </a:p>
+        </p:txBody>
+      </p:sp>
+      <p:sp>
+        <p:nvSpPr>
+          <p:cNvPr id="35" name="TextBox 34"/>
+          <p:cNvSpPr txBox="1"/>
+          <p:nvPr/>
+        </p:nvSpPr>
+        <p:spPr>
+          <a:xfrm>
+            <a:off x="804672" y="5431536"/>
+            <a:ext cx="2057400" cy="182880"/>
+          </a:xfrm>
+          <a:prstGeom prst="rect">
+            <a:avLst/>
+          </a:prstGeom>
+          <a:noFill/>
+        </p:spPr>
+        <p:txBody>
+          <a:bodyPr wrap="square" lIns="18288" rIns="18288" tIns="18288" bIns="18288" anchor="ctr">
+            <a:spAutoFit/>
+          </a:bodyPr>
+          <a:lstStyle/>
+          <a:p>
             <a:pPr algn="ctr">
               <a:spcBef>
                 <a:spcPts val="0"/>
@@ -14732,7 +15100,7 @@
               </a:spcAft>
             </a:pPr>
             <a:r>
-              <a:rPr sz="730" b="1">
+              <a:rPr sz="770" b="1">
                 <a:solidFill>
                   <a:srgbClr val="18232B"/>
                 </a:solidFill>
@@ -14745,14 +15113,14 @@
       </p:sp>
       <p:sp>
         <p:nvSpPr>
-          <p:cNvPr id="35" name="TextBox 34"/>
-          <p:cNvSpPr txBox="1"/>
-          <p:nvPr/>
-        </p:nvSpPr>
-        <p:spPr>
-          <a:xfrm>
-            <a:off x="2862072" y="5065776"/>
-            <a:ext cx="1965960" cy="173736"/>
+          <p:cNvPr id="36" name="TextBox 35"/>
+          <p:cNvSpPr txBox="1"/>
+          <p:nvPr/>
+        </p:nvSpPr>
+        <p:spPr>
+          <a:xfrm>
+            <a:off x="2907791" y="5431536"/>
+            <a:ext cx="2057400" cy="182880"/>
           </a:xfrm>
           <a:prstGeom prst="rect">
             <a:avLst/>
@@ -14774,7 +15142,7 @@
               </a:spcAft>
             </a:pPr>
             <a:r>
-              <a:rPr sz="730" b="1">
+              <a:rPr sz="770" b="1">
                 <a:solidFill>
                   <a:srgbClr val="18232B"/>
                 </a:solidFill>
@@ -14787,14 +15155,14 @@
       </p:sp>
       <p:sp>
         <p:nvSpPr>
-          <p:cNvPr id="36" name="TextBox 35"/>
-          <p:cNvSpPr txBox="1"/>
-          <p:nvPr/>
-        </p:nvSpPr>
-        <p:spPr>
-          <a:xfrm>
-            <a:off x="4873752" y="5065776"/>
-            <a:ext cx="1965960" cy="173736"/>
+          <p:cNvPr id="37" name="TextBox 36"/>
+          <p:cNvSpPr txBox="1"/>
+          <p:nvPr/>
+        </p:nvSpPr>
+        <p:spPr>
+          <a:xfrm>
+            <a:off x="5010912" y="5431536"/>
+            <a:ext cx="2057400" cy="182880"/>
           </a:xfrm>
           <a:prstGeom prst="rect">
             <a:avLst/>
@@ -14816,7 +15184,7 @@
               </a:spcAft>
             </a:pPr>
             <a:r>
-              <a:rPr sz="730" b="1">
+              <a:rPr sz="770" b="1">
                 <a:solidFill>
                   <a:srgbClr val="18232B"/>
                 </a:solidFill>
@@ -14829,14 +15197,14 @@
       </p:sp>
       <p:sp>
         <p:nvSpPr>
-          <p:cNvPr id="37" name="TextBox 36"/>
-          <p:cNvSpPr txBox="1"/>
-          <p:nvPr/>
-        </p:nvSpPr>
-        <p:spPr>
-          <a:xfrm>
-            <a:off x="100584" y="1280160"/>
-            <a:ext cx="685800" cy="164592"/>
+          <p:cNvPr id="38" name="TextBox 37"/>
+          <p:cNvSpPr txBox="1"/>
+          <p:nvPr/>
+        </p:nvSpPr>
+        <p:spPr>
+          <a:xfrm>
+            <a:off x="2770632" y="5696712"/>
+            <a:ext cx="914400" cy="164592"/>
           </a:xfrm>
           <a:prstGeom prst="rect">
             <a:avLst/>
@@ -14849,36 +15217,36 @@
           </a:bodyPr>
           <a:lstStyle/>
           <a:p>
-            <a:pPr algn="r">
-              <a:spcBef>
-                <a:spcPts val="0"/>
-              </a:spcBef>
-              <a:spcAft>
-                <a:spcPts val="0"/>
-              </a:spcAft>
-            </a:pPr>
-            <a:r>
-              <a:rPr sz="680" b="1">
+            <a:pPr algn="ctr">
+              <a:spcBef>
+                <a:spcPts val="0"/>
+              </a:spcBef>
+              <a:spcAft>
+                <a:spcPts val="0"/>
+              </a:spcAft>
+            </a:pPr>
+            <a:r>
+              <a:rPr sz="700" b="1">
                 <a:solidFill>
                   <a:srgbClr val="68747B"/>
                 </a:solidFill>
                 <a:latin typeface="Arial"/>
               </a:rPr>
-              <a:t>LIKELIHOOD</a:t>
-            </a:r>
-          </a:p>
-        </p:txBody>
-      </p:sp>
-      <p:sp>
-        <p:nvSpPr>
-          <p:cNvPr id="38" name="TextBox 37"/>
-          <p:cNvSpPr txBox="1"/>
-          <p:nvPr/>
-        </p:nvSpPr>
-        <p:spPr>
-          <a:xfrm>
-            <a:off x="2633472" y="5321807"/>
-            <a:ext cx="914400" cy="164592"/>
+              <a:t>IMPACT</a:t>
+            </a:r>
+          </a:p>
+        </p:txBody>
+      </p:sp>
+      <p:sp>
+        <p:nvSpPr>
+          <p:cNvPr id="39" name="TextBox 38"/>
+          <p:cNvSpPr txBox="1"/>
+          <p:nvPr/>
+        </p:nvSpPr>
+        <p:spPr>
+          <a:xfrm>
+            <a:off x="7543800" y="1572768"/>
+            <a:ext cx="3977639" cy="228600"/>
           </a:xfrm>
           <a:prstGeom prst="rect">
             <a:avLst/>
@@ -14891,48 +15259,6 @@
           </a:bodyPr>
           <a:lstStyle/>
           <a:p>
-            <a:pPr algn="ctr">
-              <a:spcBef>
-                <a:spcPts val="0"/>
-              </a:spcBef>
-              <a:spcAft>
-                <a:spcPts val="0"/>
-              </a:spcAft>
-            </a:pPr>
-            <a:r>
-              <a:rPr sz="700" b="1">
-                <a:solidFill>
-                  <a:srgbClr val="68747B"/>
-                </a:solidFill>
-                <a:latin typeface="Arial"/>
-              </a:rPr>
-              <a:t>IMPACT</a:t>
-            </a:r>
-          </a:p>
-        </p:txBody>
-      </p:sp>
-      <p:sp>
-        <p:nvSpPr>
-          <p:cNvPr id="39" name="TextBox 38"/>
-          <p:cNvSpPr txBox="1"/>
-          <p:nvPr/>
-        </p:nvSpPr>
-        <p:spPr>
-          <a:xfrm>
-            <a:off x="7424927" y="1627632"/>
-            <a:ext cx="4160520" cy="219456"/>
-          </a:xfrm>
-          <a:prstGeom prst="rect">
-            <a:avLst/>
-          </a:prstGeom>
-          <a:noFill/>
-        </p:spPr>
-        <p:txBody>
-          <a:bodyPr wrap="square" lIns="18288" rIns="18288" tIns="18288" bIns="18288" anchor="ctr">
-            <a:spAutoFit/>
-          </a:bodyPr>
-          <a:lstStyle/>
-          <a:p>
             <a:pPr algn="l">
               <a:spcBef>
                 <a:spcPts val="0"/>
@@ -14942,13 +15268,13 @@
               </a:spcAft>
             </a:pPr>
             <a:r>
-              <a:rPr sz="960" b="1">
+              <a:rPr sz="1000" b="1">
                 <a:solidFill>
                   <a:srgbClr val="18232B"/>
                 </a:solidFill>
                 <a:latin typeface="Arial"/>
               </a:rPr>
-              <a:t>PRIORITY RISKS</a:t>
+              <a:t>PRIORITY EXPOSURES</a:t>
             </a:r>
           </a:p>
         </p:txBody>
@@ -14961,13 +15287,13 @@
         </p:nvCxnSpPr>
         <p:spPr>
           <a:xfrm>
-            <a:off x="7424927" y="1929384"/>
-            <a:ext cx="4215385" cy="0"/>
+            <a:off x="7543800" y="1901952"/>
+            <a:ext cx="4032504" cy="0"/>
           </a:xfrm>
           <a:prstGeom prst="line">
             <a:avLst/>
           </a:prstGeom>
-          <a:ln w="20320">
+          <a:ln w="22860">
             <a:solidFill>
               <a:srgbClr val="C82036"/>
             </a:solidFill>
@@ -14996,8 +15322,8 @@
         </p:nvSpPr>
         <p:spPr>
           <a:xfrm>
-            <a:off x="7424927" y="2157984"/>
-            <a:ext cx="384048" cy="210312"/>
+            <a:off x="7543800" y="2139696"/>
+            <a:ext cx="384048" cy="201168"/>
           </a:xfrm>
           <a:prstGeom prst="rect">
             <a:avLst/>
@@ -15019,7 +15345,7 @@
               </a:spcAft>
             </a:pPr>
             <a:r>
-              <a:rPr sz="800" b="1">
+              <a:rPr sz="840" b="1">
                 <a:solidFill>
                   <a:srgbClr val="C82036"/>
                 </a:solidFill>
@@ -15038,8 +15364,8 @@
         </p:nvSpPr>
         <p:spPr>
           <a:xfrm>
-            <a:off x="7900415" y="2157984"/>
-            <a:ext cx="3547872" cy="210312"/>
+            <a:off x="8019288" y="2139696"/>
+            <a:ext cx="3474720" cy="201168"/>
           </a:xfrm>
           <a:prstGeom prst="rect">
             <a:avLst/>
@@ -15061,13 +15387,13 @@
               </a:spcAft>
             </a:pPr>
             <a:r>
-              <a:rPr sz="900" b="1">
+              <a:rPr sz="880" b="1">
                 <a:solidFill>
                   <a:srgbClr val="18232B"/>
                 </a:solidFill>
                 <a:latin typeface="Arial"/>
               </a:rPr>
-              <a:t>Operational</a:t>
+              <a:t>OPERATIONAL</a:t>
             </a:r>
           </a:p>
         </p:txBody>
@@ -15080,8 +15406,8 @@
         </p:nvSpPr>
         <p:spPr>
           <a:xfrm>
-            <a:off x="7900415" y="2432303"/>
-            <a:ext cx="3547872" cy="393192"/>
+            <a:off x="8019288" y="2414015"/>
+            <a:ext cx="3474720" cy="402336"/>
           </a:xfrm>
           <a:prstGeom prst="rect">
             <a:avLst/>
@@ -15103,13 +15429,13 @@
               </a:spcAft>
             </a:pPr>
             <a:r>
-              <a:rPr sz="780" b="0">
+              <a:rPr sz="800" b="0">
                 <a:solidFill>
                   <a:srgbClr val="68747B"/>
                 </a:solidFill>
                 <a:latin typeface="Arial"/>
               </a:rPr>
-              <a:t>Unreconciled breaks may hide open positions.</a:t>
+              <a:t>Unreconciled breaks can hide open positions.</a:t>
             </a:r>
           </a:p>
         </p:txBody>
@@ -15122,13 +15448,13 @@
         </p:nvCxnSpPr>
         <p:spPr>
           <a:xfrm>
-            <a:off x="7900415" y="2907791"/>
-            <a:ext cx="3666745" cy="0"/>
+            <a:off x="8019288" y="2907791"/>
+            <a:ext cx="3538728" cy="0"/>
           </a:xfrm>
           <a:prstGeom prst="line">
             <a:avLst/>
           </a:prstGeom>
-          <a:ln w="7620">
+          <a:ln w="8255">
             <a:solidFill>
               <a:srgbClr val="C9CECB"/>
             </a:solidFill>
@@ -15157,8 +15483,8 @@
         </p:nvSpPr>
         <p:spPr>
           <a:xfrm>
-            <a:off x="7424927" y="3108960"/>
-            <a:ext cx="384048" cy="210312"/>
+            <a:off x="7543800" y="3081528"/>
+            <a:ext cx="384048" cy="201168"/>
           </a:xfrm>
           <a:prstGeom prst="rect">
             <a:avLst/>
@@ -15180,7 +15506,7 @@
               </a:spcAft>
             </a:pPr>
             <a:r>
-              <a:rPr sz="800" b="1">
+              <a:rPr sz="840" b="1">
                 <a:solidFill>
                   <a:srgbClr val="C82036"/>
                 </a:solidFill>
@@ -15199,8 +15525,8 @@
         </p:nvSpPr>
         <p:spPr>
           <a:xfrm>
-            <a:off x="7900415" y="3108960"/>
-            <a:ext cx="3547872" cy="210312"/>
+            <a:off x="8019288" y="3081528"/>
+            <a:ext cx="3474720" cy="201168"/>
           </a:xfrm>
           <a:prstGeom prst="rect">
             <a:avLst/>
@@ -15222,13 +15548,13 @@
               </a:spcAft>
             </a:pPr>
             <a:r>
-              <a:rPr sz="900" b="1">
+              <a:rPr sz="880" b="1">
                 <a:solidFill>
                   <a:srgbClr val="18232B"/>
                 </a:solidFill>
                 <a:latin typeface="Arial"/>
               </a:rPr>
-              <a:t>Liquidity</a:t>
+              <a:t>LIQUIDITY</a:t>
             </a:r>
           </a:p>
         </p:txBody>
@@ -15241,8 +15567,8 @@
         </p:nvSpPr>
         <p:spPr>
           <a:xfrm>
-            <a:off x="7900415" y="3383279"/>
-            <a:ext cx="3547872" cy="393192"/>
+            <a:off x="8019288" y="3355848"/>
+            <a:ext cx="3474720" cy="402336"/>
           </a:xfrm>
           <a:prstGeom prst="rect">
             <a:avLst/>
@@ -15264,13 +15590,13 @@
               </a:spcAft>
             </a:pPr>
             <a:r>
-              <a:rPr sz="780" b="0">
+              <a:rPr sz="800" b="0">
                 <a:solidFill>
                   <a:srgbClr val="68747B"/>
                 </a:solidFill>
                 <a:latin typeface="Arial"/>
               </a:rPr>
-              <a:t>Dated settlement / collateral needs can breach buffer.</a:t>
+              <a:t>Dated settlement and collateral needs can breach the buffer.</a:t>
             </a:r>
           </a:p>
         </p:txBody>
@@ -15283,13 +15609,13 @@
         </p:nvCxnSpPr>
         <p:spPr>
           <a:xfrm>
-            <a:off x="7900415" y="3858768"/>
-            <a:ext cx="3666745" cy="0"/>
+            <a:off x="8019288" y="3849624"/>
+            <a:ext cx="3538728" cy="0"/>
           </a:xfrm>
           <a:prstGeom prst="line">
             <a:avLst/>
           </a:prstGeom>
-          <a:ln w="7620">
+          <a:ln w="8255">
             <a:solidFill>
               <a:srgbClr val="C9CECB"/>
             </a:solidFill>
@@ -15318,8 +15644,8 @@
         </p:nvSpPr>
         <p:spPr>
           <a:xfrm>
-            <a:off x="7424927" y="4059935"/>
-            <a:ext cx="384048" cy="210312"/>
+            <a:off x="7543800" y="4023360"/>
+            <a:ext cx="384048" cy="201168"/>
           </a:xfrm>
           <a:prstGeom prst="rect">
             <a:avLst/>
@@ -15341,7 +15667,7 @@
               </a:spcAft>
             </a:pPr>
             <a:r>
-              <a:rPr sz="800" b="1">
+              <a:rPr sz="840" b="1">
                 <a:solidFill>
                   <a:srgbClr val="C82036"/>
                 </a:solidFill>
@@ -15360,8 +15686,8 @@
         </p:nvSpPr>
         <p:spPr>
           <a:xfrm>
-            <a:off x="7900415" y="4059935"/>
-            <a:ext cx="3547872" cy="210312"/>
+            <a:off x="8019288" y="4023360"/>
+            <a:ext cx="3474720" cy="201168"/>
           </a:xfrm>
           <a:prstGeom prst="rect">
             <a:avLst/>
@@ -15383,13 +15709,13 @@
               </a:spcAft>
             </a:pPr>
             <a:r>
-              <a:rPr sz="900" b="1">
+              <a:rPr sz="880" b="1">
                 <a:solidFill>
                   <a:srgbClr val="18232B"/>
                 </a:solidFill>
                 <a:latin typeface="Arial"/>
               </a:rPr>
-              <a:t>Funding</a:t>
+              <a:t>FUNDING</a:t>
             </a:r>
           </a:p>
         </p:txBody>
@@ -15402,8 +15728,8 @@
         </p:nvSpPr>
         <p:spPr>
           <a:xfrm>
-            <a:off x="7900415" y="4334255"/>
-            <a:ext cx="3547872" cy="393192"/>
+            <a:off x="8019288" y="4297680"/>
+            <a:ext cx="3474720" cy="402336"/>
           </a:xfrm>
           <a:prstGeom prst="rect">
             <a:avLst/>
@@ -15425,7 +15751,7 @@
               </a:spcAft>
             </a:pPr>
             <a:r>
-              <a:rPr sz="780" b="0">
+              <a:rPr sz="800" b="0">
                 <a:solidFill>
                   <a:srgbClr val="68747B"/>
                 </a:solidFill>
@@ -15444,8 +15770,8 @@
         </p:nvSpPr>
         <p:spPr>
           <a:xfrm>
-            <a:off x="7424927" y="5138928"/>
-            <a:ext cx="4160520" cy="365760"/>
+            <a:off x="7543800" y="5065776"/>
+            <a:ext cx="3931920" cy="329184"/>
           </a:xfrm>
           <a:prstGeom prst="rect">
             <a:avLst/>
@@ -15467,27 +15793,70 @@
               </a:spcAft>
             </a:pPr>
             <a:r>
-              <a:rPr sz="800" b="1">
+              <a:rPr sz="819" b="1">
                 <a:solidFill>
                   <a:srgbClr val="18232B"/>
                 </a:solidFill>
                 <a:latin typeface="Arial"/>
               </a:rPr>
-              <a:t>Other exposures: market · counterparty · reputational · legal / regulatory.</a:t>
-            </a:r>
-          </a:p>
-        </p:txBody>
-      </p:sp>
-      <p:sp>
-        <p:nvSpPr>
-          <p:cNvPr id="53" name="TextBox 52"/>
-          <p:cNvSpPr txBox="1"/>
-          <p:nvPr/>
-        </p:nvSpPr>
-        <p:spPr>
-          <a:xfrm>
-            <a:off x="566928" y="6044184"/>
-            <a:ext cx="10972800" cy="246888"/>
+              <a:t>No risk is currently scored likely in the base assessment.</a:t>
+            </a:r>
+          </a:p>
+        </p:txBody>
+      </p:sp>
+      <p:sp>
+        <p:nvSpPr>
+          <p:cNvPr id="53" name="Rectangle 52"/>
+          <p:cNvSpPr/>
+          <p:nvPr/>
+        </p:nvSpPr>
+        <p:spPr>
+          <a:xfrm>
+            <a:off x="804672" y="5833872"/>
+            <a:ext cx="201168" cy="164592"/>
+          </a:xfrm>
+          <a:prstGeom prst="rect">
+            <a:avLst/>
+          </a:prstGeom>
+          <a:solidFill>
+            <a:srgbClr val="4F8A64"/>
+          </a:solidFill>
+          <a:ln>
+            <a:noFill/>
+          </a:ln>
+        </p:spPr>
+        <p:style>
+          <a:lnRef idx="1">
+            <a:schemeClr val="accent1"/>
+          </a:lnRef>
+          <a:fillRef idx="3">
+            <a:schemeClr val="accent1"/>
+          </a:fillRef>
+          <a:effectRef idx="2">
+            <a:schemeClr val="accent1"/>
+          </a:effectRef>
+          <a:fontRef idx="minor">
+            <a:schemeClr val="lt1"/>
+          </a:fontRef>
+        </p:style>
+        <p:txBody>
+          <a:bodyPr rtlCol="0" anchor="ctr"/>
+          <a:lstStyle/>
+          <a:p>
+            <a:pPr algn="ctr"/>
+          </a:p>
+        </p:txBody>
+      </p:sp>
+      <p:sp>
+        <p:nvSpPr>
+          <p:cNvPr id="54" name="TextBox 53"/>
+          <p:cNvSpPr txBox="1"/>
+          <p:nvPr/>
+        </p:nvSpPr>
+        <p:spPr>
+          <a:xfrm>
+            <a:off x="1069848" y="5815584"/>
+            <a:ext cx="658368" cy="182880"/>
           </a:xfrm>
           <a:prstGeom prst="rect">
             <a:avLst/>
@@ -15509,13 +15878,225 @@
               </a:spcAft>
             </a:pPr>
             <a:r>
+              <a:rPr sz="720" b="0">
+                <a:solidFill>
+                  <a:srgbClr val="68747B"/>
+                </a:solidFill>
+                <a:latin typeface="Arial"/>
+              </a:rPr>
+              <a:t>Lower</a:t>
+            </a:r>
+          </a:p>
+        </p:txBody>
+      </p:sp>
+      <p:sp>
+        <p:nvSpPr>
+          <p:cNvPr id="55" name="Rectangle 54"/>
+          <p:cNvSpPr/>
+          <p:nvPr/>
+        </p:nvSpPr>
+        <p:spPr>
+          <a:xfrm>
+            <a:off x="1874519" y="5833872"/>
+            <a:ext cx="201168" cy="164592"/>
+          </a:xfrm>
+          <a:prstGeom prst="rect">
+            <a:avLst/>
+          </a:prstGeom>
+          <a:solidFill>
+            <a:srgbClr val="C49500"/>
+          </a:solidFill>
+          <a:ln>
+            <a:noFill/>
+          </a:ln>
+        </p:spPr>
+        <p:style>
+          <a:lnRef idx="1">
+            <a:schemeClr val="accent1"/>
+          </a:lnRef>
+          <a:fillRef idx="3">
+            <a:schemeClr val="accent1"/>
+          </a:fillRef>
+          <a:effectRef idx="2">
+            <a:schemeClr val="accent1"/>
+          </a:effectRef>
+          <a:fontRef idx="minor">
+            <a:schemeClr val="lt1"/>
+          </a:fontRef>
+        </p:style>
+        <p:txBody>
+          <a:bodyPr rtlCol="0" anchor="ctr"/>
+          <a:lstStyle/>
+          <a:p>
+            <a:pPr algn="ctr"/>
+          </a:p>
+        </p:txBody>
+      </p:sp>
+      <p:sp>
+        <p:nvSpPr>
+          <p:cNvPr id="56" name="TextBox 55"/>
+          <p:cNvSpPr txBox="1"/>
+          <p:nvPr/>
+        </p:nvSpPr>
+        <p:spPr>
+          <a:xfrm>
+            <a:off x="2139696" y="5815584"/>
+            <a:ext cx="804672" cy="182880"/>
+          </a:xfrm>
+          <a:prstGeom prst="rect">
+            <a:avLst/>
+          </a:prstGeom>
+          <a:noFill/>
+        </p:spPr>
+        <p:txBody>
+          <a:bodyPr wrap="square" lIns="18288" rIns="18288" tIns="18288" bIns="18288" anchor="ctr">
+            <a:spAutoFit/>
+          </a:bodyPr>
+          <a:lstStyle/>
+          <a:p>
+            <a:pPr algn="l">
+              <a:spcBef>
+                <a:spcPts val="0"/>
+              </a:spcBef>
+              <a:spcAft>
+                <a:spcPts val="0"/>
+              </a:spcAft>
+            </a:pPr>
+            <a:r>
+              <a:rPr sz="720" b="0">
+                <a:solidFill>
+                  <a:srgbClr val="68747B"/>
+                </a:solidFill>
+                <a:latin typeface="Arial"/>
+              </a:rPr>
+              <a:t>Monitor</a:t>
+            </a:r>
+          </a:p>
+        </p:txBody>
+      </p:sp>
+      <p:sp>
+        <p:nvSpPr>
+          <p:cNvPr id="57" name="Rectangle 56"/>
+          <p:cNvSpPr/>
+          <p:nvPr/>
+        </p:nvSpPr>
+        <p:spPr>
+          <a:xfrm>
+            <a:off x="3090672" y="5833872"/>
+            <a:ext cx="201168" cy="164592"/>
+          </a:xfrm>
+          <a:prstGeom prst="rect">
+            <a:avLst/>
+          </a:prstGeom>
+          <a:solidFill>
+            <a:srgbClr val="C82036"/>
+          </a:solidFill>
+          <a:ln>
+            <a:noFill/>
+          </a:ln>
+        </p:spPr>
+        <p:style>
+          <a:lnRef idx="1">
+            <a:schemeClr val="accent1"/>
+          </a:lnRef>
+          <a:fillRef idx="3">
+            <a:schemeClr val="accent1"/>
+          </a:fillRef>
+          <a:effectRef idx="2">
+            <a:schemeClr val="accent1"/>
+          </a:effectRef>
+          <a:fontRef idx="minor">
+            <a:schemeClr val="lt1"/>
+          </a:fontRef>
+        </p:style>
+        <p:txBody>
+          <a:bodyPr rtlCol="0" anchor="ctr"/>
+          <a:lstStyle/>
+          <a:p>
+            <a:pPr algn="ctr"/>
+          </a:p>
+        </p:txBody>
+      </p:sp>
+      <p:sp>
+        <p:nvSpPr>
+          <p:cNvPr id="58" name="TextBox 57"/>
+          <p:cNvSpPr txBox="1"/>
+          <p:nvPr/>
+        </p:nvSpPr>
+        <p:spPr>
+          <a:xfrm>
+            <a:off x="3355848" y="5815584"/>
+            <a:ext cx="841248" cy="182880"/>
+          </a:xfrm>
+          <a:prstGeom prst="rect">
+            <a:avLst/>
+          </a:prstGeom>
+          <a:noFill/>
+        </p:spPr>
+        <p:txBody>
+          <a:bodyPr wrap="square" lIns="18288" rIns="18288" tIns="18288" bIns="18288" anchor="ctr">
+            <a:spAutoFit/>
+          </a:bodyPr>
+          <a:lstStyle/>
+          <a:p>
+            <a:pPr algn="l">
+              <a:spcBef>
+                <a:spcPts val="0"/>
+              </a:spcBef>
+              <a:spcAft>
+                <a:spcPts val="0"/>
+              </a:spcAft>
+            </a:pPr>
+            <a:r>
+              <a:rPr sz="720" b="0">
+                <a:solidFill>
+                  <a:srgbClr val="68747B"/>
+                </a:solidFill>
+                <a:latin typeface="Arial"/>
+              </a:rPr>
+              <a:t>Priority</a:t>
+            </a:r>
+          </a:p>
+        </p:txBody>
+      </p:sp>
+      <p:sp>
+        <p:nvSpPr>
+          <p:cNvPr id="59" name="TextBox 58"/>
+          <p:cNvSpPr txBox="1"/>
+          <p:nvPr/>
+        </p:nvSpPr>
+        <p:spPr>
+          <a:xfrm>
+            <a:off x="4645152" y="5779008"/>
+            <a:ext cx="6912864" cy="292608"/>
+          </a:xfrm>
+          <a:prstGeom prst="rect">
+            <a:avLst/>
+          </a:prstGeom>
+          <a:noFill/>
+        </p:spPr>
+        <p:txBody>
+          <a:bodyPr wrap="square" lIns="18288" rIns="18288" tIns="18288" bIns="18288" anchor="ctr">
+            <a:spAutoFit/>
+          </a:bodyPr>
+          <a:lstStyle/>
+          <a:p>
+            <a:pPr algn="l">
+              <a:spcBef>
+                <a:spcPts val="0"/>
+              </a:spcBef>
+              <a:spcAft>
+                <a:spcPts val="0"/>
+              </a:spcAft>
+            </a:pPr>
+            <a:r>
               <a:rPr sz="700" b="0">
                 <a:solidFill>
                   <a:srgbClr val="68747B"/>
                 </a:solidFill>
                 <a:latin typeface="Arial"/>
               </a:rPr>
-              <a:t>Score = likelihood × impact (1–3). Illustrative analyst ratings, not UBS / regulator scores; calibrate impact to the approved buffer and re-score after containment.</a:t>
+              <a:t>Score = likelihood × impact (1–3). Analyst ratings, not UBS / regulator scores; calibrate impact to the approved buffer and re-score after containment.</a:t>
             </a:r>
           </a:p>
         </p:txBody>
